--- a/BestOf_presentation.pptx
+++ b/BestOf_presentation.pptx
@@ -5,7 +5,7 @@
     <p:sldMasterId id="2147483659" r:id="rId1"/>
   </p:sldMasterIdLst>
   <p:notesMasterIdLst>
-    <p:notesMasterId r:id="rId15"/>
+    <p:notesMasterId r:id="rId14"/>
   </p:notesMasterIdLst>
   <p:sldIdLst>
     <p:sldId id="256" r:id="rId2"/>
@@ -20,7 +20,6 @@
     <p:sldId id="265" r:id="rId11"/>
     <p:sldId id="266" r:id="rId12"/>
     <p:sldId id="267" r:id="rId13"/>
-    <p:sldId id="268" r:id="rId14"/>
   </p:sldIdLst>
   <p:sldSz cx="9144000" cy="5143500" type="screen16x9"/>
   <p:notesSz cx="6858000" cy="9144000"/>
@@ -796,9 +795,10 @@
           </a:bodyPr>
           <a:lstStyle/>
           <a:p>
-            <a:r>
-              <a:t>Open simple. Hi, I'm Sabeur. BestOf turns a pile of Amazon reviews into a short buying guide. I'll walk through the three models, how they connect, and end with a live demo.</a:t>
-            </a:r>
+            <a:pPr marL="0">
+              <a:buNone/>
+            </a:pPr>
+            <a:endParaRPr lang="en-US" sz="1400" dirty="0"/>
           </a:p>
         </p:txBody>
       </p:sp>
@@ -839,7 +839,7 @@
         </p:nvSpPr>
         <p:spPr>
           <a:xfrm>
-            <a:off x="381300" y="685800"/>
+            <a:off x="381000" y="685800"/>
             <a:ext cx="6096000" cy="3429000"/>
           </a:xfrm>
           <a:custGeom>
@@ -893,9 +893,10 @@
           </a:bodyPr>
           <a:lstStyle/>
           <a:p>
-            <a:r>
-              <a:t>Explain the gate. ROUGE here measures coverage, not truth. Both texts are built from the same facts, so what I really care about is: did the LLM mention the same products? If it dropped a section under repetition penalties, the gate fails and the deterministic article ships. The user always gets a clean, complete result.</a:t>
-            </a:r>
+            <a:pPr marL="0">
+              <a:buNone/>
+            </a:pPr>
+            <a:endParaRPr lang="en-US" sz="1400" dirty="0"/>
           </a:p>
         </p:txBody>
       </p:sp>
@@ -936,7 +937,7 @@
         </p:nvSpPr>
         <p:spPr>
           <a:xfrm>
-            <a:off x="381300" y="685800"/>
+            <a:off x="381000" y="685800"/>
             <a:ext cx="6096000" cy="3429000"/>
           </a:xfrm>
           <a:custGeom>
@@ -990,9 +991,10 @@
           </a:bodyPr>
           <a:lstStyle/>
           <a:p>
-            <a:r>
-              <a:t>Wrap with the philosophy: simple, explainable choices, connected cleanly. The hardest part was not the models. It was making the pipeline reliable enough to ship. Bonus: it is Dockerised and EC2-deployed, so this is not a notebook demo.</a:t>
-            </a:r>
+            <a:pPr marL="0">
+              <a:buNone/>
+            </a:pPr>
+            <a:endParaRPr lang="en-US" sz="1400" dirty="0"/>
           </a:p>
         </p:txBody>
       </p:sp>
@@ -1033,7 +1035,7 @@
         </p:nvSpPr>
         <p:spPr>
           <a:xfrm>
-            <a:off x="381300" y="685800"/>
+            <a:off x="381000" y="685800"/>
             <a:ext cx="6096000" cy="3429000"/>
           </a:xfrm>
           <a:custGeom>
@@ -1087,106 +1089,10 @@
           </a:bodyPr>
           <a:lstStyle/>
           <a:p>
-            <a:r>
-              <a:t>Live demo path: open the deployed URL, upload the included CSV, click Process reviews, then pick a category and generate. While the model loads, narrate what the API is doing. If the network is slow, switch to the screenshots in BESTOF_USER_GUIDE_DEPLOYMENT.md.</a:t>
-            </a:r>
-          </a:p>
-        </p:txBody>
-      </p:sp>
-    </p:spTree>
-  </p:cSld>
-  <p:clrMapOvr>
-    <a:masterClrMapping/>
-  </p:clrMapOvr>
-</p:notes>
-</file>
-
-<file path=ppt/notesSlides/notesSlide13.xml><?xml version="1.0" encoding="utf-8"?>
-<p:notes xmlns:a="http://schemas.openxmlformats.org/drawingml/2006/main" xmlns:r="http://schemas.openxmlformats.org/officeDocument/2006/relationships" xmlns:p="http://schemas.openxmlformats.org/presentationml/2006/main" showMasterSp="0" showMasterPhAnim="0">
-  <p:cSld>
-    <p:spTree>
-      <p:nvGrpSpPr>
-        <p:cNvPr id="1" name="Shape 122"/>
-        <p:cNvGrpSpPr/>
-        <p:nvPr/>
-      </p:nvGrpSpPr>
-      <p:grpSpPr>
-        <a:xfrm>
-          <a:off x="0" y="0"/>
-          <a:ext cx="0" cy="0"/>
-          <a:chOff x="0" y="0"/>
-          <a:chExt cx="0" cy="0"/>
-        </a:xfrm>
-      </p:grpSpPr>
-      <p:sp>
-        <p:nvSpPr>
-          <p:cNvPr id="123" name="Google Shape;123;g30b6cb3b851_0_11:notes"/>
-          <p:cNvSpPr>
-            <a:spLocks noGrp="1" noRot="1" noChangeAspect="1"/>
-          </p:cNvSpPr>
-          <p:nvPr>
-            <p:ph type="sldImg" idx="2"/>
-          </p:nvPr>
-        </p:nvSpPr>
-        <p:spPr>
-          <a:xfrm>
-            <a:off x="381300" y="685800"/>
-            <a:ext cx="6096000" cy="3429000"/>
-          </a:xfrm>
-          <a:custGeom>
-            <a:avLst/>
-            <a:gdLst/>
-            <a:ahLst/>
-            <a:cxnLst/>
-            <a:rect l="l" t="t" r="r" b="b"/>
-            <a:pathLst>
-              <a:path w="120000" h="120000" extrusionOk="0">
-                <a:moveTo>
-                  <a:pt x="0" y="0"/>
-                </a:moveTo>
-                <a:lnTo>
-                  <a:pt x="120000" y="0"/>
-                </a:lnTo>
-                <a:lnTo>
-                  <a:pt x="120000" y="120000"/>
-                </a:lnTo>
-                <a:lnTo>
-                  <a:pt x="0" y="120000"/>
-                </a:lnTo>
-                <a:close/>
-              </a:path>
-            </a:pathLst>
-          </a:custGeom>
-        </p:spPr>
-      </p:sp>
-      <p:sp>
-        <p:nvSpPr>
-          <p:cNvPr id="124" name="Google Shape;124;g30b6cb3b851_0_11:notes"/>
-          <p:cNvSpPr txBox="1">
-            <a:spLocks noGrp="1"/>
-          </p:cNvSpPr>
-          <p:nvPr>
-            <p:ph type="body" idx="1"/>
-          </p:nvPr>
-        </p:nvSpPr>
-        <p:spPr>
-          <a:xfrm>
-            <a:off x="685800" y="4343400"/>
-            <a:ext cx="5486400" cy="4114800"/>
-          </a:xfrm>
-          <a:prstGeom prst="rect">
-            <a:avLst/>
-          </a:prstGeom>
-        </p:spPr>
-        <p:txBody>
-          <a:bodyPr spcFirstLastPara="1" wrap="square" lIns="91425" tIns="91425" rIns="91425" bIns="91425" anchor="t" anchorCtr="0">
-            <a:noAutofit/>
-          </a:bodyPr>
-          <a:lstStyle/>
-          <a:p>
-            <a:r>
-              <a:t>Close on what is next, not on what is done. Then thank the audience and invite questions. Keep it warm and short.</a:t>
-            </a:r>
+            <a:pPr marL="0">
+              <a:buNone/>
+            </a:pPr>
+            <a:endParaRPr lang="en-US" sz="1400" dirty="0"/>
           </a:p>
         </p:txBody>
       </p:sp>
@@ -1227,7 +1133,7 @@
         </p:nvSpPr>
         <p:spPr>
           <a:xfrm>
-            <a:off x="381300" y="685800"/>
+            <a:off x="381000" y="685800"/>
             <a:ext cx="6096000" cy="3429000"/>
           </a:xfrm>
           <a:custGeom>
@@ -1281,9 +1187,10 @@
           </a:bodyPr>
           <a:lstStyle/>
           <a:p>
-            <a:r>
-              <a:t>Open with the buyer's pain: scrolling 2,000 reviews, comparing five tablets, still not deciding. BestOf removes the boring part. Mention the three numbers on screen: 28 thousand reviews became 125 products grouped into 6 categories.</a:t>
-            </a:r>
+            <a:pPr marL="0">
+              <a:buNone/>
+            </a:pPr>
+            <a:endParaRPr lang="en-US" sz="1400" dirty="0"/>
           </a:p>
         </p:txBody>
       </p:sp>
@@ -1324,7 +1231,7 @@
         </p:nvSpPr>
         <p:spPr>
           <a:xfrm>
-            <a:off x="381300" y="685800"/>
+            <a:off x="381000" y="685800"/>
             <a:ext cx="6096000" cy="3429000"/>
           </a:xfrm>
           <a:custGeom>
@@ -1378,9 +1285,10 @@
           </a:bodyPr>
           <a:lstStyle/>
           <a:p>
-            <a:r>
-              <a:t>Key idea: each model passes cleaner data to the next one. Sentiment turns 5-star ratings into clean labels. Clustering turns hundreds of messy categories into 4 to 6 groups. The LLM only sees the aggregated facts, never raw review text. That order is the whole architecture.</a:t>
-            </a:r>
+            <a:pPr marL="0">
+              <a:buNone/>
+            </a:pPr>
+            <a:endParaRPr lang="en-US" sz="1400" dirty="0"/>
           </a:p>
         </p:txBody>
       </p:sp>
@@ -1421,7 +1329,7 @@
         </p:nvSpPr>
         <p:spPr>
           <a:xfrm>
-            <a:off x="381300" y="685800"/>
+            <a:off x="381000" y="685800"/>
             <a:ext cx="6096000" cy="3429000"/>
           </a:xfrm>
           <a:custGeom>
@@ -1475,9 +1383,10 @@
           </a:bodyPr>
           <a:lstStyle/>
           <a:p>
-            <a:r>
-              <a:t>Walk the pipeline left to right: CSV in, article out. Mention preprocessing: drop empties, normalise whitespace, keep ratings 1 to 5. Then explain the ranking score: rating dominates, positive ratio shapes it, review count is normalised inside each category so a noisy product cannot win on volume alone.</a:t>
-            </a:r>
+            <a:pPr marL="0">
+              <a:buNone/>
+            </a:pPr>
+            <a:endParaRPr lang="en-US" sz="1400" dirty="0"/>
           </a:p>
         </p:txBody>
       </p:sp>
@@ -1518,7 +1427,7 @@
         </p:nvSpPr>
         <p:spPr>
           <a:xfrm>
-            <a:off x="381300" y="685800"/>
+            <a:off x="381000" y="685800"/>
             <a:ext cx="6096000" cy="3429000"/>
           </a:xfrm>
           <a:custGeom>
@@ -1572,9 +1481,10 @@
           </a:bodyPr>
           <a:lstStyle/>
           <a:p>
-            <a:r>
-              <a:t>Two paths share this slide. The batch path uses the rating mapping because it is explainable and stable. The model path uses DistilBERT on the review text. Why both? The rating is fast and trusted for ranking. The model lets the API answer single-text questions and gives me a real metric to evaluate against.</a:t>
-            </a:r>
+            <a:pPr marL="0">
+              <a:buNone/>
+            </a:pPr>
+            <a:endParaRPr lang="en-US" sz="1400" dirty="0"/>
           </a:p>
         </p:txBody>
       </p:sp>
@@ -1615,7 +1525,7 @@
         </p:nvSpPr>
         <p:spPr>
           <a:xfrm>
-            <a:off x="381300" y="685800"/>
+            <a:off x="381000" y="685800"/>
             <a:ext cx="6096000" cy="3429000"/>
           </a:xfrm>
           <a:custGeom>
@@ -1669,9 +1579,10 @@
           </a:bodyPr>
           <a:lstStyle/>
           <a:p>
-            <a:r>
-              <a:t>Read the headline numbers on the right. 91.6% of reviews land in the positive class, which matches consumer review datasets. Macro F1 is around 0.82, which is honest for a 3-class collapse from a binary model. The interesting failure case is a 5-star rating with an angry review body. The model often catches it.</a:t>
-            </a:r>
+            <a:pPr marL="0">
+              <a:buNone/>
+            </a:pPr>
+            <a:endParaRPr lang="en-US" sz="1400" dirty="0"/>
           </a:p>
         </p:txBody>
       </p:sp>
@@ -1712,7 +1623,7 @@
         </p:nvSpPr>
         <p:spPr>
           <a:xfrm>
-            <a:off x="381300" y="685800"/>
+            <a:off x="381000" y="685800"/>
             <a:ext cx="6096000" cy="3429000"/>
           </a:xfrm>
           <a:custGeom>
@@ -1766,9 +1677,10 @@
           </a:bodyPr>
           <a:lstStyle/>
           <a:p>
-            <a:r>
-              <a:t>Show the cluster name examples on the right: Tablet, Speaker Audio, Cable, etc. These were not hand-labelled. The pipeline picked the most common keywords per cluster. Why MiniLM? It is small, fast, and good enough for short product documents. I do not need a 1B parameter model to tell tablets and speakers apart.</a:t>
-            </a:r>
+            <a:pPr marL="0">
+              <a:buNone/>
+            </a:pPr>
+            <a:endParaRPr lang="en-US" sz="1400" dirty="0"/>
           </a:p>
         </p:txBody>
       </p:sp>
@@ -1809,7 +1721,7 @@
         </p:nvSpPr>
         <p:spPr>
           <a:xfrm>
-            <a:off x="381300" y="685800"/>
+            <a:off x="381000" y="685800"/>
             <a:ext cx="6096000" cy="3429000"/>
           </a:xfrm>
           <a:custGeom>
@@ -1863,9 +1775,10 @@
           </a:bodyPr>
           <a:lstStyle/>
           <a:p>
-            <a:r>
-              <a:t>Be honest here. Higher k can score better on silhouette, but a 12-category guide is not human-readable. I chose k = 6 because the buying guide is meant to be skimmed, not studied. The eyeball test matters: pure metrics can hide bad cluster names.</a:t>
-            </a:r>
+            <a:pPr marL="0">
+              <a:buNone/>
+            </a:pPr>
+            <a:endParaRPr lang="en-US" sz="1400" dirty="0"/>
           </a:p>
         </p:txBody>
       </p:sp>
@@ -1906,7 +1819,7 @@
         </p:nvSpPr>
         <p:spPr>
           <a:xfrm>
-            <a:off x="381300" y="685800"/>
+            <a:off x="381000" y="685800"/>
             <a:ext cx="6096000" cy="3429000"/>
           </a:xfrm>
           <a:custGeom>
@@ -1960,9 +1873,10 @@
           </a:bodyPr>
           <a:lstStyle/>
           <a:p>
-            <a:r>
-              <a:t>Read the sample on the right. The article names a real product, gives a rating and positive ratio, and ends with the common complaints. Important point: privacy and reliability. The LLM never reads customer review text. It only sees the structured insight. That keeps the prompt clean and prevents the model from quoting reviews back at the user.</a:t>
-            </a:r>
+            <a:pPr marL="0">
+              <a:buNone/>
+            </a:pPr>
+            <a:endParaRPr lang="en-US" sz="1400" dirty="0"/>
           </a:p>
         </p:txBody>
       </p:sp>
@@ -6760,22 +6674,27 @@
           </a:prstGeom>
         </p:spPr>
         <p:txBody>
-          <a:bodyPr spcFirstLastPara="1" wrap="square" lIns="91425" tIns="91425" rIns="91425" bIns="91425" anchor="b" anchorCtr="0">
+          <a:bodyPr spcFirstLastPara="1" wrap="square" lIns="91425" tIns="91425" rIns="91425" bIns="91425" anchor="t" anchorCtr="0">
             <a:normAutofit/>
           </a:bodyPr>
           <a:lstStyle/>
           <a:p>
-            <a:pPr marL="0" lvl="0" indent="0" algn="ctr" rtl="0">
-              <a:spcBef>
-                <a:spcPts val="0"/>
-              </a:spcBef>
-              <a:spcAft>
-                <a:spcPts val="0"/>
+            <a:pPr marL="0" lvl="0" indent="0" rtl="0">
+              <a:spcBef>
+                <a:spcPts val="0"/>
+              </a:spcBef>
+              <a:spcAft>
+                <a:spcPts val="700"/>
               </a:spcAft>
               <a:buNone/>
             </a:pPr>
             <a:r>
-              <a:rPr lang="en" dirty="0"/>
+              <a:rPr sz="4400" b="1" dirty="0" err="1">
+                <a:solidFill>
+                  <a:srgbClr val="262730"/>
+                </a:solidFill>
+                <a:latin typeface="Aptos"/>
+              </a:rPr>
               <a:t>BestOf</a:t>
             </a:r>
             <a:endParaRPr dirty="0"/>
@@ -6794,8 +6713,8 @@
         </p:nvSpPr>
         <p:spPr>
           <a:xfrm>
-            <a:off x="311700" y="2309375"/>
-            <a:ext cx="8520600" cy="1317350"/>
+            <a:off x="311700" y="2006600"/>
+            <a:ext cx="8520600" cy="2355375"/>
           </a:xfrm>
           <a:prstGeom prst="rect">
             <a:avLst/>
@@ -6803,53 +6722,91 @@
         </p:spPr>
         <p:txBody>
           <a:bodyPr spcFirstLastPara="1" wrap="square" lIns="91425" tIns="91425" rIns="91425" bIns="91425" anchor="t" anchorCtr="0">
-            <a:normAutofit fontScale="92500" lnSpcReduction="10000"/>
+            <a:normAutofit/>
           </a:bodyPr>
           <a:lstStyle/>
           <a:p>
-            <a:pPr marL="0" lvl="0" indent="0" algn="ctr" rtl="0">
-              <a:spcBef>
-                <a:spcPts val="0"/>
-              </a:spcBef>
-              <a:spcAft>
-                <a:spcPts val="0"/>
+            <a:pPr marL="0" lvl="0" indent="0" rtl="0">
+              <a:spcBef>
+                <a:spcPts val="0"/>
+              </a:spcBef>
+              <a:spcAft>
+                <a:spcPts val="700"/>
               </a:spcAft>
               <a:buNone/>
             </a:pPr>
             <a:r>
-              <a:rPr lang="en" dirty="0"/>
-              <a:t>Amazon reviews to clear buying advice</a:t>
+              <a:rPr sz="2500" b="0" dirty="0">
+                <a:solidFill>
+                  <a:srgbClr val="525B69"/>
+                </a:solidFill>
+                <a:latin typeface="Aptos"/>
+              </a:rPr>
+              <a:t>Amazon reviews into clear buying advice</a:t>
             </a:r>
-          </a:p>
-          <a:p>
-            <a:pPr marL="0" lvl="0" indent="0" algn="ctr" rtl="0">
-              <a:spcBef>
-                <a:spcPts val="0"/>
-              </a:spcBef>
-              <a:spcAft>
-                <a:spcPts val="0"/>
-              </a:spcAft>
-              <a:buNone/>
+            <a:endParaRPr lang="de-DE" sz="2500" b="0" dirty="0">
+              <a:solidFill>
+                <a:srgbClr val="525B69"/>
+              </a:solidFill>
+              <a:latin typeface="Aptos"/>
+            </a:endParaRPr>
+          </a:p>
+          <a:p>
+            <a:pPr marL="0" lvl="0" indent="0" rtl="0">
+              <a:spcBef>
+                <a:spcPts val="0"/>
+              </a:spcBef>
+              <a:spcAft>
+                <a:spcPts val="700"/>
+              </a:spcAft>
+              <a:buNone/>
+            </a:pPr>
+            <a:endParaRPr sz="2500" b="0" dirty="0">
+              <a:solidFill>
+                <a:srgbClr val="525B69"/>
+              </a:solidFill>
+              <a:latin typeface="Aptos"/>
+            </a:endParaRPr>
+          </a:p>
+          <a:p>
+            <a:pPr>
+              <a:spcAft>
+                <a:spcPts val="700"/>
+              </a:spcAft>
             </a:pPr>
             <a:r>
-              <a:rPr lang="en" dirty="0"/>
-              <a:t>Streamlit + FastAPI, deployed on EC2</a:t>
+              <a:rPr sz="2500" b="0" dirty="0" err="1">
+                <a:solidFill>
+                  <a:srgbClr val="525B69"/>
+                </a:solidFill>
+                <a:latin typeface="Aptos"/>
+              </a:rPr>
+              <a:t>Sabeur</a:t>
             </a:r>
-          </a:p>
-          <a:p>
-            <a:pPr marL="0" lvl="0" indent="0" algn="ctr" rtl="0">
-              <a:spcBef>
-                <a:spcPts val="0"/>
-              </a:spcBef>
-              <a:spcAft>
-                <a:spcPts val="0"/>
-              </a:spcAft>
-              <a:buNone/>
-            </a:pPr>
             <a:r>
-              <a:rPr lang="en" dirty="0"/>
-              <a:t>by Sabeur Zarai</a:t>
+              <a:rPr sz="2500" b="0" dirty="0">
+                <a:solidFill>
+                  <a:srgbClr val="525B69"/>
+                </a:solidFill>
+                <a:latin typeface="Aptos"/>
+              </a:rPr>
+              <a:t> </a:t>
             </a:r>
+            <a:r>
+              <a:rPr sz="2500" b="0" dirty="0" err="1">
+                <a:solidFill>
+                  <a:srgbClr val="525B69"/>
+                </a:solidFill>
+                <a:latin typeface="Aptos"/>
+              </a:rPr>
+              <a:t>Zarai</a:t>
+            </a:r>
+            <a:endParaRPr sz="2500" b="0" dirty="0">
+              <a:solidFill>
+                <a:srgbClr val="525B69"/>
+              </a:solidFill>
+              <a:latin typeface="Aptos"/>
+            </a:endParaRPr>
           </a:p>
         </p:txBody>
       </p:sp>
@@ -6908,13 +6865,18 @@
                 <a:spcPts val="0"/>
               </a:spcBef>
               <a:spcAft>
-                <a:spcPts val="0"/>
+                <a:spcPts val="700"/>
               </a:spcAft>
               <a:buNone/>
             </a:pPr>
             <a:r>
-              <a:rPr lang="en"/>
-              <a:t>Model 3 - Evaluation</a:t>
+              <a:rPr sz="3000" b="1">
+                <a:solidFill>
+                  <a:srgbClr val="262730"/>
+                </a:solidFill>
+                <a:latin typeface="Aptos"/>
+              </a:rPr>
+              <a:t>Article quality</a:t>
             </a:r>
             <a:endParaRPr/>
           </a:p>
@@ -6933,7 +6895,7 @@
         <p:spPr>
           <a:xfrm>
             <a:off x="311700" y="1152475"/>
-            <a:ext cx="8520600" cy="1900000"/>
+            <a:ext cx="8520600" cy="2564392"/>
           </a:xfrm>
           <a:prstGeom prst="rect">
             <a:avLst/>
@@ -6941,7 +6903,7 @@
         </p:spPr>
         <p:txBody>
           <a:bodyPr spcFirstLastPara="1" wrap="square" lIns="91425" tIns="91425" rIns="91425" bIns="91425" anchor="t" anchorCtr="0">
-            <a:normAutofit lnSpcReduction="10000"/>
+            <a:normAutofit fontScale="92500" lnSpcReduction="10000"/>
           </a:bodyPr>
           <a:lstStyle/>
           <a:p>
@@ -6950,58 +6912,91 @@
                 <a:spcPts val="0"/>
               </a:spcBef>
               <a:spcAft>
-                <a:spcPts val="0"/>
+                <a:spcPts val="700"/>
               </a:spcAft>
               <a:buNone/>
             </a:pPr>
             <a:r>
-              <a:rPr lang="en"/>
-              <a:t>Compared against the deterministic fallback using ROUGE-1/2/L.</a:t>
+              <a:rPr sz="2200" b="1" dirty="0">
+                <a:solidFill>
+                  <a:srgbClr val="FF4B4B"/>
+                </a:solidFill>
+                <a:latin typeface="Aptos"/>
+              </a:rPr>
+              <a:t>The goal is useful output, not fancy text.</a:t>
             </a:r>
-          </a:p>
-          <a:p>
-            <a:pPr marL="0" lvl="0" indent="0" algn="l" rtl="0">
-              <a:spcBef>
-                <a:spcPts val="0"/>
-              </a:spcBef>
-              <a:spcAft>
-                <a:spcPts val="0"/>
-              </a:spcAft>
-              <a:buNone/>
+            <a:endParaRPr lang="en-US" sz="2200" b="1" dirty="0">
+              <a:solidFill>
+                <a:srgbClr val="FF4B4B"/>
+              </a:solidFill>
+              <a:latin typeface="Aptos"/>
+            </a:endParaRPr>
+          </a:p>
+          <a:p>
+            <a:pPr>
+              <a:spcAft>
+                <a:spcPts val="700"/>
+              </a:spcAft>
+            </a:pPr>
+            <a:endParaRPr lang="en-US" sz="2200" b="1" dirty="0">
+              <a:solidFill>
+                <a:srgbClr val="FF4B4B"/>
+              </a:solidFill>
+              <a:latin typeface="Aptos"/>
+            </a:endParaRPr>
+          </a:p>
+          <a:p>
+            <a:pPr>
+              <a:spcAft>
+                <a:spcPts val="700"/>
+              </a:spcAft>
+              <a:buFont typeface="Wingdings" panose="05000000000000000000" pitchFamily="2" charset="2"/>
+              <a:buChar char="§"/>
             </a:pPr>
             <a:r>
-              <a:rPr lang="en"/>
-              <a:t>Quality gate: 150+ words, unique-word ratio &gt;= 0.35, contains 'Best overall' and 'Bottom line'.</a:t>
+              <a:rPr sz="2000" b="0" dirty="0">
+                <a:solidFill>
+                  <a:srgbClr val="262730"/>
+                </a:solidFill>
+                <a:latin typeface="Aptos"/>
+              </a:rPr>
+              <a:t>Each category gets one article.</a:t>
             </a:r>
           </a:p>
           <a:p>
-            <a:pPr marL="0" lvl="0" indent="0" algn="l" rtl="0">
-              <a:spcBef>
-                <a:spcPts val="0"/>
-              </a:spcBef>
-              <a:spcAft>
-                <a:spcPts val="0"/>
-              </a:spcAft>
-              <a:buNone/>
+            <a:pPr>
+              <a:spcAft>
+                <a:spcPts val="700"/>
+              </a:spcAft>
+              <a:buFont typeface="Wingdings" panose="05000000000000000000" pitchFamily="2" charset="2"/>
+              <a:buChar char="§"/>
             </a:pPr>
             <a:r>
-              <a:rPr lang="en"/>
-              <a:t>FLAN-T5-base sometimes drops sections; the gate catches that and the fallback ships.</a:t>
+              <a:rPr sz="2000" b="0" dirty="0">
+                <a:solidFill>
+                  <a:srgbClr val="262730"/>
+                </a:solidFill>
+                <a:latin typeface="Aptos"/>
+              </a:rPr>
+              <a:t>The article must include a best pick, alternatives, warnings, and a bottom line.</a:t>
             </a:r>
           </a:p>
           <a:p>
-            <a:pPr marL="0" lvl="0" indent="0" algn="l" rtl="0">
-              <a:spcBef>
-                <a:spcPts val="0"/>
-              </a:spcBef>
-              <a:spcAft>
-                <a:spcPts val="0"/>
-              </a:spcAft>
-              <a:buNone/>
+            <a:pPr>
+              <a:spcAft>
+                <a:spcPts val="700"/>
+              </a:spcAft>
+              <a:buFont typeface="Wingdings" panose="05000000000000000000" pitchFamily="2" charset="2"/>
+              <a:buChar char="§"/>
             </a:pPr>
             <a:r>
-              <a:rPr lang="en"/>
-              <a:t>Length and uniqueness are logged on every run as a drift signal.</a:t>
+              <a:rPr sz="2000" b="0" dirty="0">
+                <a:solidFill>
+                  <a:srgbClr val="262730"/>
+                </a:solidFill>
+                <a:latin typeface="Aptos"/>
+              </a:rPr>
+              <a:t>The fallback makes the demo stable even when the LLM is slow.</a:t>
             </a:r>
           </a:p>
         </p:txBody>
@@ -7043,30 +7038,40 @@
           </a:fontRef>
         </p:style>
         <p:txBody>
-          <a:bodyPr wrap="square" lIns="72000" tIns="36000" rIns="72000" bIns="36000" rtlCol="0" anchor="ctr"/>
+          <a:bodyPr wrap="square" lIns="72000" tIns="36000" rIns="72000" bIns="36000" rtlCol="0" anchor="t">
+            <a:normAutofit/>
+          </a:bodyPr>
           <a:lstStyle/>
           <a:p>
-            <a:pPr algn="ctr"/>
+            <a:pPr algn="ctr">
+              <a:spcAft>
+                <a:spcPts val="700"/>
+              </a:spcAft>
+            </a:pPr>
             <a:r>
-              <a:rPr sz="2800" b="1">
-                <a:solidFill>
-                  <a:srgbClr val="FFFFFF"/>
-                </a:solidFill>
-                <a:latin typeface="Calibri"/>
+              <a:rPr sz="2000" b="1">
+                <a:solidFill>
+                  <a:srgbClr val="FF4B4B"/>
+                </a:solidFill>
+                <a:latin typeface="Aptos"/>
               </a:rPr>
               <a:t>6</a:t>
             </a:r>
           </a:p>
           <a:p>
-            <a:pPr algn="ctr"/>
+            <a:pPr algn="ctr">
+              <a:spcAft>
+                <a:spcPts val="700"/>
+              </a:spcAft>
+            </a:pPr>
             <a:r>
-              <a:rPr sz="1100">
-                <a:solidFill>
-                  <a:srgbClr val="FFFFFF"/>
-                </a:solidFill>
-                <a:latin typeface="Calibri"/>
+              <a:rPr sz="2000" b="0">
+                <a:solidFill>
+                  <a:srgbClr val="525B69"/>
+                </a:solidFill>
+                <a:latin typeface="Aptos"/>
               </a:rPr>
-              <a:t>articles generated</a:t>
+              <a:t>articles</a:t>
             </a:r>
           </a:p>
         </p:txBody>
@@ -7108,30 +7113,40 @@
           </a:fontRef>
         </p:style>
         <p:txBody>
-          <a:bodyPr wrap="square" lIns="72000" tIns="36000" rIns="72000" bIns="36000" rtlCol="0" anchor="ctr"/>
+          <a:bodyPr wrap="square" lIns="72000" tIns="36000" rIns="72000" bIns="36000" rtlCol="0" anchor="t">
+            <a:normAutofit/>
+          </a:bodyPr>
           <a:lstStyle/>
           <a:p>
-            <a:pPr algn="ctr"/>
+            <a:pPr algn="ctr">
+              <a:spcAft>
+                <a:spcPts val="700"/>
+              </a:spcAft>
+            </a:pPr>
             <a:r>
-              <a:rPr sz="2800" b="1">
-                <a:solidFill>
-                  <a:srgbClr val="FFFFFF"/>
-                </a:solidFill>
-                <a:latin typeface="Calibri"/>
+              <a:rPr sz="2000" b="1">
+                <a:solidFill>
+                  <a:srgbClr val="2ECC71"/>
+                </a:solidFill>
+                <a:latin typeface="Aptos"/>
               </a:rPr>
               <a:t>0</a:t>
             </a:r>
           </a:p>
           <a:p>
-            <a:pPr algn="ctr"/>
+            <a:pPr algn="ctr">
+              <a:spcAft>
+                <a:spcPts val="700"/>
+              </a:spcAft>
+            </a:pPr>
             <a:r>
-              <a:rPr sz="1100">
-                <a:solidFill>
-                  <a:srgbClr val="FFFFFF"/>
-                </a:solidFill>
-                <a:latin typeface="Calibri"/>
+              <a:rPr sz="2000" b="0">
+                <a:solidFill>
+                  <a:srgbClr val="525B69"/>
+                </a:solidFill>
+                <a:latin typeface="Aptos"/>
               </a:rPr>
-              <a:t>raw reviews sent to LLM</a:t>
+              <a:t>raw reviews sent</a:t>
             </a:r>
           </a:p>
         </p:txBody>
@@ -7173,30 +7188,40 @@
           </a:fontRef>
         </p:style>
         <p:txBody>
-          <a:bodyPr wrap="square" lIns="72000" tIns="36000" rIns="72000" bIns="36000" rtlCol="0" anchor="ctr"/>
+          <a:bodyPr wrap="square" lIns="72000" tIns="36000" rIns="72000" bIns="36000" rtlCol="0" anchor="t">
+            <a:normAutofit/>
+          </a:bodyPr>
           <a:lstStyle/>
           <a:p>
-            <a:pPr algn="ctr"/>
+            <a:pPr algn="ctr">
+              <a:spcAft>
+                <a:spcPts val="700"/>
+              </a:spcAft>
+            </a:pPr>
             <a:r>
-              <a:rPr sz="2800" b="1">
-                <a:solidFill>
-                  <a:srgbClr val="FFFFFF"/>
-                </a:solidFill>
-                <a:latin typeface="Calibri"/>
+              <a:rPr sz="2000" b="1">
+                <a:solidFill>
+                  <a:srgbClr val="FF4B4B"/>
+                </a:solidFill>
+                <a:latin typeface="Aptos"/>
               </a:rPr>
               <a:t>Yes</a:t>
             </a:r>
           </a:p>
           <a:p>
-            <a:pPr algn="ctr"/>
+            <a:pPr algn="ctr">
+              <a:spcAft>
+                <a:spcPts val="700"/>
+              </a:spcAft>
+            </a:pPr>
             <a:r>
-              <a:rPr sz="1100">
-                <a:solidFill>
-                  <a:srgbClr val="FFFFFF"/>
-                </a:solidFill>
-                <a:latin typeface="Calibri"/>
+              <a:rPr sz="2000" b="0">
+                <a:solidFill>
+                  <a:srgbClr val="525B69"/>
+                </a:solidFill>
+                <a:latin typeface="Aptos"/>
               </a:rPr>
-              <a:t>deterministic fallback</a:t>
+              <a:t>fallback</a:t>
             </a:r>
           </a:p>
         </p:txBody>
@@ -7256,12 +7281,17 @@
                 <a:spcPts val="0"/>
               </a:spcBef>
               <a:spcAft>
-                <a:spcPts val="0"/>
+                <a:spcPts val="700"/>
               </a:spcAft>
               <a:buNone/>
             </a:pPr>
             <a:r>
-              <a:rPr lang="en"/>
+              <a:rPr sz="3000" b="1">
+                <a:solidFill>
+                  <a:srgbClr val="262730"/>
+                </a:solidFill>
+                <a:latin typeface="Aptos"/>
+              </a:rPr>
               <a:t>Takeaway</a:t>
             </a:r>
             <a:endParaRPr/>
@@ -7281,7 +7311,7 @@
         <p:spPr>
           <a:xfrm>
             <a:off x="311700" y="1152475"/>
-            <a:ext cx="8520600" cy="2200000"/>
+            <a:ext cx="8520600" cy="2792992"/>
           </a:xfrm>
           <a:prstGeom prst="rect">
             <a:avLst/>
@@ -7289,71 +7319,104 @@
         </p:spPr>
         <p:txBody>
           <a:bodyPr spcFirstLastPara="1" wrap="square" lIns="91425" tIns="91425" rIns="91425" bIns="91425" anchor="t" anchorCtr="0">
-            <a:normAutofit/>
+            <a:normAutofit lnSpcReduction="10000"/>
           </a:bodyPr>
           <a:lstStyle/>
           <a:p>
-            <a:pPr marL="457200" lvl="0" indent="-342900" algn="l" rtl="0">
-              <a:spcBef>
-                <a:spcPts val="0"/>
-              </a:spcBef>
-              <a:spcAft>
-                <a:spcPts val="0"/>
+            <a:pPr marL="114300" lvl="0" indent="0" algn="l" rtl="0">
+              <a:spcBef>
+                <a:spcPts val="0"/>
+              </a:spcBef>
+              <a:spcAft>
+                <a:spcPts val="700"/>
               </a:spcAft>
               <a:buSzPts val="1800"/>
-              <a:buChar char="●"/>
+              <a:buNone/>
             </a:pPr>
             <a:r>
-              <a:rPr lang="en"/>
-              <a:t>Three small models, one clear product: messy CSV in, readable buying guide out.</a:t>
+              <a:rPr sz="2200" b="1" dirty="0">
+                <a:solidFill>
+                  <a:srgbClr val="FF4B4B"/>
+                </a:solidFill>
+                <a:latin typeface="Aptos"/>
+              </a:rPr>
+              <a:t>A simple product built from several small parts.</a:t>
             </a:r>
           </a:p>
           <a:p>
-            <a:pPr marL="457200" lvl="0" indent="-342900" algn="l" rtl="0">
-              <a:spcBef>
-                <a:spcPts val="0"/>
-              </a:spcBef>
-              <a:spcAft>
-                <a:spcPts val="0"/>
-              </a:spcAft>
-              <a:buSzPts val="1800"/>
-              <a:buChar char="●"/>
+            <a:pPr>
+              <a:spcAft>
+                <a:spcPts val="700"/>
+              </a:spcAft>
+            </a:pPr>
+            <a:endParaRPr sz="2200" b="1" dirty="0">
+              <a:solidFill>
+                <a:srgbClr val="FF4B4B"/>
+              </a:solidFill>
+              <a:latin typeface="Aptos"/>
+            </a:endParaRPr>
+          </a:p>
+          <a:p>
+            <a:pPr>
+              <a:spcAft>
+                <a:spcPts val="700"/>
+              </a:spcAft>
+              <a:buFont typeface="Wingdings" panose="05000000000000000000" pitchFamily="2" charset="2"/>
+              <a:buChar char="§"/>
             </a:pPr>
             <a:r>
-              <a:rPr lang="en"/>
-              <a:t>Honest evaluation at every step: F1, silhouette, ROUGE plus quality gate.</a:t>
+              <a:rPr sz="2000" b="0" dirty="0" err="1">
+                <a:solidFill>
+                  <a:srgbClr val="262730"/>
+                </a:solidFill>
+                <a:latin typeface="Aptos"/>
+              </a:rPr>
+              <a:t>BestOf</a:t>
             </a:r>
-          </a:p>
-          <a:p>
-            <a:pPr marL="457200" lvl="0" indent="-342900" algn="l" rtl="0">
-              <a:spcBef>
-                <a:spcPts val="0"/>
-              </a:spcBef>
-              <a:spcAft>
-                <a:spcPts val="0"/>
-              </a:spcAft>
-              <a:buSzPts val="1800"/>
-              <a:buChar char="●"/>
+            <a:r>
+              <a:rPr sz="2000" b="0" dirty="0">
+                <a:solidFill>
+                  <a:srgbClr val="262730"/>
+                </a:solidFill>
+                <a:latin typeface="Aptos"/>
+              </a:rPr>
+              <a:t> is an end-to-end ML product.</a:t>
+            </a:r>
+          </a:p>
+          <a:p>
+            <a:pPr>
+              <a:spcAft>
+                <a:spcPts val="700"/>
+              </a:spcAft>
+              <a:buFont typeface="Wingdings" panose="05000000000000000000" pitchFamily="2" charset="2"/>
+              <a:buChar char="§"/>
             </a:pPr>
             <a:r>
-              <a:rPr lang="en"/>
-              <a:t>Safety: the LLM only ever sees aggregated facts, never customer text.</a:t>
+              <a:rPr sz="2000" b="0" dirty="0">
+                <a:solidFill>
+                  <a:srgbClr val="262730"/>
+                </a:solidFill>
+                <a:latin typeface="Aptos"/>
+              </a:rPr>
+              <a:t>It connects data cleaning, sentiment, clustering, ranking, text generation, API, UI, Docker, and EC2.</a:t>
             </a:r>
           </a:p>
           <a:p>
-            <a:pPr marL="457200" lvl="0" indent="-342900" algn="l" rtl="0">
-              <a:spcBef>
-                <a:spcPts val="0"/>
-              </a:spcBef>
-              <a:spcAft>
-                <a:spcPts val="0"/>
-              </a:spcAft>
-              <a:buSzPts val="1800"/>
-              <a:buChar char="●"/>
+            <a:pPr>
+              <a:spcAft>
+                <a:spcPts val="700"/>
+              </a:spcAft>
+              <a:buFont typeface="Wingdings" panose="05000000000000000000" pitchFamily="2" charset="2"/>
+              <a:buChar char="§"/>
             </a:pPr>
             <a:r>
-              <a:rPr lang="en"/>
-              <a:t>Robust by design: fallback keeps the app useful even without the model.</a:t>
+              <a:rPr sz="2000" b="0" dirty="0">
+                <a:solidFill>
+                  <a:srgbClr val="262730"/>
+                </a:solidFill>
+                <a:latin typeface="Aptos"/>
+              </a:rPr>
+              <a:t>The main value: the user gets a recommendation they can understand.</a:t>
             </a:r>
           </a:p>
         </p:txBody>
@@ -7678,13 +7741,18 @@
                 <a:spcPts val="0"/>
               </a:spcBef>
               <a:spcAft>
-                <a:spcPts val="0"/>
+                <a:spcPts val="700"/>
               </a:spcAft>
               <a:buNone/>
             </a:pPr>
             <a:r>
-              <a:rPr lang="en"/>
-              <a:t>Demo (3 minutes)</a:t>
+              <a:rPr sz="3000" b="1">
+                <a:solidFill>
+                  <a:srgbClr val="262730"/>
+                </a:solidFill>
+                <a:latin typeface="Aptos"/>
+              </a:rPr>
+              <a:t>Demo</a:t>
             </a:r>
             <a:endParaRPr/>
           </a:p>
@@ -7703,7 +7771,7 @@
         <p:spPr>
           <a:xfrm>
             <a:off x="311700" y="1152475"/>
-            <a:ext cx="8520600" cy="1800000"/>
+            <a:ext cx="8520600" cy="2293458"/>
           </a:xfrm>
           <a:prstGeom prst="rect">
             <a:avLst/>
@@ -7711,55 +7779,127 @@
         </p:spPr>
         <p:txBody>
           <a:bodyPr spcFirstLastPara="1" wrap="square" lIns="91425" tIns="91425" rIns="91425" bIns="91425" anchor="t" anchorCtr="0">
-            <a:normAutofit/>
+            <a:normAutofit fontScale="85000" lnSpcReduction="20000"/>
           </a:bodyPr>
           <a:lstStyle/>
           <a:p>
-            <a:pPr marL="457200" lvl="0" indent="-342900" algn="l" rtl="0">
-              <a:spcBef>
-                <a:spcPts val="0"/>
-              </a:spcBef>
-              <a:spcAft>
-                <a:spcPts val="0"/>
+            <a:pPr marL="114300" lvl="0" indent="0" algn="l" rtl="0">
+              <a:spcBef>
+                <a:spcPts val="0"/>
+              </a:spcBef>
+              <a:spcAft>
+                <a:spcPts val="700"/>
               </a:spcAft>
               <a:buSzPts val="1800"/>
-              <a:buChar char="●"/>
+              <a:buNone/>
             </a:pPr>
             <a:r>
-              <a:rPr lang="en"/>
-              <a:t>Upload a CSV, run Process reviews, pick a category, generate an article.</a:t>
+              <a:rPr sz="2200" b="1" dirty="0">
+                <a:solidFill>
+                  <a:srgbClr val="FF4B4B"/>
+                </a:solidFill>
+                <a:latin typeface="Aptos"/>
+              </a:rPr>
+              <a:t>Three minutes: from upload to recommendation.</a:t>
             </a:r>
           </a:p>
           <a:p>
-            <a:pPr marL="457200" lvl="0" indent="-342900" algn="l" rtl="0">
-              <a:spcBef>
-                <a:spcPts val="0"/>
-              </a:spcBef>
-              <a:spcAft>
-                <a:spcPts val="0"/>
-              </a:spcAft>
-              <a:buSzPts val="1800"/>
-              <a:buChar char="●"/>
+            <a:pPr>
+              <a:spcAft>
+                <a:spcPts val="700"/>
+              </a:spcAft>
+            </a:pPr>
+            <a:endParaRPr sz="2200" b="1" dirty="0">
+              <a:solidFill>
+                <a:srgbClr val="FF4B4B"/>
+              </a:solidFill>
+              <a:latin typeface="Aptos"/>
+            </a:endParaRPr>
+          </a:p>
+          <a:p>
+            <a:pPr marL="114300" indent="0">
+              <a:spcAft>
+                <a:spcPts val="700"/>
+              </a:spcAft>
+              <a:buNone/>
             </a:pPr>
             <a:r>
-              <a:rPr lang="en"/>
-              <a:t>Will show: category insights JSON and one generated buying guide.</a:t>
+              <a:rPr sz="2000" b="0" dirty="0">
+                <a:solidFill>
+                  <a:srgbClr val="262730"/>
+                </a:solidFill>
+                <a:latin typeface="Aptos"/>
+              </a:rPr>
+              <a:t>1. Open the deployed </a:t>
             </a:r>
-          </a:p>
-          <a:p>
-            <a:pPr marL="457200" lvl="0" indent="-342900" algn="l" rtl="0">
-              <a:spcBef>
-                <a:spcPts val="0"/>
-              </a:spcBef>
-              <a:spcAft>
-                <a:spcPts val="0"/>
-              </a:spcAft>
-              <a:buSzPts val="1800"/>
-              <a:buChar char="●"/>
+            <a:r>
+              <a:rPr sz="2000" b="0" dirty="0" err="1">
+                <a:solidFill>
+                  <a:srgbClr val="262730"/>
+                </a:solidFill>
+                <a:latin typeface="Aptos"/>
+              </a:rPr>
+              <a:t>Streamlit</a:t>
+            </a:r>
+            <a:r>
+              <a:rPr sz="2000" b="0" dirty="0">
+                <a:solidFill>
+                  <a:srgbClr val="262730"/>
+                </a:solidFill>
+                <a:latin typeface="Aptos"/>
+              </a:rPr>
+              <a:t> app.</a:t>
+            </a:r>
+          </a:p>
+          <a:p>
+            <a:pPr marL="114300" indent="0">
+              <a:spcAft>
+                <a:spcPts val="700"/>
+              </a:spcAft>
+              <a:buNone/>
             </a:pPr>
             <a:r>
-              <a:rPr lang="en"/>
-              <a:t>Backup: screenshots in the repo if anything goes sideways live.</a:t>
+              <a:rPr sz="2000" b="0" dirty="0">
+                <a:solidFill>
+                  <a:srgbClr val="262730"/>
+                </a:solidFill>
+                <a:latin typeface="Aptos"/>
+              </a:rPr>
+              <a:t>2. Process the review CSV.</a:t>
+            </a:r>
+          </a:p>
+          <a:p>
+            <a:pPr marL="114300" indent="0">
+              <a:spcAft>
+                <a:spcPts val="700"/>
+              </a:spcAft>
+              <a:buNone/>
+            </a:pPr>
+            <a:r>
+              <a:rPr sz="2000" b="0" dirty="0">
+                <a:solidFill>
+                  <a:srgbClr val="262730"/>
+                </a:solidFill>
+                <a:latin typeface="Aptos"/>
+              </a:rPr>
+              <a:t>3. Pick a category.</a:t>
+            </a:r>
+          </a:p>
+          <a:p>
+            <a:pPr marL="114300" indent="0">
+              <a:spcAft>
+                <a:spcPts val="700"/>
+              </a:spcAft>
+              <a:buNone/>
+            </a:pPr>
+            <a:r>
+              <a:rPr sz="2000" b="0" dirty="0">
+                <a:solidFill>
+                  <a:srgbClr val="262730"/>
+                </a:solidFill>
+                <a:latin typeface="Aptos"/>
+              </a:rPr>
+              <a:t>4. Generate the buying guide.</a:t>
             </a:r>
           </a:p>
         </p:txBody>
@@ -7772,8 +7912,8 @@
         </p:nvSpPr>
         <p:spPr>
           <a:xfrm>
-            <a:off x="1500000" y="3563500"/>
-            <a:ext cx="6144000" cy="1100000"/>
+            <a:off x="1500000" y="3563499"/>
+            <a:ext cx="6144000" cy="836563"/>
           </a:xfrm>
           <a:prstGeom prst="roundRect">
             <a:avLst/>
@@ -7803,251 +7943,63 @@
           </a:fontRef>
         </p:style>
         <p:txBody>
-          <a:bodyPr wrap="square" lIns="108000" tIns="72000" rIns="108000" bIns="72000" rtlCol="0" anchor="ctr"/>
+          <a:bodyPr wrap="square" lIns="108000" tIns="72000" rIns="108000" bIns="72000" rtlCol="0" anchor="t">
+            <a:normAutofit/>
+          </a:bodyPr>
           <a:lstStyle/>
           <a:p>
-            <a:pPr algn="ctr"/>
+            <a:pPr algn="ctr">
+              <a:spcAft>
+                <a:spcPts val="700"/>
+              </a:spcAft>
+            </a:pPr>
             <a:r>
-              <a:rPr sz="1400" b="1">
-                <a:solidFill>
-                  <a:srgbClr val="4285F4"/>
-                </a:solidFill>
-                <a:latin typeface="Calibri"/>
+              <a:rPr sz="1500" b="1" dirty="0">
+                <a:solidFill>
+                  <a:srgbClr val="262730"/>
+                </a:solidFill>
+                <a:latin typeface="Aptos"/>
               </a:rPr>
               <a:t>Live deployment</a:t>
             </a:r>
-          </a:p>
-          <a:p>
             <a:r>
-              <a:rPr sz="1400">
-                <a:solidFill>
-                  <a:srgbClr val="212121"/>
-                </a:solidFill>
-                <a:latin typeface="Calibri"/>
+              <a:rPr lang="de-DE" sz="1500" b="1" dirty="0">
+                <a:solidFill>
+                  <a:srgbClr val="262730"/>
+                </a:solidFill>
+                <a:latin typeface="Aptos"/>
               </a:rPr>
-              <a:t>http://18.157.233.122:8501/   (Streamlit UI)</a:t>
+              <a:t> on AWS</a:t>
             </a:r>
-          </a:p>
-          <a:p>
-            <a:r>
-              <a:rPr sz="1400">
-                <a:solidFill>
-                  <a:srgbClr val="212121"/>
-                </a:solidFill>
-                <a:latin typeface="Calibri"/>
-              </a:rPr>
-              <a:t>http://18.157.233.122:8000/docs   (FastAPI docs)</a:t>
-            </a:r>
-          </a:p>
-        </p:txBody>
-      </p:sp>
-    </p:spTree>
-  </p:cSld>
-  <p:clrMapOvr>
-    <a:masterClrMapping/>
-  </p:clrMapOvr>
-</p:sld>
-</file>
-
-<file path=ppt/slides/slide13.xml><?xml version="1.0" encoding="utf-8"?>
-<p:sld xmlns:a="http://schemas.openxmlformats.org/drawingml/2006/main" xmlns:r="http://schemas.openxmlformats.org/officeDocument/2006/relationships" xmlns:p="http://schemas.openxmlformats.org/presentationml/2006/main">
-  <p:cSld>
-    <p:spTree>
-      <p:nvGrpSpPr>
-        <p:cNvPr id="1" name="Shape 125"/>
-        <p:cNvGrpSpPr/>
-        <p:nvPr/>
-      </p:nvGrpSpPr>
-      <p:grpSpPr>
-        <a:xfrm>
-          <a:off x="0" y="0"/>
-          <a:ext cx="0" cy="0"/>
-          <a:chOff x="0" y="0"/>
-          <a:chExt cx="0" cy="0"/>
-        </a:xfrm>
-      </p:grpSpPr>
-      <p:sp>
-        <p:nvSpPr>
-          <p:cNvPr id="126" name="Google Shape;126;p25"/>
-          <p:cNvSpPr txBox="1">
-            <a:spLocks noGrp="1"/>
-          </p:cNvSpPr>
-          <p:nvPr>
-            <p:ph type="title"/>
-          </p:nvPr>
-        </p:nvSpPr>
-        <p:spPr>
-          <a:xfrm>
-            <a:off x="311700" y="445025"/>
-            <a:ext cx="8520600" cy="572700"/>
-          </a:xfrm>
-          <a:prstGeom prst="rect">
-            <a:avLst/>
-          </a:prstGeom>
-        </p:spPr>
-        <p:txBody>
-          <a:bodyPr spcFirstLastPara="1" wrap="square" lIns="91425" tIns="91425" rIns="91425" bIns="91425" anchor="t" anchorCtr="0">
-            <a:normAutofit fontScale="90000"/>
-          </a:bodyPr>
-          <a:lstStyle/>
-          <a:p>
-            <a:pPr marL="0" lvl="0" indent="0" algn="l" rtl="0">
-              <a:spcBef>
-                <a:spcPts val="0"/>
-              </a:spcBef>
-              <a:spcAft>
-                <a:spcPts val="0"/>
-              </a:spcAft>
-              <a:buNone/>
+            <a:endParaRPr sz="1500" b="1" dirty="0">
+              <a:solidFill>
+                <a:srgbClr val="262730"/>
+              </a:solidFill>
+              <a:latin typeface="Aptos"/>
+            </a:endParaRPr>
+          </a:p>
+          <a:p>
+            <a:pPr algn="ctr">
+              <a:spcAft>
+                <a:spcPts val="700"/>
+              </a:spcAft>
             </a:pPr>
             <a:r>
-              <a:rPr lang="en"/>
-              <a:t>Next steps</a:t>
+              <a:rPr sz="1500" b="1" dirty="0">
+                <a:solidFill>
+                  <a:srgbClr val="262730"/>
+                </a:solidFill>
+                <a:latin typeface="Aptos"/>
+                <a:hlinkClick r:id="rId3"/>
+              </a:rPr>
+              <a:t>http://18.157.233.122:8501/</a:t>
             </a:r>
-            <a:endParaRPr/>
-          </a:p>
-        </p:txBody>
-      </p:sp>
-      <p:sp>
-        <p:nvSpPr>
-          <p:cNvPr id="127" name="Google Shape;127;p25"/>
-          <p:cNvSpPr txBox="1">
-            <a:spLocks noGrp="1"/>
-          </p:cNvSpPr>
-          <p:nvPr>
-            <p:ph type="body" idx="1"/>
-          </p:nvPr>
-        </p:nvSpPr>
-        <p:spPr>
-          <a:xfrm>
-            <a:off x="311700" y="1152475"/>
-            <a:ext cx="8520600" cy="2400000"/>
-          </a:xfrm>
-          <a:prstGeom prst="rect">
-            <a:avLst/>
-          </a:prstGeom>
-        </p:spPr>
-        <p:txBody>
-          <a:bodyPr spcFirstLastPara="1" wrap="square" lIns="91425" tIns="91425" rIns="91425" bIns="91425" anchor="t" anchorCtr="0">
-            <a:normAutofit fontScale="85000" lnSpcReduction="20000"/>
-          </a:bodyPr>
-          <a:lstStyle/>
-          <a:p>
-            <a:pPr marL="457200" lvl="0" indent="-325755" algn="l" rtl="0">
-              <a:spcBef>
-                <a:spcPts val="0"/>
-              </a:spcBef>
-              <a:spcAft>
-                <a:spcPts val="0"/>
-              </a:spcAft>
-              <a:buSzPct val="100000"/>
-              <a:buChar char="●"/>
-            </a:pPr>
-            <a:r>
-              <a:rPr lang="en"/>
-              <a:t>Stronger sentiment model that catches sarcasm and mixed reviews.</a:t>
-            </a:r>
-          </a:p>
-          <a:p>
-            <a:pPr marL="457200" lvl="0" indent="-325755" algn="l" rtl="0">
-              <a:spcBef>
-                <a:spcPts val="0"/>
-              </a:spcBef>
-              <a:spcAft>
-                <a:spcPts val="0"/>
-              </a:spcAft>
-              <a:buSzPct val="100000"/>
-              <a:buChar char="●"/>
-            </a:pPr>
-            <a:r>
-              <a:rPr lang="en"/>
-              <a:t>Cleaner cluster names tied to a real product taxonomy.</a:t>
-            </a:r>
-          </a:p>
-          <a:p>
-            <a:pPr marL="457200" lvl="0" indent="-325755" algn="l" rtl="0">
-              <a:spcBef>
-                <a:spcPts val="0"/>
-              </a:spcBef>
-              <a:spcAft>
-                <a:spcPts val="0"/>
-              </a:spcAft>
-              <a:buSzPct val="100000"/>
-              <a:buChar char="●"/>
-            </a:pPr>
-            <a:r>
-              <a:rPr lang="en"/>
-              <a:t>User filters: price, complaint type, minimum review volume.</a:t>
-            </a:r>
-          </a:p>
-          <a:p>
-            <a:pPr marL="457200" lvl="0" indent="-325755" algn="l" rtl="0">
-              <a:spcBef>
-                <a:spcPts val="0"/>
-              </a:spcBef>
-              <a:spcAft>
-                <a:spcPts val="0"/>
-              </a:spcAft>
-              <a:buSzPct val="100000"/>
-              <a:buChar char="●"/>
-            </a:pPr>
-            <a:r>
-              <a:rPr lang="en"/>
-              <a:t>Keep the UI fast: the buyer should get an answer in seconds.</a:t>
-            </a:r>
-          </a:p>
-        </p:txBody>
-      </p:sp>
-      <p:sp>
-        <p:nvSpPr>
-          <p:cNvPr id="128" name="Rounded Rectangle 127"/>
-          <p:cNvSpPr/>
-          <p:nvPr/>
-        </p:nvSpPr>
-        <p:spPr>
-          <a:xfrm>
-            <a:off x="2972000" y="4063500"/>
-            <a:ext cx="3200000" cy="700000"/>
-          </a:xfrm>
-          <a:prstGeom prst="roundRect">
-            <a:avLst/>
-          </a:prstGeom>
-          <a:solidFill>
-            <a:srgbClr val="212121"/>
-          </a:solidFill>
-          <a:ln>
-            <a:noFill/>
-          </a:ln>
-          <a:effectLst/>
-        </p:spPr>
-        <p:style>
-          <a:lnRef idx="1">
-            <a:schemeClr val="accent1"/>
-          </a:lnRef>
-          <a:fillRef idx="3">
-            <a:schemeClr val="accent1"/>
-          </a:fillRef>
-          <a:effectRef idx="2">
-            <a:schemeClr val="accent1"/>
-          </a:effectRef>
-          <a:fontRef idx="minor">
-            <a:schemeClr val="lt1"/>
-          </a:fontRef>
-        </p:style>
-        <p:txBody>
-          <a:bodyPr lIns="72000" tIns="36000" rIns="72000" bIns="36000" rtlCol="0" anchor="ctr"/>
-          <a:lstStyle/>
-          <a:p>
-            <a:pPr algn="ctr"/>
-            <a:r>
-              <a:rPr sz="1300" b="1">
-                <a:solidFill>
-                  <a:srgbClr val="FFFFFF"/>
-                </a:solidFill>
-                <a:latin typeface="Calibri"/>
-              </a:rPr>
-              <a:t>Thank you - questions?</a:t>
-            </a:r>
+            <a:endParaRPr sz="1500" b="1" dirty="0">
+              <a:solidFill>
+                <a:srgbClr val="262730"/>
+              </a:solidFill>
+              <a:latin typeface="Aptos"/>
+            </a:endParaRPr>
           </a:p>
         </p:txBody>
       </p:sp>
@@ -8106,12 +8058,17 @@
                 <a:spcPts val="0"/>
               </a:spcBef>
               <a:spcAft>
-                <a:spcPts val="0"/>
+                <a:spcPts val="700"/>
               </a:spcAft>
               <a:buNone/>
             </a:pPr>
             <a:r>
-              <a:rPr lang="en"/>
+              <a:rPr sz="3000" b="1">
+                <a:solidFill>
+                  <a:srgbClr val="262730"/>
+                </a:solidFill>
+                <a:latin typeface="Aptos"/>
+              </a:rPr>
               <a:t>The pitch</a:t>
             </a:r>
             <a:endParaRPr/>
@@ -8131,7 +8088,7 @@
         <p:spPr>
           <a:xfrm>
             <a:off x="311700" y="1152475"/>
-            <a:ext cx="8520600" cy="1700000"/>
+            <a:ext cx="8520600" cy="2335792"/>
           </a:xfrm>
           <a:prstGeom prst="rect">
             <a:avLst/>
@@ -8139,7 +8096,7 @@
         </p:spPr>
         <p:txBody>
           <a:bodyPr spcFirstLastPara="1" wrap="square" lIns="91425" tIns="91425" rIns="91425" bIns="91425" anchor="t" anchorCtr="0">
-            <a:normAutofit/>
+            <a:normAutofit fontScale="92500" lnSpcReduction="20000"/>
           </a:bodyPr>
           <a:lstStyle/>
           <a:p>
@@ -8148,43 +8105,94 @@
                 <a:spcPts val="0"/>
               </a:spcBef>
               <a:spcAft>
-                <a:spcPts val="0"/>
+                <a:spcPts val="700"/>
               </a:spcAft>
               <a:buNone/>
             </a:pPr>
             <a:r>
-              <a:rPr lang="en"/>
-              <a:t>Buyers drown in reviews and still leave the page unsure.</a:t>
+              <a:rPr sz="2200" b="1" dirty="0">
+                <a:solidFill>
+                  <a:srgbClr val="FF4B4B"/>
+                </a:solidFill>
+                <a:latin typeface="Aptos"/>
+              </a:rPr>
+              <a:t>Messy reviews in. Clear advice out.</a:t>
             </a:r>
           </a:p>
           <a:p>
-            <a:pPr marL="0" lvl="0" indent="0" algn="l" rtl="0">
-              <a:spcBef>
-                <a:spcPts val="0"/>
-              </a:spcBef>
-              <a:spcAft>
-                <a:spcPts val="0"/>
-              </a:spcAft>
-              <a:buNone/>
+            <a:pPr>
+              <a:spcAft>
+                <a:spcPts val="700"/>
+              </a:spcAft>
+            </a:pPr>
+            <a:endParaRPr sz="2200" b="1" dirty="0">
+              <a:solidFill>
+                <a:srgbClr val="FF4B4B"/>
+              </a:solidFill>
+              <a:latin typeface="Aptos"/>
+            </a:endParaRPr>
+          </a:p>
+          <a:p>
+            <a:pPr>
+              <a:spcAft>
+                <a:spcPts val="700"/>
+              </a:spcAft>
+              <a:buFont typeface="Wingdings" panose="05000000000000000000" pitchFamily="2" charset="2"/>
+              <a:buChar char="§"/>
             </a:pPr>
             <a:r>
-              <a:rPr lang="en"/>
-              <a:t>BestOf reads them, groups similar products, picks the best, and writes a guide.</a:t>
+              <a:rPr sz="2000" b="0" dirty="0" err="1">
+                <a:solidFill>
+                  <a:srgbClr val="262730"/>
+                </a:solidFill>
+                <a:latin typeface="Aptos"/>
+              </a:rPr>
+              <a:t>BestOf</a:t>
             </a:r>
-          </a:p>
-          <a:p>
-            <a:pPr marL="0" lvl="0" indent="0" algn="l" rtl="0">
-              <a:spcBef>
-                <a:spcPts val="0"/>
-              </a:spcBef>
-              <a:spcAft>
-                <a:spcPts val="0"/>
-              </a:spcAft>
-              <a:buNone/>
+            <a:r>
+              <a:rPr sz="2000" b="0" dirty="0">
+                <a:solidFill>
+                  <a:srgbClr val="262730"/>
+                </a:solidFill>
+                <a:latin typeface="Aptos"/>
+              </a:rPr>
+              <a:t> turns thousands of Amazon reviews into a short buying guide.</a:t>
+            </a:r>
+          </a:p>
+          <a:p>
+            <a:pPr>
+              <a:spcAft>
+                <a:spcPts val="700"/>
+              </a:spcAft>
+              <a:buFont typeface="Wingdings" panose="05000000000000000000" pitchFamily="2" charset="2"/>
+              <a:buChar char="§"/>
             </a:pPr>
             <a:r>
-              <a:rPr lang="en"/>
-              <a:t>Upload a CSV, click a button, get a Wirecutter-style article per category.</a:t>
+              <a:rPr sz="2000" b="0" dirty="0">
+                <a:solidFill>
+                  <a:srgbClr val="262730"/>
+                </a:solidFill>
+                <a:latin typeface="Aptos"/>
+              </a:rPr>
+              <a:t>Upload a CSV, process the reviews, choose a category, and get the best picks.</a:t>
+            </a:r>
+          </a:p>
+          <a:p>
+            <a:pPr>
+              <a:spcAft>
+                <a:spcPts val="700"/>
+              </a:spcAft>
+              <a:buFont typeface="Wingdings" panose="05000000000000000000" pitchFamily="2" charset="2"/>
+              <a:buChar char="§"/>
+            </a:pPr>
+            <a:r>
+              <a:rPr sz="2000" b="0" dirty="0">
+                <a:solidFill>
+                  <a:srgbClr val="262730"/>
+                </a:solidFill>
+                <a:latin typeface="Aptos"/>
+              </a:rPr>
+              <a:t>The user saves time and still sees the reason behind the recommendation.</a:t>
             </a:r>
           </a:p>
         </p:txBody>
@@ -8197,7 +8205,7 @@
         </p:nvSpPr>
         <p:spPr>
           <a:xfrm>
-            <a:off x="822000" y="3763500"/>
+            <a:off x="889733" y="3598475"/>
             <a:ext cx="2400000" cy="1100000"/>
           </a:xfrm>
           <a:prstGeom prst="roundRect">
@@ -8226,28 +8234,38 @@
           </a:fontRef>
         </p:style>
         <p:txBody>
-          <a:bodyPr wrap="square" lIns="72000" tIns="36000" rIns="72000" bIns="36000" rtlCol="0" anchor="ctr"/>
+          <a:bodyPr wrap="square" lIns="72000" tIns="36000" rIns="72000" bIns="36000" rtlCol="0" anchor="t">
+            <a:normAutofit/>
+          </a:bodyPr>
           <a:lstStyle/>
           <a:p>
-            <a:pPr algn="ctr"/>
+            <a:pPr algn="ctr">
+              <a:spcAft>
+                <a:spcPts val="700"/>
+              </a:spcAft>
+            </a:pPr>
             <a:r>
-              <a:rPr sz="2800" b="1">
-                <a:solidFill>
-                  <a:srgbClr val="FFFFFF"/>
-                </a:solidFill>
-                <a:latin typeface="Calibri"/>
+              <a:rPr sz="2400" b="1" dirty="0">
+                <a:solidFill>
+                  <a:srgbClr val="FF4B4B"/>
+                </a:solidFill>
+                <a:latin typeface="Aptos"/>
               </a:rPr>
-              <a:t>28k+</a:t>
+              <a:t>57,418</a:t>
             </a:r>
           </a:p>
           <a:p>
-            <a:pPr algn="ctr"/>
+            <a:pPr algn="ctr">
+              <a:spcAft>
+                <a:spcPts val="700"/>
+              </a:spcAft>
+            </a:pPr>
             <a:r>
-              <a:rPr sz="1100">
-                <a:solidFill>
-                  <a:srgbClr val="FFFFFF"/>
-                </a:solidFill>
-                <a:latin typeface="Calibri"/>
+              <a:rPr sz="2400" b="0" dirty="0">
+                <a:solidFill>
+                  <a:srgbClr val="525B69"/>
+                </a:solidFill>
+                <a:latin typeface="Aptos"/>
               </a:rPr>
               <a:t>clean reviews</a:t>
             </a:r>
@@ -8262,7 +8280,7 @@
         </p:nvSpPr>
         <p:spPr>
           <a:xfrm>
-            <a:off x="3372000" y="3763500"/>
+            <a:off x="3439733" y="3598475"/>
             <a:ext cx="2400000" cy="1100000"/>
           </a:xfrm>
           <a:prstGeom prst="roundRect">
@@ -8291,30 +8309,40 @@
           </a:fontRef>
         </p:style>
         <p:txBody>
-          <a:bodyPr wrap="square" lIns="72000" tIns="36000" rIns="72000" bIns="36000" rtlCol="0" anchor="ctr"/>
+          <a:bodyPr wrap="square" lIns="72000" tIns="36000" rIns="72000" bIns="36000" rtlCol="0" anchor="t">
+            <a:normAutofit/>
+          </a:bodyPr>
           <a:lstStyle/>
           <a:p>
-            <a:pPr algn="ctr"/>
+            <a:pPr algn="ctr">
+              <a:spcAft>
+                <a:spcPts val="700"/>
+              </a:spcAft>
+            </a:pPr>
             <a:r>
-              <a:rPr sz="2800" b="1">
-                <a:solidFill>
-                  <a:srgbClr val="FFFFFF"/>
-                </a:solidFill>
-                <a:latin typeface="Calibri"/>
+              <a:rPr sz="2400" b="1">
+                <a:solidFill>
+                  <a:srgbClr val="2ECC71"/>
+                </a:solidFill>
+                <a:latin typeface="Aptos"/>
               </a:rPr>
               <a:t>125</a:t>
             </a:r>
           </a:p>
           <a:p>
-            <a:pPr algn="ctr"/>
+            <a:pPr algn="ctr">
+              <a:spcAft>
+                <a:spcPts val="700"/>
+              </a:spcAft>
+            </a:pPr>
             <a:r>
-              <a:rPr sz="1100">
-                <a:solidFill>
-                  <a:srgbClr val="FFFFFF"/>
-                </a:solidFill>
-                <a:latin typeface="Calibri"/>
+              <a:rPr sz="2400" b="0">
+                <a:solidFill>
+                  <a:srgbClr val="525B69"/>
+                </a:solidFill>
+                <a:latin typeface="Aptos"/>
               </a:rPr>
-              <a:t>unique products</a:t>
+              <a:t>products</a:t>
             </a:r>
           </a:p>
         </p:txBody>
@@ -8327,7 +8355,7 @@
         </p:nvSpPr>
         <p:spPr>
           <a:xfrm>
-            <a:off x="5922000" y="3763500"/>
+            <a:off x="5989733" y="3598475"/>
             <a:ext cx="2400000" cy="1100000"/>
           </a:xfrm>
           <a:prstGeom prst="roundRect">
@@ -8356,30 +8384,40 @@
           </a:fontRef>
         </p:style>
         <p:txBody>
-          <a:bodyPr wrap="square" lIns="72000" tIns="36000" rIns="72000" bIns="36000" rtlCol="0" anchor="ctr"/>
+          <a:bodyPr wrap="square" lIns="72000" tIns="36000" rIns="72000" bIns="36000" rtlCol="0" anchor="t">
+            <a:normAutofit/>
+          </a:bodyPr>
           <a:lstStyle/>
           <a:p>
-            <a:pPr algn="ctr"/>
+            <a:pPr algn="ctr">
+              <a:spcAft>
+                <a:spcPts val="700"/>
+              </a:spcAft>
+            </a:pPr>
             <a:r>
-              <a:rPr sz="2800" b="1">
-                <a:solidFill>
-                  <a:srgbClr val="FFFFFF"/>
-                </a:solidFill>
-                <a:latin typeface="Calibri"/>
+              <a:rPr sz="2400" b="1">
+                <a:solidFill>
+                  <a:srgbClr val="FF4B4B"/>
+                </a:solidFill>
+                <a:latin typeface="Aptos"/>
               </a:rPr>
               <a:t>6</a:t>
             </a:r>
           </a:p>
           <a:p>
-            <a:pPr algn="ctr"/>
+            <a:pPr algn="ctr">
+              <a:spcAft>
+                <a:spcPts val="700"/>
+              </a:spcAft>
+            </a:pPr>
             <a:r>
-              <a:rPr sz="1100">
-                <a:solidFill>
-                  <a:srgbClr val="FFFFFF"/>
-                </a:solidFill>
-                <a:latin typeface="Calibri"/>
+              <a:rPr sz="2400" b="0">
+                <a:solidFill>
+                  <a:srgbClr val="525B69"/>
+                </a:solidFill>
+                <a:latin typeface="Aptos"/>
               </a:rPr>
-              <a:t>category groups</a:t>
+              <a:t>groups</a:t>
             </a:r>
           </a:p>
         </p:txBody>
@@ -8439,13 +8477,18 @@
                 <a:spcPts val="0"/>
               </a:spcBef>
               <a:spcAft>
-                <a:spcPts val="0"/>
+                <a:spcPts val="700"/>
               </a:spcAft>
               <a:buNone/>
             </a:pPr>
             <a:r>
-              <a:rPr lang="en"/>
-              <a:t>Introduction</a:t>
+              <a:rPr sz="3000" b="1">
+                <a:solidFill>
+                  <a:srgbClr val="262730"/>
+                </a:solidFill>
+                <a:latin typeface="Aptos"/>
+              </a:rPr>
+              <a:t>BestOf pipeline</a:t>
             </a:r>
             <a:endParaRPr/>
           </a:p>
@@ -8463,8 +8506,8 @@
         </p:nvSpPr>
         <p:spPr>
           <a:xfrm>
-            <a:off x="311700" y="1152475"/>
-            <a:ext cx="8520600" cy="3416400"/>
+            <a:off x="311700" y="1006518"/>
+            <a:ext cx="8520600" cy="516636"/>
           </a:xfrm>
           <a:prstGeom prst="rect">
             <a:avLst/>
@@ -8472,71 +8515,3557 @@
         </p:spPr>
         <p:txBody>
           <a:bodyPr spcFirstLastPara="1" wrap="square" lIns="91425" tIns="91425" rIns="91425" bIns="91425" anchor="t" anchorCtr="0">
+            <a:normAutofit fontScale="92500" lnSpcReduction="20000"/>
+          </a:bodyPr>
+          <a:lstStyle/>
+          <a:p>
+            <a:pPr marL="0" lvl="0" indent="0" algn="l" rtl="0">
+              <a:spcBef>
+                <a:spcPts val="0"/>
+              </a:spcBef>
+              <a:spcAft>
+                <a:spcPts val="700"/>
+              </a:spcAft>
+              <a:buNone/>
+            </a:pPr>
+            <a:r>
+              <a:rPr sz="1700" b="0" dirty="0">
+                <a:solidFill>
+                  <a:srgbClr val="525B69"/>
+                </a:solidFill>
+                <a:latin typeface="Aptos"/>
+              </a:rPr>
+              <a:t>A simple flow from raw reviews to a shopper-friendly recommendation.</a:t>
+            </a:r>
+          </a:p>
+        </p:txBody>
+      </p:sp>
+      <p:sp>
+        <p:nvSpPr>
+          <p:cNvPr id="68" name="Rounded Rectangle 67"/>
+          <p:cNvSpPr/>
+          <p:nvPr/>
+        </p:nvSpPr>
+        <p:spPr>
+          <a:xfrm>
+            <a:off x="463636" y="1509438"/>
+            <a:ext cx="1417320" cy="3246120"/>
+          </a:xfrm>
+          <a:prstGeom prst="roundRect">
+            <a:avLst/>
+          </a:prstGeom>
+          <a:solidFill>
+            <a:srgbClr val="FDFEFF"/>
+          </a:solidFill>
+          <a:ln w="12700">
+            <a:solidFill>
+              <a:srgbClr val="D2DCE8"/>
+            </a:solidFill>
+          </a:ln>
+        </p:spPr>
+        <p:style>
+          <a:lnRef idx="1">
+            <a:schemeClr val="accent1"/>
+          </a:lnRef>
+          <a:fillRef idx="3">
+            <a:schemeClr val="accent1"/>
+          </a:fillRef>
+          <a:effectRef idx="2">
+            <a:schemeClr val="accent1"/>
+          </a:effectRef>
+          <a:fontRef idx="minor">
+            <a:schemeClr val="lt1"/>
+          </a:fontRef>
+        </p:style>
+        <p:txBody>
+          <a:bodyPr rtlCol="0" anchor="ctr"/>
+          <a:lstStyle/>
+          <a:p>
+            <a:pPr algn="ctr"/>
+            <a:endParaRPr/>
+          </a:p>
+        </p:txBody>
+      </p:sp>
+      <p:sp>
+        <p:nvSpPr>
+          <p:cNvPr id="69" name="TextBox 68"/>
+          <p:cNvSpPr txBox="1"/>
+          <p:nvPr/>
+        </p:nvSpPr>
+        <p:spPr>
+          <a:xfrm>
+            <a:off x="573364" y="1655742"/>
+            <a:ext cx="1197864" cy="256032"/>
+          </a:xfrm>
+          <a:prstGeom prst="rect">
+            <a:avLst/>
+          </a:prstGeom>
+          <a:noFill/>
+        </p:spPr>
+        <p:txBody>
+          <a:bodyPr wrap="square" anchor="t">
             <a:normAutofit/>
           </a:bodyPr>
           <a:lstStyle/>
           <a:p>
-            <a:pPr marL="0" lvl="0" indent="0" algn="l" rtl="0">
-              <a:spcBef>
-                <a:spcPts val="0"/>
-              </a:spcBef>
-              <a:spcAft>
-                <a:spcPts val="0"/>
-              </a:spcAft>
-              <a:buNone/>
-            </a:pPr>
+            <a:pPr algn="ctr"/>
             <a:r>
-              <a:rPr lang="en"/>
-              <a:t>One product, three small models that build on each other.</a:t>
+              <a:rPr sz="900" b="1">
+                <a:solidFill>
+                  <a:srgbClr val="174A80"/>
+                </a:solidFill>
+                <a:latin typeface="Aptos"/>
+              </a:rPr>
+              <a:t>AMAZON REVIEWS</a:t>
             </a:r>
           </a:p>
-          <a:p>
-            <a:pPr marL="0" lvl="0" indent="0" algn="l" rtl="0">
-              <a:spcBef>
-                <a:spcPts val="0"/>
-              </a:spcBef>
-              <a:spcAft>
-                <a:spcPts val="0"/>
-              </a:spcAft>
-              <a:buNone/>
-            </a:pPr>
+        </p:txBody>
+      </p:sp>
+      <p:sp>
+        <p:nvSpPr>
+          <p:cNvPr id="70" name="TextBox 69"/>
+          <p:cNvSpPr txBox="1"/>
+          <p:nvPr/>
+        </p:nvSpPr>
+        <p:spPr>
+          <a:xfrm>
+            <a:off x="628228" y="1984926"/>
+            <a:ext cx="1188720" cy="164592"/>
+          </a:xfrm>
+          <a:prstGeom prst="rect">
+            <a:avLst/>
+          </a:prstGeom>
+          <a:noFill/>
+        </p:spPr>
+        <p:txBody>
+          <a:bodyPr wrap="square" anchor="t">
+            <a:noAutofit/>
+          </a:bodyPr>
+          <a:lstStyle/>
+          <a:p>
+            <a:pPr algn="l"/>
             <a:r>
-              <a:rPr lang="en"/>
-              <a:t>Sentiment labels every review. Clustering organises noisy categories.</a:t>
+              <a:rPr sz="900" b="1" dirty="0">
+                <a:solidFill>
+                  <a:srgbClr val="262730"/>
+                </a:solidFill>
+                <a:latin typeface="Aptos"/>
+              </a:rPr>
+              <a:t>Raw data</a:t>
             </a:r>
           </a:p>
-          <a:p>
-            <a:pPr marL="0" lvl="0" indent="0" algn="l" rtl="0">
-              <a:spcBef>
-                <a:spcPts val="0"/>
-              </a:spcBef>
-              <a:spcAft>
-                <a:spcPts val="0"/>
-              </a:spcAft>
-              <a:buNone/>
-            </a:pPr>
+        </p:txBody>
+      </p:sp>
+      <p:sp>
+        <p:nvSpPr>
+          <p:cNvPr id="71" name="TextBox 70"/>
+          <p:cNvSpPr txBox="1"/>
+          <p:nvPr/>
+        </p:nvSpPr>
+        <p:spPr>
+          <a:xfrm>
+            <a:off x="628228" y="2204382"/>
+            <a:ext cx="1161288" cy="868680"/>
+          </a:xfrm>
+          <a:prstGeom prst="rect">
+            <a:avLst/>
+          </a:prstGeom>
+          <a:noFill/>
+        </p:spPr>
+        <p:txBody>
+          <a:bodyPr wrap="square" anchor="t">
+            <a:noAutofit/>
+          </a:bodyPr>
+          <a:lstStyle/>
+          <a:p>
+            <a:pPr algn="l"/>
             <a:r>
-              <a:rPr lang="en"/>
-              <a:t>A small generative model writes the article from aggregated facts only.</a:t>
+              <a:rPr sz="1100" b="0" dirty="0">
+                <a:solidFill>
+                  <a:srgbClr val="262730"/>
+                </a:solidFill>
+                <a:latin typeface="Aptos"/>
+              </a:rPr>
+              <a:t>• review title
+• review text
+• rating 1-5
+• product name
+• category</a:t>
             </a:r>
           </a:p>
-          <a:p>
-            <a:pPr marL="0" lvl="0" indent="0" algn="l" rtl="0">
-              <a:spcBef>
-                <a:spcPts val="0"/>
-              </a:spcBef>
-              <a:spcAft>
-                <a:spcPts val="0"/>
-              </a:spcAft>
-              <a:buNone/>
-            </a:pPr>
+        </p:txBody>
+      </p:sp>
+      <p:sp>
+        <p:nvSpPr>
+          <p:cNvPr id="72" name="Rounded Rectangle 71"/>
+          <p:cNvSpPr/>
+          <p:nvPr/>
+        </p:nvSpPr>
+        <p:spPr>
+          <a:xfrm>
+            <a:off x="646516" y="3658278"/>
+            <a:ext cx="1051560" cy="566928"/>
+          </a:xfrm>
+          <a:prstGeom prst="roundRect">
+            <a:avLst/>
+          </a:prstGeom>
+          <a:solidFill>
+            <a:srgbClr val="FFFFFF"/>
+          </a:solidFill>
+          <a:ln w="12700">
+            <a:solidFill>
+              <a:srgbClr val="D2DCE8"/>
+            </a:solidFill>
+          </a:ln>
+        </p:spPr>
+        <p:style>
+          <a:lnRef idx="1">
+            <a:schemeClr val="accent1"/>
+          </a:lnRef>
+          <a:fillRef idx="3">
+            <a:schemeClr val="accent1"/>
+          </a:fillRef>
+          <a:effectRef idx="2">
+            <a:schemeClr val="accent1"/>
+          </a:effectRef>
+          <a:fontRef idx="minor">
+            <a:schemeClr val="lt1"/>
+          </a:fontRef>
+        </p:style>
+        <p:txBody>
+          <a:bodyPr wrap="square" rtlCol="0" anchor="t">
+            <a:normAutofit/>
+          </a:bodyPr>
+          <a:lstStyle/>
+          <a:p>
+            <a:pPr algn="l"/>
             <a:r>
-              <a:rPr lang="en"/>
-              <a:t>FastAPI is the engine, Streamlit is the friendly front door.</a:t>
+              <a:rPr sz="800" b="1">
+                <a:solidFill>
+                  <a:srgbClr val="F6C44B"/>
+                </a:solidFill>
+                <a:latin typeface="Aptos"/>
+              </a:rPr>
+              <a:t>★★★★★
+review text...</a:t>
             </a:r>
           </a:p>
         </p:txBody>
       </p:sp>
+      <p:sp>
+        <p:nvSpPr>
+          <p:cNvPr id="73" name="Rounded Rectangle 72"/>
+          <p:cNvSpPr/>
+          <p:nvPr/>
+        </p:nvSpPr>
+        <p:spPr>
+          <a:xfrm>
+            <a:off x="2082124" y="1509438"/>
+            <a:ext cx="1620352" cy="3246120"/>
+          </a:xfrm>
+          <a:prstGeom prst="roundRect">
+            <a:avLst/>
+          </a:prstGeom>
+          <a:solidFill>
+            <a:srgbClr val="F8FFFB"/>
+          </a:solidFill>
+          <a:ln w="12700">
+            <a:solidFill>
+              <a:srgbClr val="D2DCE8"/>
+            </a:solidFill>
+          </a:ln>
+        </p:spPr>
+        <p:style>
+          <a:lnRef idx="1">
+            <a:schemeClr val="accent1"/>
+          </a:lnRef>
+          <a:fillRef idx="3">
+            <a:schemeClr val="accent1"/>
+          </a:fillRef>
+          <a:effectRef idx="2">
+            <a:schemeClr val="accent1"/>
+          </a:effectRef>
+          <a:fontRef idx="minor">
+            <a:schemeClr val="lt1"/>
+          </a:fontRef>
+        </p:style>
+        <p:txBody>
+          <a:bodyPr rtlCol="0" anchor="ctr"/>
+          <a:lstStyle/>
+          <a:p>
+            <a:pPr algn="ctr"/>
+            <a:endParaRPr/>
+          </a:p>
+        </p:txBody>
+      </p:sp>
+      <p:sp>
+        <p:nvSpPr>
+          <p:cNvPr id="74" name="TextBox 73"/>
+          <p:cNvSpPr txBox="1"/>
+          <p:nvPr/>
+        </p:nvSpPr>
+        <p:spPr>
+          <a:xfrm>
+            <a:off x="2191852" y="1628310"/>
+            <a:ext cx="1197864" cy="228600"/>
+          </a:xfrm>
+          <a:prstGeom prst="rect">
+            <a:avLst/>
+          </a:prstGeom>
+          <a:noFill/>
+        </p:spPr>
+        <p:txBody>
+          <a:bodyPr wrap="square" anchor="t">
+            <a:normAutofit fontScale="77500" lnSpcReduction="20000"/>
+          </a:bodyPr>
+          <a:lstStyle/>
+          <a:p>
+            <a:pPr algn="ctr"/>
+            <a:r>
+              <a:rPr sz="1000" b="1">
+                <a:solidFill>
+                  <a:srgbClr val="219664"/>
+                </a:solidFill>
+                <a:latin typeface="Aptos"/>
+              </a:rPr>
+              <a:t>1. SENTIMENT MODEL</a:t>
+            </a:r>
+          </a:p>
+        </p:txBody>
+      </p:sp>
+      <p:sp>
+        <p:nvSpPr>
+          <p:cNvPr id="75" name="TextBox 74"/>
+          <p:cNvSpPr txBox="1"/>
+          <p:nvPr/>
+        </p:nvSpPr>
+        <p:spPr>
+          <a:xfrm>
+            <a:off x="2210140" y="1893486"/>
+            <a:ext cx="1161288" cy="310896"/>
+          </a:xfrm>
+          <a:prstGeom prst="rect">
+            <a:avLst/>
+          </a:prstGeom>
+          <a:noFill/>
+        </p:spPr>
+        <p:txBody>
+          <a:bodyPr wrap="square" anchor="t">
+            <a:noAutofit/>
+          </a:bodyPr>
+          <a:lstStyle/>
+          <a:p>
+            <a:pPr algn="ctr"/>
+            <a:r>
+              <a:rPr sz="1000" b="1" dirty="0">
+                <a:solidFill>
+                  <a:srgbClr val="262730"/>
+                </a:solidFill>
+                <a:latin typeface="Aptos"/>
+              </a:rPr>
+              <a:t>Classify each review</a:t>
+            </a:r>
+          </a:p>
+        </p:txBody>
+      </p:sp>
+      <p:sp>
+        <p:nvSpPr>
+          <p:cNvPr id="76" name="Oval 75"/>
+          <p:cNvSpPr/>
+          <p:nvPr/>
+        </p:nvSpPr>
+        <p:spPr>
+          <a:xfrm>
+            <a:off x="2246716" y="2442126"/>
+            <a:ext cx="310896" cy="310896"/>
+          </a:xfrm>
+          <a:prstGeom prst="ellipse">
+            <a:avLst/>
+          </a:prstGeom>
+          <a:solidFill>
+            <a:srgbClr val="219664"/>
+          </a:solidFill>
+          <a:ln>
+            <a:solidFill>
+              <a:srgbClr val="FFFFFF"/>
+            </a:solidFill>
+          </a:ln>
+        </p:spPr>
+        <p:style>
+          <a:lnRef idx="1">
+            <a:schemeClr val="accent1"/>
+          </a:lnRef>
+          <a:fillRef idx="3">
+            <a:schemeClr val="accent1"/>
+          </a:fillRef>
+          <a:effectRef idx="2">
+            <a:schemeClr val="accent1"/>
+          </a:effectRef>
+          <a:fontRef idx="minor">
+            <a:schemeClr val="lt1"/>
+          </a:fontRef>
+        </p:style>
+        <p:txBody>
+          <a:bodyPr rtlCol="0" anchor="ctr"/>
+          <a:lstStyle/>
+          <a:p>
+            <a:pPr algn="ctr"/>
+            <a:endParaRPr/>
+          </a:p>
+        </p:txBody>
+      </p:sp>
+      <p:sp>
+        <p:nvSpPr>
+          <p:cNvPr id="77" name="Oval 76"/>
+          <p:cNvSpPr/>
+          <p:nvPr/>
+        </p:nvSpPr>
+        <p:spPr>
+          <a:xfrm>
+            <a:off x="2338156" y="2551854"/>
+            <a:ext cx="32004" cy="32004"/>
+          </a:xfrm>
+          <a:prstGeom prst="ellipse">
+            <a:avLst/>
+          </a:prstGeom>
+          <a:solidFill>
+            <a:srgbClr val="262730"/>
+          </a:solidFill>
+          <a:ln w="5080">
+            <a:solidFill>
+              <a:srgbClr val="FFFFFF"/>
+            </a:solidFill>
+          </a:ln>
+        </p:spPr>
+        <p:style>
+          <a:lnRef idx="1">
+            <a:schemeClr val="accent1"/>
+          </a:lnRef>
+          <a:fillRef idx="3">
+            <a:schemeClr val="accent1"/>
+          </a:fillRef>
+          <a:effectRef idx="2">
+            <a:schemeClr val="accent1"/>
+          </a:effectRef>
+          <a:fontRef idx="minor">
+            <a:schemeClr val="lt1"/>
+          </a:fontRef>
+        </p:style>
+        <p:txBody>
+          <a:bodyPr rtlCol="0" anchor="ctr"/>
+          <a:lstStyle/>
+          <a:p>
+            <a:pPr algn="ctr"/>
+            <a:endParaRPr/>
+          </a:p>
+        </p:txBody>
+      </p:sp>
+      <p:sp>
+        <p:nvSpPr>
+          <p:cNvPr id="78" name="Oval 77"/>
+          <p:cNvSpPr/>
+          <p:nvPr/>
+        </p:nvSpPr>
+        <p:spPr>
+          <a:xfrm>
+            <a:off x="2447884" y="2551854"/>
+            <a:ext cx="32004" cy="32004"/>
+          </a:xfrm>
+          <a:prstGeom prst="ellipse">
+            <a:avLst/>
+          </a:prstGeom>
+          <a:solidFill>
+            <a:srgbClr val="262730"/>
+          </a:solidFill>
+          <a:ln w="5080">
+            <a:solidFill>
+              <a:srgbClr val="FFFFFF"/>
+            </a:solidFill>
+          </a:ln>
+        </p:spPr>
+        <p:style>
+          <a:lnRef idx="1">
+            <a:schemeClr val="accent1"/>
+          </a:lnRef>
+          <a:fillRef idx="3">
+            <a:schemeClr val="accent1"/>
+          </a:fillRef>
+          <a:effectRef idx="2">
+            <a:schemeClr val="accent1"/>
+          </a:effectRef>
+          <a:fontRef idx="minor">
+            <a:schemeClr val="lt1"/>
+          </a:fontRef>
+        </p:style>
+        <p:txBody>
+          <a:bodyPr rtlCol="0" anchor="ctr"/>
+          <a:lstStyle/>
+          <a:p>
+            <a:pPr algn="ctr"/>
+            <a:endParaRPr/>
+          </a:p>
+        </p:txBody>
+      </p:sp>
+      <p:sp>
+        <p:nvSpPr>
+          <p:cNvPr id="79" name="TextBox 78"/>
+          <p:cNvSpPr txBox="1"/>
+          <p:nvPr/>
+        </p:nvSpPr>
+        <p:spPr>
+          <a:xfrm>
+            <a:off x="2351872" y="2560998"/>
+            <a:ext cx="109728" cy="109728"/>
+          </a:xfrm>
+          <a:prstGeom prst="rect">
+            <a:avLst/>
+          </a:prstGeom>
+          <a:noFill/>
+        </p:spPr>
+        <p:txBody>
+          <a:bodyPr wrap="square" anchor="t">
+            <a:normAutofit fontScale="25000" lnSpcReduction="20000"/>
+          </a:bodyPr>
+          <a:lstStyle/>
+          <a:p>
+            <a:pPr algn="ctr"/>
+            <a:r>
+              <a:rPr sz="1000" b="1">
+                <a:solidFill>
+                  <a:srgbClr val="262730"/>
+                </a:solidFill>
+                <a:latin typeface="Aptos"/>
+              </a:rPr>
+              <a:t>⌣</a:t>
+            </a:r>
+          </a:p>
+        </p:txBody>
+      </p:sp>
+      <p:sp>
+        <p:nvSpPr>
+          <p:cNvPr id="80" name="TextBox 79"/>
+          <p:cNvSpPr txBox="1"/>
+          <p:nvPr/>
+        </p:nvSpPr>
+        <p:spPr>
+          <a:xfrm>
+            <a:off x="2200996" y="2807886"/>
+            <a:ext cx="438912" cy="182880"/>
+          </a:xfrm>
+          <a:prstGeom prst="rect">
+            <a:avLst/>
+          </a:prstGeom>
+          <a:noFill/>
+        </p:spPr>
+        <p:txBody>
+          <a:bodyPr wrap="square" anchor="t">
+            <a:normAutofit fontScale="77500" lnSpcReduction="20000"/>
+          </a:bodyPr>
+          <a:lstStyle/>
+          <a:p>
+            <a:pPr algn="ctr"/>
+            <a:r>
+              <a:rPr sz="700" b="1" dirty="0">
+                <a:solidFill>
+                  <a:srgbClr val="262730"/>
+                </a:solidFill>
+                <a:latin typeface="Aptos"/>
+              </a:rPr>
+              <a:t>Positive</a:t>
+            </a:r>
+          </a:p>
+        </p:txBody>
+      </p:sp>
+      <p:sp>
+        <p:nvSpPr>
+          <p:cNvPr id="81" name="Oval 80"/>
+          <p:cNvSpPr/>
+          <p:nvPr/>
+        </p:nvSpPr>
+        <p:spPr>
+          <a:xfrm>
+            <a:off x="2639908" y="2442126"/>
+            <a:ext cx="310896" cy="310896"/>
+          </a:xfrm>
+          <a:prstGeom prst="ellipse">
+            <a:avLst/>
+          </a:prstGeom>
+          <a:solidFill>
+            <a:srgbClr val="F6C44B"/>
+          </a:solidFill>
+          <a:ln>
+            <a:solidFill>
+              <a:srgbClr val="FFFFFF"/>
+            </a:solidFill>
+          </a:ln>
+        </p:spPr>
+        <p:style>
+          <a:lnRef idx="1">
+            <a:schemeClr val="accent1"/>
+          </a:lnRef>
+          <a:fillRef idx="3">
+            <a:schemeClr val="accent1"/>
+          </a:fillRef>
+          <a:effectRef idx="2">
+            <a:schemeClr val="accent1"/>
+          </a:effectRef>
+          <a:fontRef idx="minor">
+            <a:schemeClr val="lt1"/>
+          </a:fontRef>
+        </p:style>
+        <p:txBody>
+          <a:bodyPr rtlCol="0" anchor="ctr"/>
+          <a:lstStyle/>
+          <a:p>
+            <a:pPr algn="ctr"/>
+            <a:endParaRPr/>
+          </a:p>
+        </p:txBody>
+      </p:sp>
+      <p:sp>
+        <p:nvSpPr>
+          <p:cNvPr id="82" name="Oval 81"/>
+          <p:cNvSpPr/>
+          <p:nvPr/>
+        </p:nvSpPr>
+        <p:spPr>
+          <a:xfrm>
+            <a:off x="2731348" y="2551854"/>
+            <a:ext cx="32004" cy="32004"/>
+          </a:xfrm>
+          <a:prstGeom prst="ellipse">
+            <a:avLst/>
+          </a:prstGeom>
+          <a:solidFill>
+            <a:srgbClr val="262730"/>
+          </a:solidFill>
+          <a:ln w="5080">
+            <a:solidFill>
+              <a:srgbClr val="FFFFFF"/>
+            </a:solidFill>
+          </a:ln>
+        </p:spPr>
+        <p:style>
+          <a:lnRef idx="1">
+            <a:schemeClr val="accent1"/>
+          </a:lnRef>
+          <a:fillRef idx="3">
+            <a:schemeClr val="accent1"/>
+          </a:fillRef>
+          <a:effectRef idx="2">
+            <a:schemeClr val="accent1"/>
+          </a:effectRef>
+          <a:fontRef idx="minor">
+            <a:schemeClr val="lt1"/>
+          </a:fontRef>
+        </p:style>
+        <p:txBody>
+          <a:bodyPr rtlCol="0" anchor="ctr"/>
+          <a:lstStyle/>
+          <a:p>
+            <a:pPr algn="ctr"/>
+            <a:endParaRPr/>
+          </a:p>
+        </p:txBody>
+      </p:sp>
+      <p:sp>
+        <p:nvSpPr>
+          <p:cNvPr id="83" name="Oval 82"/>
+          <p:cNvSpPr/>
+          <p:nvPr/>
+        </p:nvSpPr>
+        <p:spPr>
+          <a:xfrm>
+            <a:off x="2841076" y="2551854"/>
+            <a:ext cx="32004" cy="32004"/>
+          </a:xfrm>
+          <a:prstGeom prst="ellipse">
+            <a:avLst/>
+          </a:prstGeom>
+          <a:solidFill>
+            <a:srgbClr val="262730"/>
+          </a:solidFill>
+          <a:ln w="5080">
+            <a:solidFill>
+              <a:srgbClr val="FFFFFF"/>
+            </a:solidFill>
+          </a:ln>
+        </p:spPr>
+        <p:style>
+          <a:lnRef idx="1">
+            <a:schemeClr val="accent1"/>
+          </a:lnRef>
+          <a:fillRef idx="3">
+            <a:schemeClr val="accent1"/>
+          </a:fillRef>
+          <a:effectRef idx="2">
+            <a:schemeClr val="accent1"/>
+          </a:effectRef>
+          <a:fontRef idx="minor">
+            <a:schemeClr val="lt1"/>
+          </a:fontRef>
+        </p:style>
+        <p:txBody>
+          <a:bodyPr rtlCol="0" anchor="ctr"/>
+          <a:lstStyle/>
+          <a:p>
+            <a:pPr algn="ctr"/>
+            <a:endParaRPr/>
+          </a:p>
+        </p:txBody>
+      </p:sp>
+      <p:sp>
+        <p:nvSpPr>
+          <p:cNvPr id="84" name="TextBox 83"/>
+          <p:cNvSpPr txBox="1"/>
+          <p:nvPr/>
+        </p:nvSpPr>
+        <p:spPr>
+          <a:xfrm>
+            <a:off x="2749636" y="2588430"/>
+            <a:ext cx="100584" cy="91440"/>
+          </a:xfrm>
+          <a:prstGeom prst="rect">
+            <a:avLst/>
+          </a:prstGeom>
+          <a:noFill/>
+        </p:spPr>
+        <p:txBody>
+          <a:bodyPr wrap="square" anchor="t">
+            <a:normAutofit fontScale="25000" lnSpcReduction="20000"/>
+          </a:bodyPr>
+          <a:lstStyle/>
+          <a:p>
+            <a:pPr algn="ctr"/>
+            <a:r>
+              <a:rPr sz="900" b="1">
+                <a:solidFill>
+                  <a:srgbClr val="262730"/>
+                </a:solidFill>
+                <a:latin typeface="Aptos"/>
+              </a:rPr>
+              <a:t>—</a:t>
+            </a:r>
+          </a:p>
+        </p:txBody>
+      </p:sp>
+      <p:sp>
+        <p:nvSpPr>
+          <p:cNvPr id="85" name="TextBox 84"/>
+          <p:cNvSpPr txBox="1"/>
+          <p:nvPr/>
+        </p:nvSpPr>
+        <p:spPr>
+          <a:xfrm>
+            <a:off x="2594188" y="2807886"/>
+            <a:ext cx="438912" cy="182880"/>
+          </a:xfrm>
+          <a:prstGeom prst="rect">
+            <a:avLst/>
+          </a:prstGeom>
+          <a:noFill/>
+        </p:spPr>
+        <p:txBody>
+          <a:bodyPr wrap="square" anchor="t">
+            <a:normAutofit fontScale="77500" lnSpcReduction="20000"/>
+          </a:bodyPr>
+          <a:lstStyle/>
+          <a:p>
+            <a:pPr algn="ctr"/>
+            <a:r>
+              <a:rPr sz="700" b="1" dirty="0">
+                <a:solidFill>
+                  <a:srgbClr val="262730"/>
+                </a:solidFill>
+                <a:latin typeface="Aptos"/>
+              </a:rPr>
+              <a:t>Neutral</a:t>
+            </a:r>
+          </a:p>
+        </p:txBody>
+      </p:sp>
+      <p:sp>
+        <p:nvSpPr>
+          <p:cNvPr id="86" name="Oval 85"/>
+          <p:cNvSpPr/>
+          <p:nvPr/>
+        </p:nvSpPr>
+        <p:spPr>
+          <a:xfrm>
+            <a:off x="3033100" y="2442126"/>
+            <a:ext cx="310896" cy="310896"/>
+          </a:xfrm>
+          <a:prstGeom prst="ellipse">
+            <a:avLst/>
+          </a:prstGeom>
+          <a:solidFill>
+            <a:srgbClr val="FF4B4B"/>
+          </a:solidFill>
+          <a:ln>
+            <a:solidFill>
+              <a:srgbClr val="FFFFFF"/>
+            </a:solidFill>
+          </a:ln>
+        </p:spPr>
+        <p:style>
+          <a:lnRef idx="1">
+            <a:schemeClr val="accent1"/>
+          </a:lnRef>
+          <a:fillRef idx="3">
+            <a:schemeClr val="accent1"/>
+          </a:fillRef>
+          <a:effectRef idx="2">
+            <a:schemeClr val="accent1"/>
+          </a:effectRef>
+          <a:fontRef idx="minor">
+            <a:schemeClr val="lt1"/>
+          </a:fontRef>
+        </p:style>
+        <p:txBody>
+          <a:bodyPr rtlCol="0" anchor="ctr"/>
+          <a:lstStyle/>
+          <a:p>
+            <a:pPr algn="ctr"/>
+            <a:endParaRPr/>
+          </a:p>
+        </p:txBody>
+      </p:sp>
+      <p:sp>
+        <p:nvSpPr>
+          <p:cNvPr id="87" name="Oval 86"/>
+          <p:cNvSpPr/>
+          <p:nvPr/>
+        </p:nvSpPr>
+        <p:spPr>
+          <a:xfrm>
+            <a:off x="3124540" y="2551854"/>
+            <a:ext cx="32004" cy="32004"/>
+          </a:xfrm>
+          <a:prstGeom prst="ellipse">
+            <a:avLst/>
+          </a:prstGeom>
+          <a:solidFill>
+            <a:srgbClr val="262730"/>
+          </a:solidFill>
+          <a:ln w="5080">
+            <a:solidFill>
+              <a:srgbClr val="FFFFFF"/>
+            </a:solidFill>
+          </a:ln>
+        </p:spPr>
+        <p:style>
+          <a:lnRef idx="1">
+            <a:schemeClr val="accent1"/>
+          </a:lnRef>
+          <a:fillRef idx="3">
+            <a:schemeClr val="accent1"/>
+          </a:fillRef>
+          <a:effectRef idx="2">
+            <a:schemeClr val="accent1"/>
+          </a:effectRef>
+          <a:fontRef idx="minor">
+            <a:schemeClr val="lt1"/>
+          </a:fontRef>
+        </p:style>
+        <p:txBody>
+          <a:bodyPr rtlCol="0" anchor="ctr"/>
+          <a:lstStyle/>
+          <a:p>
+            <a:pPr algn="ctr"/>
+            <a:endParaRPr/>
+          </a:p>
+        </p:txBody>
+      </p:sp>
+      <p:sp>
+        <p:nvSpPr>
+          <p:cNvPr id="88" name="Oval 87"/>
+          <p:cNvSpPr/>
+          <p:nvPr/>
+        </p:nvSpPr>
+        <p:spPr>
+          <a:xfrm>
+            <a:off x="3234268" y="2551854"/>
+            <a:ext cx="32004" cy="32004"/>
+          </a:xfrm>
+          <a:prstGeom prst="ellipse">
+            <a:avLst/>
+          </a:prstGeom>
+          <a:solidFill>
+            <a:srgbClr val="262730"/>
+          </a:solidFill>
+          <a:ln w="5080">
+            <a:solidFill>
+              <a:srgbClr val="FFFFFF"/>
+            </a:solidFill>
+          </a:ln>
+        </p:spPr>
+        <p:style>
+          <a:lnRef idx="1">
+            <a:schemeClr val="accent1"/>
+          </a:lnRef>
+          <a:fillRef idx="3">
+            <a:schemeClr val="accent1"/>
+          </a:fillRef>
+          <a:effectRef idx="2">
+            <a:schemeClr val="accent1"/>
+          </a:effectRef>
+          <a:fontRef idx="minor">
+            <a:schemeClr val="lt1"/>
+          </a:fontRef>
+        </p:style>
+        <p:txBody>
+          <a:bodyPr rtlCol="0" anchor="ctr"/>
+          <a:lstStyle/>
+          <a:p>
+            <a:pPr algn="ctr"/>
+            <a:endParaRPr/>
+          </a:p>
+        </p:txBody>
+      </p:sp>
+      <p:sp>
+        <p:nvSpPr>
+          <p:cNvPr id="89" name="TextBox 88"/>
+          <p:cNvSpPr txBox="1"/>
+          <p:nvPr/>
+        </p:nvSpPr>
+        <p:spPr>
+          <a:xfrm>
+            <a:off x="3138256" y="2597574"/>
+            <a:ext cx="109728" cy="109728"/>
+          </a:xfrm>
+          <a:prstGeom prst="rect">
+            <a:avLst/>
+          </a:prstGeom>
+          <a:noFill/>
+        </p:spPr>
+        <p:txBody>
+          <a:bodyPr wrap="square" anchor="t">
+            <a:normAutofit fontScale="25000" lnSpcReduction="20000"/>
+          </a:bodyPr>
+          <a:lstStyle/>
+          <a:p>
+            <a:pPr algn="ctr"/>
+            <a:r>
+              <a:rPr sz="1000" b="1">
+                <a:solidFill>
+                  <a:srgbClr val="262730"/>
+                </a:solidFill>
+                <a:latin typeface="Aptos"/>
+              </a:rPr>
+              <a:t>⌢</a:t>
+            </a:r>
+          </a:p>
+        </p:txBody>
+      </p:sp>
+      <p:sp>
+        <p:nvSpPr>
+          <p:cNvPr id="90" name="TextBox 89"/>
+          <p:cNvSpPr txBox="1"/>
+          <p:nvPr/>
+        </p:nvSpPr>
+        <p:spPr>
+          <a:xfrm>
+            <a:off x="2987380" y="2807886"/>
+            <a:ext cx="438912" cy="182880"/>
+          </a:xfrm>
+          <a:prstGeom prst="rect">
+            <a:avLst/>
+          </a:prstGeom>
+          <a:noFill/>
+        </p:spPr>
+        <p:txBody>
+          <a:bodyPr wrap="square" anchor="t">
+            <a:normAutofit fontScale="77500" lnSpcReduction="20000"/>
+          </a:bodyPr>
+          <a:lstStyle/>
+          <a:p>
+            <a:pPr algn="ctr"/>
+            <a:r>
+              <a:rPr sz="700" b="1" dirty="0">
+                <a:solidFill>
+                  <a:srgbClr val="262730"/>
+                </a:solidFill>
+                <a:latin typeface="Aptos"/>
+              </a:rPr>
+              <a:t>Negative</a:t>
+            </a:r>
+          </a:p>
+        </p:txBody>
+      </p:sp>
+      <p:sp>
+        <p:nvSpPr>
+          <p:cNvPr id="91" name="Rounded Rectangle 90"/>
+          <p:cNvSpPr/>
+          <p:nvPr/>
+        </p:nvSpPr>
+        <p:spPr>
+          <a:xfrm>
+            <a:off x="2158380" y="3630846"/>
+            <a:ext cx="630936" cy="585216"/>
+          </a:xfrm>
+          <a:prstGeom prst="roundRect">
+            <a:avLst/>
+          </a:prstGeom>
+          <a:solidFill>
+            <a:srgbClr val="FFFFFF"/>
+          </a:solidFill>
+          <a:ln w="12700">
+            <a:solidFill>
+              <a:srgbClr val="D2DCE8"/>
+            </a:solidFill>
+          </a:ln>
+        </p:spPr>
+        <p:style>
+          <a:lnRef idx="1">
+            <a:schemeClr val="accent1"/>
+          </a:lnRef>
+          <a:fillRef idx="3">
+            <a:schemeClr val="accent1"/>
+          </a:fillRef>
+          <a:effectRef idx="2">
+            <a:schemeClr val="accent1"/>
+          </a:effectRef>
+          <a:fontRef idx="minor">
+            <a:schemeClr val="lt1"/>
+          </a:fontRef>
+        </p:style>
+        <p:txBody>
+          <a:bodyPr wrap="square" rtlCol="0" anchor="t">
+            <a:normAutofit/>
+          </a:bodyPr>
+          <a:lstStyle/>
+          <a:p>
+            <a:pPr algn="l"/>
+            <a:r>
+              <a:rPr sz="800" b="0" dirty="0">
+                <a:solidFill>
+                  <a:srgbClr val="262730"/>
+                </a:solidFill>
+                <a:latin typeface="Aptos"/>
+              </a:rPr>
+              <a:t>INPUT
+rating</a:t>
+            </a:r>
+          </a:p>
+        </p:txBody>
+      </p:sp>
+      <p:sp>
+        <p:nvSpPr>
+          <p:cNvPr id="92" name="Rounded Rectangle 91"/>
+          <p:cNvSpPr/>
+          <p:nvPr/>
+        </p:nvSpPr>
+        <p:spPr>
+          <a:xfrm>
+            <a:off x="2953908" y="3630846"/>
+            <a:ext cx="694604" cy="585216"/>
+          </a:xfrm>
+          <a:prstGeom prst="roundRect">
+            <a:avLst/>
+          </a:prstGeom>
+          <a:solidFill>
+            <a:srgbClr val="FFFFFF"/>
+          </a:solidFill>
+          <a:ln w="12700">
+            <a:solidFill>
+              <a:srgbClr val="D2DCE8"/>
+            </a:solidFill>
+          </a:ln>
+        </p:spPr>
+        <p:style>
+          <a:lnRef idx="1">
+            <a:schemeClr val="accent1"/>
+          </a:lnRef>
+          <a:fillRef idx="3">
+            <a:schemeClr val="accent1"/>
+          </a:fillRef>
+          <a:effectRef idx="2">
+            <a:schemeClr val="accent1"/>
+          </a:effectRef>
+          <a:fontRef idx="minor">
+            <a:schemeClr val="lt1"/>
+          </a:fontRef>
+        </p:style>
+        <p:txBody>
+          <a:bodyPr wrap="square" rtlCol="0" anchor="t">
+            <a:normAutofit/>
+          </a:bodyPr>
+          <a:lstStyle/>
+          <a:p>
+            <a:pPr algn="l"/>
+            <a:r>
+              <a:rPr sz="800" b="0" dirty="0">
+                <a:solidFill>
+                  <a:srgbClr val="262730"/>
+                </a:solidFill>
+                <a:latin typeface="Aptos"/>
+              </a:rPr>
+              <a:t>OUTPUT
+sentiment</a:t>
+            </a:r>
+          </a:p>
+        </p:txBody>
+      </p:sp>
+      <p:cxnSp>
+        <p:nvCxnSpPr>
+          <p:cNvPr id="93" name="Connector 92"/>
+          <p:cNvCxnSpPr>
+            <a:cxnSpLocks/>
+            <a:endCxn id="92" idx="1"/>
+          </p:cNvCxnSpPr>
+          <p:nvPr/>
+        </p:nvCxnSpPr>
+        <p:spPr>
+          <a:xfrm>
+            <a:off x="2807604" y="3923454"/>
+            <a:ext cx="146304" cy="0"/>
+          </a:xfrm>
+          <a:prstGeom prst="line">
+            <a:avLst/>
+          </a:prstGeom>
+          <a:ln w="31750">
+            <a:solidFill>
+              <a:srgbClr val="174A80"/>
+            </a:solidFill>
+          </a:ln>
+        </p:spPr>
+        <p:style>
+          <a:lnRef idx="2">
+            <a:schemeClr val="accent1"/>
+          </a:lnRef>
+          <a:fillRef idx="0">
+            <a:schemeClr val="accent1"/>
+          </a:fillRef>
+          <a:effectRef idx="1">
+            <a:schemeClr val="accent1"/>
+          </a:effectRef>
+          <a:fontRef idx="minor">
+            <a:schemeClr val="tx1"/>
+          </a:fontRef>
+        </p:style>
+      </p:cxnSp>
+      <p:sp>
+        <p:nvSpPr>
+          <p:cNvPr id="94" name="Rounded Rectangle 93"/>
+          <p:cNvSpPr/>
+          <p:nvPr/>
+        </p:nvSpPr>
+        <p:spPr>
+          <a:xfrm>
+            <a:off x="3963080" y="1509438"/>
+            <a:ext cx="1417320" cy="3246120"/>
+          </a:xfrm>
+          <a:prstGeom prst="roundRect">
+            <a:avLst/>
+          </a:prstGeom>
+          <a:solidFill>
+            <a:srgbClr val="F8FBFF"/>
+          </a:solidFill>
+          <a:ln w="12700">
+            <a:solidFill>
+              <a:srgbClr val="D2DCE8"/>
+            </a:solidFill>
+          </a:ln>
+        </p:spPr>
+        <p:style>
+          <a:lnRef idx="1">
+            <a:schemeClr val="accent1"/>
+          </a:lnRef>
+          <a:fillRef idx="3">
+            <a:schemeClr val="accent1"/>
+          </a:fillRef>
+          <a:effectRef idx="2">
+            <a:schemeClr val="accent1"/>
+          </a:effectRef>
+          <a:fontRef idx="minor">
+            <a:schemeClr val="lt1"/>
+          </a:fontRef>
+        </p:style>
+        <p:txBody>
+          <a:bodyPr rtlCol="0" anchor="ctr"/>
+          <a:lstStyle/>
+          <a:p>
+            <a:pPr algn="ctr"/>
+            <a:endParaRPr/>
+          </a:p>
+        </p:txBody>
+      </p:sp>
+      <p:sp>
+        <p:nvSpPr>
+          <p:cNvPr id="95" name="TextBox 94"/>
+          <p:cNvSpPr txBox="1"/>
+          <p:nvPr/>
+        </p:nvSpPr>
+        <p:spPr>
+          <a:xfrm>
+            <a:off x="4072808" y="1628310"/>
+            <a:ext cx="1197864" cy="228600"/>
+          </a:xfrm>
+          <a:prstGeom prst="rect">
+            <a:avLst/>
+          </a:prstGeom>
+          <a:noFill/>
+        </p:spPr>
+        <p:txBody>
+          <a:bodyPr wrap="square" anchor="t">
+            <a:normAutofit fontScale="70000" lnSpcReduction="20000"/>
+          </a:bodyPr>
+          <a:lstStyle/>
+          <a:p>
+            <a:pPr algn="ctr"/>
+            <a:r>
+              <a:rPr sz="1000" b="1">
+                <a:solidFill>
+                  <a:srgbClr val="174A80"/>
+                </a:solidFill>
+                <a:latin typeface="Aptos"/>
+              </a:rPr>
+              <a:t>2. CLUSTERING MODEL</a:t>
+            </a:r>
+          </a:p>
+        </p:txBody>
+      </p:sp>
+      <p:sp>
+        <p:nvSpPr>
+          <p:cNvPr id="96" name="TextBox 95"/>
+          <p:cNvSpPr txBox="1"/>
+          <p:nvPr/>
+        </p:nvSpPr>
+        <p:spPr>
+          <a:xfrm>
+            <a:off x="4091096" y="1893486"/>
+            <a:ext cx="1161288" cy="310896"/>
+          </a:xfrm>
+          <a:prstGeom prst="rect">
+            <a:avLst/>
+          </a:prstGeom>
+          <a:noFill/>
+        </p:spPr>
+        <p:txBody>
+          <a:bodyPr wrap="square" anchor="t">
+            <a:noAutofit/>
+          </a:bodyPr>
+          <a:lstStyle/>
+          <a:p>
+            <a:pPr algn="ctr"/>
+            <a:r>
+              <a:rPr sz="1000" b="1" dirty="0">
+                <a:solidFill>
+                  <a:srgbClr val="262730"/>
+                </a:solidFill>
+                <a:latin typeface="Aptos"/>
+              </a:rPr>
+              <a:t>Group similar products</a:t>
+            </a:r>
+          </a:p>
+        </p:txBody>
+      </p:sp>
+      <p:sp>
+        <p:nvSpPr>
+          <p:cNvPr id="97" name="Oval 96"/>
+          <p:cNvSpPr/>
+          <p:nvPr/>
+        </p:nvSpPr>
+        <p:spPr>
+          <a:xfrm>
+            <a:off x="4310552" y="2533566"/>
+            <a:ext cx="50292" cy="50292"/>
+          </a:xfrm>
+          <a:prstGeom prst="ellipse">
+            <a:avLst/>
+          </a:prstGeom>
+          <a:solidFill>
+            <a:srgbClr val="219664"/>
+          </a:solidFill>
+          <a:ln w="5080">
+            <a:solidFill>
+              <a:srgbClr val="FFFFFF"/>
+            </a:solidFill>
+          </a:ln>
+        </p:spPr>
+        <p:style>
+          <a:lnRef idx="1">
+            <a:schemeClr val="accent1"/>
+          </a:lnRef>
+          <a:fillRef idx="3">
+            <a:schemeClr val="accent1"/>
+          </a:fillRef>
+          <a:effectRef idx="2">
+            <a:schemeClr val="accent1"/>
+          </a:effectRef>
+          <a:fontRef idx="minor">
+            <a:schemeClr val="lt1"/>
+          </a:fontRef>
+        </p:style>
+        <p:txBody>
+          <a:bodyPr rtlCol="0" anchor="ctr"/>
+          <a:lstStyle/>
+          <a:p>
+            <a:pPr algn="ctr"/>
+            <a:endParaRPr/>
+          </a:p>
+        </p:txBody>
+      </p:sp>
+      <p:sp>
+        <p:nvSpPr>
+          <p:cNvPr id="98" name="Oval 97"/>
+          <p:cNvSpPr/>
+          <p:nvPr/>
+        </p:nvSpPr>
+        <p:spPr>
+          <a:xfrm>
+            <a:off x="4401992" y="2533566"/>
+            <a:ext cx="50292" cy="50292"/>
+          </a:xfrm>
+          <a:prstGeom prst="ellipse">
+            <a:avLst/>
+          </a:prstGeom>
+          <a:solidFill>
+            <a:srgbClr val="219664"/>
+          </a:solidFill>
+          <a:ln w="5080">
+            <a:solidFill>
+              <a:srgbClr val="FFFFFF"/>
+            </a:solidFill>
+          </a:ln>
+        </p:spPr>
+        <p:style>
+          <a:lnRef idx="1">
+            <a:schemeClr val="accent1"/>
+          </a:lnRef>
+          <a:fillRef idx="3">
+            <a:schemeClr val="accent1"/>
+          </a:fillRef>
+          <a:effectRef idx="2">
+            <a:schemeClr val="accent1"/>
+          </a:effectRef>
+          <a:fontRef idx="minor">
+            <a:schemeClr val="lt1"/>
+          </a:fontRef>
+        </p:style>
+        <p:txBody>
+          <a:bodyPr rtlCol="0" anchor="ctr"/>
+          <a:lstStyle/>
+          <a:p>
+            <a:pPr algn="ctr"/>
+            <a:endParaRPr/>
+          </a:p>
+        </p:txBody>
+      </p:sp>
+      <p:sp>
+        <p:nvSpPr>
+          <p:cNvPr id="99" name="Oval 98"/>
+          <p:cNvSpPr/>
+          <p:nvPr/>
+        </p:nvSpPr>
+        <p:spPr>
+          <a:xfrm>
+            <a:off x="4493432" y="2533566"/>
+            <a:ext cx="50292" cy="50292"/>
+          </a:xfrm>
+          <a:prstGeom prst="ellipse">
+            <a:avLst/>
+          </a:prstGeom>
+          <a:solidFill>
+            <a:srgbClr val="219664"/>
+          </a:solidFill>
+          <a:ln w="5080">
+            <a:solidFill>
+              <a:srgbClr val="FFFFFF"/>
+            </a:solidFill>
+          </a:ln>
+        </p:spPr>
+        <p:style>
+          <a:lnRef idx="1">
+            <a:schemeClr val="accent1"/>
+          </a:lnRef>
+          <a:fillRef idx="3">
+            <a:schemeClr val="accent1"/>
+          </a:fillRef>
+          <a:effectRef idx="2">
+            <a:schemeClr val="accent1"/>
+          </a:effectRef>
+          <a:fontRef idx="minor">
+            <a:schemeClr val="lt1"/>
+          </a:fontRef>
+        </p:style>
+        <p:txBody>
+          <a:bodyPr rtlCol="0" anchor="ctr"/>
+          <a:lstStyle/>
+          <a:p>
+            <a:pPr algn="ctr"/>
+            <a:endParaRPr/>
+          </a:p>
+        </p:txBody>
+      </p:sp>
+      <p:sp>
+        <p:nvSpPr>
+          <p:cNvPr id="100" name="Oval 99"/>
+          <p:cNvSpPr/>
+          <p:nvPr/>
+        </p:nvSpPr>
+        <p:spPr>
+          <a:xfrm>
+            <a:off x="4310552" y="2625006"/>
+            <a:ext cx="50292" cy="50292"/>
+          </a:xfrm>
+          <a:prstGeom prst="ellipse">
+            <a:avLst/>
+          </a:prstGeom>
+          <a:solidFill>
+            <a:srgbClr val="219664"/>
+          </a:solidFill>
+          <a:ln w="5080">
+            <a:solidFill>
+              <a:srgbClr val="FFFFFF"/>
+            </a:solidFill>
+          </a:ln>
+        </p:spPr>
+        <p:style>
+          <a:lnRef idx="1">
+            <a:schemeClr val="accent1"/>
+          </a:lnRef>
+          <a:fillRef idx="3">
+            <a:schemeClr val="accent1"/>
+          </a:fillRef>
+          <a:effectRef idx="2">
+            <a:schemeClr val="accent1"/>
+          </a:effectRef>
+          <a:fontRef idx="minor">
+            <a:schemeClr val="lt1"/>
+          </a:fontRef>
+        </p:style>
+        <p:txBody>
+          <a:bodyPr rtlCol="0" anchor="ctr"/>
+          <a:lstStyle/>
+          <a:p>
+            <a:pPr algn="ctr"/>
+            <a:endParaRPr/>
+          </a:p>
+        </p:txBody>
+      </p:sp>
+      <p:sp>
+        <p:nvSpPr>
+          <p:cNvPr id="101" name="Oval 100"/>
+          <p:cNvSpPr/>
+          <p:nvPr/>
+        </p:nvSpPr>
+        <p:spPr>
+          <a:xfrm>
+            <a:off x="4401992" y="2625006"/>
+            <a:ext cx="50292" cy="50292"/>
+          </a:xfrm>
+          <a:prstGeom prst="ellipse">
+            <a:avLst/>
+          </a:prstGeom>
+          <a:solidFill>
+            <a:srgbClr val="219664"/>
+          </a:solidFill>
+          <a:ln w="5080">
+            <a:solidFill>
+              <a:srgbClr val="FFFFFF"/>
+            </a:solidFill>
+          </a:ln>
+        </p:spPr>
+        <p:style>
+          <a:lnRef idx="1">
+            <a:schemeClr val="accent1"/>
+          </a:lnRef>
+          <a:fillRef idx="3">
+            <a:schemeClr val="accent1"/>
+          </a:fillRef>
+          <a:effectRef idx="2">
+            <a:schemeClr val="accent1"/>
+          </a:effectRef>
+          <a:fontRef idx="minor">
+            <a:schemeClr val="lt1"/>
+          </a:fontRef>
+        </p:style>
+        <p:txBody>
+          <a:bodyPr rtlCol="0" anchor="ctr"/>
+          <a:lstStyle/>
+          <a:p>
+            <a:pPr algn="ctr"/>
+            <a:endParaRPr/>
+          </a:p>
+        </p:txBody>
+      </p:sp>
+      <p:sp>
+        <p:nvSpPr>
+          <p:cNvPr id="102" name="Oval 101"/>
+          <p:cNvSpPr/>
+          <p:nvPr/>
+        </p:nvSpPr>
+        <p:spPr>
+          <a:xfrm>
+            <a:off x="4493432" y="2625006"/>
+            <a:ext cx="50292" cy="50292"/>
+          </a:xfrm>
+          <a:prstGeom prst="ellipse">
+            <a:avLst/>
+          </a:prstGeom>
+          <a:solidFill>
+            <a:srgbClr val="219664"/>
+          </a:solidFill>
+          <a:ln w="5080">
+            <a:solidFill>
+              <a:srgbClr val="FFFFFF"/>
+            </a:solidFill>
+          </a:ln>
+        </p:spPr>
+        <p:style>
+          <a:lnRef idx="1">
+            <a:schemeClr val="accent1"/>
+          </a:lnRef>
+          <a:fillRef idx="3">
+            <a:schemeClr val="accent1"/>
+          </a:fillRef>
+          <a:effectRef idx="2">
+            <a:schemeClr val="accent1"/>
+          </a:effectRef>
+          <a:fontRef idx="minor">
+            <a:schemeClr val="lt1"/>
+          </a:fontRef>
+        </p:style>
+        <p:txBody>
+          <a:bodyPr rtlCol="0" anchor="ctr"/>
+          <a:lstStyle/>
+          <a:p>
+            <a:pPr algn="ctr"/>
+            <a:endParaRPr/>
+          </a:p>
+        </p:txBody>
+      </p:sp>
+      <p:sp>
+        <p:nvSpPr>
+          <p:cNvPr id="103" name="Oval 102"/>
+          <p:cNvSpPr/>
+          <p:nvPr/>
+        </p:nvSpPr>
+        <p:spPr>
+          <a:xfrm>
+            <a:off x="4310552" y="2716446"/>
+            <a:ext cx="50292" cy="50292"/>
+          </a:xfrm>
+          <a:prstGeom prst="ellipse">
+            <a:avLst/>
+          </a:prstGeom>
+          <a:solidFill>
+            <a:srgbClr val="219664"/>
+          </a:solidFill>
+          <a:ln w="5080">
+            <a:solidFill>
+              <a:srgbClr val="FFFFFF"/>
+            </a:solidFill>
+          </a:ln>
+        </p:spPr>
+        <p:style>
+          <a:lnRef idx="1">
+            <a:schemeClr val="accent1"/>
+          </a:lnRef>
+          <a:fillRef idx="3">
+            <a:schemeClr val="accent1"/>
+          </a:fillRef>
+          <a:effectRef idx="2">
+            <a:schemeClr val="accent1"/>
+          </a:effectRef>
+          <a:fontRef idx="minor">
+            <a:schemeClr val="lt1"/>
+          </a:fontRef>
+        </p:style>
+        <p:txBody>
+          <a:bodyPr rtlCol="0" anchor="ctr"/>
+          <a:lstStyle/>
+          <a:p>
+            <a:pPr algn="ctr"/>
+            <a:endParaRPr/>
+          </a:p>
+        </p:txBody>
+      </p:sp>
+      <p:sp>
+        <p:nvSpPr>
+          <p:cNvPr id="104" name="Oval 103"/>
+          <p:cNvSpPr/>
+          <p:nvPr/>
+        </p:nvSpPr>
+        <p:spPr>
+          <a:xfrm>
+            <a:off x="4401992" y="2716446"/>
+            <a:ext cx="50292" cy="50292"/>
+          </a:xfrm>
+          <a:prstGeom prst="ellipse">
+            <a:avLst/>
+          </a:prstGeom>
+          <a:solidFill>
+            <a:srgbClr val="219664"/>
+          </a:solidFill>
+          <a:ln w="5080">
+            <a:solidFill>
+              <a:srgbClr val="FFFFFF"/>
+            </a:solidFill>
+          </a:ln>
+        </p:spPr>
+        <p:style>
+          <a:lnRef idx="1">
+            <a:schemeClr val="accent1"/>
+          </a:lnRef>
+          <a:fillRef idx="3">
+            <a:schemeClr val="accent1"/>
+          </a:fillRef>
+          <a:effectRef idx="2">
+            <a:schemeClr val="accent1"/>
+          </a:effectRef>
+          <a:fontRef idx="minor">
+            <a:schemeClr val="lt1"/>
+          </a:fontRef>
+        </p:style>
+        <p:txBody>
+          <a:bodyPr rtlCol="0" anchor="ctr"/>
+          <a:lstStyle/>
+          <a:p>
+            <a:pPr algn="ctr"/>
+            <a:endParaRPr/>
+          </a:p>
+        </p:txBody>
+      </p:sp>
+      <p:sp>
+        <p:nvSpPr>
+          <p:cNvPr id="105" name="Oval 104"/>
+          <p:cNvSpPr/>
+          <p:nvPr/>
+        </p:nvSpPr>
+        <p:spPr>
+          <a:xfrm>
+            <a:off x="4493432" y="2716446"/>
+            <a:ext cx="50292" cy="50292"/>
+          </a:xfrm>
+          <a:prstGeom prst="ellipse">
+            <a:avLst/>
+          </a:prstGeom>
+          <a:solidFill>
+            <a:srgbClr val="219664"/>
+          </a:solidFill>
+          <a:ln w="5080">
+            <a:solidFill>
+              <a:srgbClr val="FFFFFF"/>
+            </a:solidFill>
+          </a:ln>
+        </p:spPr>
+        <p:style>
+          <a:lnRef idx="1">
+            <a:schemeClr val="accent1"/>
+          </a:lnRef>
+          <a:fillRef idx="3">
+            <a:schemeClr val="accent1"/>
+          </a:fillRef>
+          <a:effectRef idx="2">
+            <a:schemeClr val="accent1"/>
+          </a:effectRef>
+          <a:fontRef idx="minor">
+            <a:schemeClr val="lt1"/>
+          </a:fontRef>
+        </p:style>
+        <p:txBody>
+          <a:bodyPr rtlCol="0" anchor="ctr"/>
+          <a:lstStyle/>
+          <a:p>
+            <a:pPr algn="ctr"/>
+            <a:endParaRPr/>
+          </a:p>
+        </p:txBody>
+      </p:sp>
+      <p:sp>
+        <p:nvSpPr>
+          <p:cNvPr id="106" name="Oval 105"/>
+          <p:cNvSpPr/>
+          <p:nvPr/>
+        </p:nvSpPr>
+        <p:spPr>
+          <a:xfrm>
+            <a:off x="4804328" y="2533566"/>
+            <a:ext cx="50292" cy="50292"/>
+          </a:xfrm>
+          <a:prstGeom prst="ellipse">
+            <a:avLst/>
+          </a:prstGeom>
+          <a:solidFill>
+            <a:srgbClr val="174A80"/>
+          </a:solidFill>
+          <a:ln w="5080">
+            <a:solidFill>
+              <a:srgbClr val="FFFFFF"/>
+            </a:solidFill>
+          </a:ln>
+        </p:spPr>
+        <p:style>
+          <a:lnRef idx="1">
+            <a:schemeClr val="accent1"/>
+          </a:lnRef>
+          <a:fillRef idx="3">
+            <a:schemeClr val="accent1"/>
+          </a:fillRef>
+          <a:effectRef idx="2">
+            <a:schemeClr val="accent1"/>
+          </a:effectRef>
+          <a:fontRef idx="minor">
+            <a:schemeClr val="lt1"/>
+          </a:fontRef>
+        </p:style>
+        <p:txBody>
+          <a:bodyPr rtlCol="0" anchor="ctr"/>
+          <a:lstStyle/>
+          <a:p>
+            <a:pPr algn="ctr"/>
+            <a:endParaRPr/>
+          </a:p>
+        </p:txBody>
+      </p:sp>
+      <p:sp>
+        <p:nvSpPr>
+          <p:cNvPr id="107" name="Oval 106"/>
+          <p:cNvSpPr/>
+          <p:nvPr/>
+        </p:nvSpPr>
+        <p:spPr>
+          <a:xfrm>
+            <a:off x="4895768" y="2533566"/>
+            <a:ext cx="50292" cy="50292"/>
+          </a:xfrm>
+          <a:prstGeom prst="ellipse">
+            <a:avLst/>
+          </a:prstGeom>
+          <a:solidFill>
+            <a:srgbClr val="174A80"/>
+          </a:solidFill>
+          <a:ln w="5080">
+            <a:solidFill>
+              <a:srgbClr val="FFFFFF"/>
+            </a:solidFill>
+          </a:ln>
+        </p:spPr>
+        <p:style>
+          <a:lnRef idx="1">
+            <a:schemeClr val="accent1"/>
+          </a:lnRef>
+          <a:fillRef idx="3">
+            <a:schemeClr val="accent1"/>
+          </a:fillRef>
+          <a:effectRef idx="2">
+            <a:schemeClr val="accent1"/>
+          </a:effectRef>
+          <a:fontRef idx="minor">
+            <a:schemeClr val="lt1"/>
+          </a:fontRef>
+        </p:style>
+        <p:txBody>
+          <a:bodyPr rtlCol="0" anchor="ctr"/>
+          <a:lstStyle/>
+          <a:p>
+            <a:pPr algn="ctr"/>
+            <a:endParaRPr/>
+          </a:p>
+        </p:txBody>
+      </p:sp>
+      <p:sp>
+        <p:nvSpPr>
+          <p:cNvPr id="108" name="Oval 107"/>
+          <p:cNvSpPr/>
+          <p:nvPr/>
+        </p:nvSpPr>
+        <p:spPr>
+          <a:xfrm>
+            <a:off x="4987208" y="2533566"/>
+            <a:ext cx="50292" cy="50292"/>
+          </a:xfrm>
+          <a:prstGeom prst="ellipse">
+            <a:avLst/>
+          </a:prstGeom>
+          <a:solidFill>
+            <a:srgbClr val="174A80"/>
+          </a:solidFill>
+          <a:ln w="5080">
+            <a:solidFill>
+              <a:srgbClr val="FFFFFF"/>
+            </a:solidFill>
+          </a:ln>
+        </p:spPr>
+        <p:style>
+          <a:lnRef idx="1">
+            <a:schemeClr val="accent1"/>
+          </a:lnRef>
+          <a:fillRef idx="3">
+            <a:schemeClr val="accent1"/>
+          </a:fillRef>
+          <a:effectRef idx="2">
+            <a:schemeClr val="accent1"/>
+          </a:effectRef>
+          <a:fontRef idx="minor">
+            <a:schemeClr val="lt1"/>
+          </a:fontRef>
+        </p:style>
+        <p:txBody>
+          <a:bodyPr rtlCol="0" anchor="ctr"/>
+          <a:lstStyle/>
+          <a:p>
+            <a:pPr algn="ctr"/>
+            <a:endParaRPr/>
+          </a:p>
+        </p:txBody>
+      </p:sp>
+      <p:sp>
+        <p:nvSpPr>
+          <p:cNvPr id="109" name="Oval 108"/>
+          <p:cNvSpPr/>
+          <p:nvPr/>
+        </p:nvSpPr>
+        <p:spPr>
+          <a:xfrm>
+            <a:off x="4804328" y="2625006"/>
+            <a:ext cx="50292" cy="50292"/>
+          </a:xfrm>
+          <a:prstGeom prst="ellipse">
+            <a:avLst/>
+          </a:prstGeom>
+          <a:solidFill>
+            <a:srgbClr val="174A80"/>
+          </a:solidFill>
+          <a:ln w="5080">
+            <a:solidFill>
+              <a:srgbClr val="FFFFFF"/>
+            </a:solidFill>
+          </a:ln>
+        </p:spPr>
+        <p:style>
+          <a:lnRef idx="1">
+            <a:schemeClr val="accent1"/>
+          </a:lnRef>
+          <a:fillRef idx="3">
+            <a:schemeClr val="accent1"/>
+          </a:fillRef>
+          <a:effectRef idx="2">
+            <a:schemeClr val="accent1"/>
+          </a:effectRef>
+          <a:fontRef idx="minor">
+            <a:schemeClr val="lt1"/>
+          </a:fontRef>
+        </p:style>
+        <p:txBody>
+          <a:bodyPr rtlCol="0" anchor="ctr"/>
+          <a:lstStyle/>
+          <a:p>
+            <a:pPr algn="ctr"/>
+            <a:endParaRPr/>
+          </a:p>
+        </p:txBody>
+      </p:sp>
+      <p:sp>
+        <p:nvSpPr>
+          <p:cNvPr id="110" name="Oval 109"/>
+          <p:cNvSpPr/>
+          <p:nvPr/>
+        </p:nvSpPr>
+        <p:spPr>
+          <a:xfrm>
+            <a:off x="4895768" y="2625006"/>
+            <a:ext cx="50292" cy="50292"/>
+          </a:xfrm>
+          <a:prstGeom prst="ellipse">
+            <a:avLst/>
+          </a:prstGeom>
+          <a:solidFill>
+            <a:srgbClr val="174A80"/>
+          </a:solidFill>
+          <a:ln w="5080">
+            <a:solidFill>
+              <a:srgbClr val="FFFFFF"/>
+            </a:solidFill>
+          </a:ln>
+        </p:spPr>
+        <p:style>
+          <a:lnRef idx="1">
+            <a:schemeClr val="accent1"/>
+          </a:lnRef>
+          <a:fillRef idx="3">
+            <a:schemeClr val="accent1"/>
+          </a:fillRef>
+          <a:effectRef idx="2">
+            <a:schemeClr val="accent1"/>
+          </a:effectRef>
+          <a:fontRef idx="minor">
+            <a:schemeClr val="lt1"/>
+          </a:fontRef>
+        </p:style>
+        <p:txBody>
+          <a:bodyPr rtlCol="0" anchor="ctr"/>
+          <a:lstStyle/>
+          <a:p>
+            <a:pPr algn="ctr"/>
+            <a:endParaRPr/>
+          </a:p>
+        </p:txBody>
+      </p:sp>
+      <p:sp>
+        <p:nvSpPr>
+          <p:cNvPr id="111" name="Oval 110"/>
+          <p:cNvSpPr/>
+          <p:nvPr/>
+        </p:nvSpPr>
+        <p:spPr>
+          <a:xfrm>
+            <a:off x="4987208" y="2625006"/>
+            <a:ext cx="50292" cy="50292"/>
+          </a:xfrm>
+          <a:prstGeom prst="ellipse">
+            <a:avLst/>
+          </a:prstGeom>
+          <a:solidFill>
+            <a:srgbClr val="174A80"/>
+          </a:solidFill>
+          <a:ln w="5080">
+            <a:solidFill>
+              <a:srgbClr val="FFFFFF"/>
+            </a:solidFill>
+          </a:ln>
+        </p:spPr>
+        <p:style>
+          <a:lnRef idx="1">
+            <a:schemeClr val="accent1"/>
+          </a:lnRef>
+          <a:fillRef idx="3">
+            <a:schemeClr val="accent1"/>
+          </a:fillRef>
+          <a:effectRef idx="2">
+            <a:schemeClr val="accent1"/>
+          </a:effectRef>
+          <a:fontRef idx="minor">
+            <a:schemeClr val="lt1"/>
+          </a:fontRef>
+        </p:style>
+        <p:txBody>
+          <a:bodyPr rtlCol="0" anchor="ctr"/>
+          <a:lstStyle/>
+          <a:p>
+            <a:pPr algn="ctr"/>
+            <a:endParaRPr/>
+          </a:p>
+        </p:txBody>
+      </p:sp>
+      <p:sp>
+        <p:nvSpPr>
+          <p:cNvPr id="112" name="Oval 111"/>
+          <p:cNvSpPr/>
+          <p:nvPr/>
+        </p:nvSpPr>
+        <p:spPr>
+          <a:xfrm>
+            <a:off x="4804328" y="2716446"/>
+            <a:ext cx="50292" cy="50292"/>
+          </a:xfrm>
+          <a:prstGeom prst="ellipse">
+            <a:avLst/>
+          </a:prstGeom>
+          <a:solidFill>
+            <a:srgbClr val="174A80"/>
+          </a:solidFill>
+          <a:ln w="5080">
+            <a:solidFill>
+              <a:srgbClr val="FFFFFF"/>
+            </a:solidFill>
+          </a:ln>
+        </p:spPr>
+        <p:style>
+          <a:lnRef idx="1">
+            <a:schemeClr val="accent1"/>
+          </a:lnRef>
+          <a:fillRef idx="3">
+            <a:schemeClr val="accent1"/>
+          </a:fillRef>
+          <a:effectRef idx="2">
+            <a:schemeClr val="accent1"/>
+          </a:effectRef>
+          <a:fontRef idx="minor">
+            <a:schemeClr val="lt1"/>
+          </a:fontRef>
+        </p:style>
+        <p:txBody>
+          <a:bodyPr rtlCol="0" anchor="ctr"/>
+          <a:lstStyle/>
+          <a:p>
+            <a:pPr algn="ctr"/>
+            <a:endParaRPr/>
+          </a:p>
+        </p:txBody>
+      </p:sp>
+      <p:sp>
+        <p:nvSpPr>
+          <p:cNvPr id="113" name="Oval 112"/>
+          <p:cNvSpPr/>
+          <p:nvPr/>
+        </p:nvSpPr>
+        <p:spPr>
+          <a:xfrm>
+            <a:off x="4895768" y="2716446"/>
+            <a:ext cx="50292" cy="50292"/>
+          </a:xfrm>
+          <a:prstGeom prst="ellipse">
+            <a:avLst/>
+          </a:prstGeom>
+          <a:solidFill>
+            <a:srgbClr val="174A80"/>
+          </a:solidFill>
+          <a:ln w="5080">
+            <a:solidFill>
+              <a:srgbClr val="FFFFFF"/>
+            </a:solidFill>
+          </a:ln>
+        </p:spPr>
+        <p:style>
+          <a:lnRef idx="1">
+            <a:schemeClr val="accent1"/>
+          </a:lnRef>
+          <a:fillRef idx="3">
+            <a:schemeClr val="accent1"/>
+          </a:fillRef>
+          <a:effectRef idx="2">
+            <a:schemeClr val="accent1"/>
+          </a:effectRef>
+          <a:fontRef idx="minor">
+            <a:schemeClr val="lt1"/>
+          </a:fontRef>
+        </p:style>
+        <p:txBody>
+          <a:bodyPr rtlCol="0" anchor="ctr"/>
+          <a:lstStyle/>
+          <a:p>
+            <a:pPr algn="ctr"/>
+            <a:endParaRPr/>
+          </a:p>
+        </p:txBody>
+      </p:sp>
+      <p:sp>
+        <p:nvSpPr>
+          <p:cNvPr id="114" name="Oval 113"/>
+          <p:cNvSpPr/>
+          <p:nvPr/>
+        </p:nvSpPr>
+        <p:spPr>
+          <a:xfrm>
+            <a:off x="4987208" y="2716446"/>
+            <a:ext cx="50292" cy="50292"/>
+          </a:xfrm>
+          <a:prstGeom prst="ellipse">
+            <a:avLst/>
+          </a:prstGeom>
+          <a:solidFill>
+            <a:srgbClr val="174A80"/>
+          </a:solidFill>
+          <a:ln w="5080">
+            <a:solidFill>
+              <a:srgbClr val="FFFFFF"/>
+            </a:solidFill>
+          </a:ln>
+        </p:spPr>
+        <p:style>
+          <a:lnRef idx="1">
+            <a:schemeClr val="accent1"/>
+          </a:lnRef>
+          <a:fillRef idx="3">
+            <a:schemeClr val="accent1"/>
+          </a:fillRef>
+          <a:effectRef idx="2">
+            <a:schemeClr val="accent1"/>
+          </a:effectRef>
+          <a:fontRef idx="minor">
+            <a:schemeClr val="lt1"/>
+          </a:fontRef>
+        </p:style>
+        <p:txBody>
+          <a:bodyPr rtlCol="0" anchor="ctr"/>
+          <a:lstStyle/>
+          <a:p>
+            <a:pPr algn="ctr"/>
+            <a:endParaRPr/>
+          </a:p>
+        </p:txBody>
+      </p:sp>
+      <p:sp>
+        <p:nvSpPr>
+          <p:cNvPr id="115" name="Oval 114"/>
+          <p:cNvSpPr/>
+          <p:nvPr/>
+        </p:nvSpPr>
+        <p:spPr>
+          <a:xfrm>
+            <a:off x="4310552" y="3082206"/>
+            <a:ext cx="50292" cy="50292"/>
+          </a:xfrm>
+          <a:prstGeom prst="ellipse">
+            <a:avLst/>
+          </a:prstGeom>
+          <a:solidFill>
+            <a:srgbClr val="7459C6"/>
+          </a:solidFill>
+          <a:ln w="5080">
+            <a:solidFill>
+              <a:srgbClr val="FFFFFF"/>
+            </a:solidFill>
+          </a:ln>
+        </p:spPr>
+        <p:style>
+          <a:lnRef idx="1">
+            <a:schemeClr val="accent1"/>
+          </a:lnRef>
+          <a:fillRef idx="3">
+            <a:schemeClr val="accent1"/>
+          </a:fillRef>
+          <a:effectRef idx="2">
+            <a:schemeClr val="accent1"/>
+          </a:effectRef>
+          <a:fontRef idx="minor">
+            <a:schemeClr val="lt1"/>
+          </a:fontRef>
+        </p:style>
+        <p:txBody>
+          <a:bodyPr rtlCol="0" anchor="ctr"/>
+          <a:lstStyle/>
+          <a:p>
+            <a:pPr algn="ctr"/>
+            <a:endParaRPr/>
+          </a:p>
+        </p:txBody>
+      </p:sp>
+      <p:sp>
+        <p:nvSpPr>
+          <p:cNvPr id="116" name="Oval 115"/>
+          <p:cNvSpPr/>
+          <p:nvPr/>
+        </p:nvSpPr>
+        <p:spPr>
+          <a:xfrm>
+            <a:off x="4401992" y="3082206"/>
+            <a:ext cx="50292" cy="50292"/>
+          </a:xfrm>
+          <a:prstGeom prst="ellipse">
+            <a:avLst/>
+          </a:prstGeom>
+          <a:solidFill>
+            <a:srgbClr val="7459C6"/>
+          </a:solidFill>
+          <a:ln w="5080">
+            <a:solidFill>
+              <a:srgbClr val="FFFFFF"/>
+            </a:solidFill>
+          </a:ln>
+        </p:spPr>
+        <p:style>
+          <a:lnRef idx="1">
+            <a:schemeClr val="accent1"/>
+          </a:lnRef>
+          <a:fillRef idx="3">
+            <a:schemeClr val="accent1"/>
+          </a:fillRef>
+          <a:effectRef idx="2">
+            <a:schemeClr val="accent1"/>
+          </a:effectRef>
+          <a:fontRef idx="minor">
+            <a:schemeClr val="lt1"/>
+          </a:fontRef>
+        </p:style>
+        <p:txBody>
+          <a:bodyPr rtlCol="0" anchor="ctr"/>
+          <a:lstStyle/>
+          <a:p>
+            <a:pPr algn="ctr"/>
+            <a:endParaRPr/>
+          </a:p>
+        </p:txBody>
+      </p:sp>
+      <p:sp>
+        <p:nvSpPr>
+          <p:cNvPr id="117" name="Oval 116"/>
+          <p:cNvSpPr/>
+          <p:nvPr/>
+        </p:nvSpPr>
+        <p:spPr>
+          <a:xfrm>
+            <a:off x="4493432" y="3082206"/>
+            <a:ext cx="50292" cy="50292"/>
+          </a:xfrm>
+          <a:prstGeom prst="ellipse">
+            <a:avLst/>
+          </a:prstGeom>
+          <a:solidFill>
+            <a:srgbClr val="7459C6"/>
+          </a:solidFill>
+          <a:ln w="5080">
+            <a:solidFill>
+              <a:srgbClr val="FFFFFF"/>
+            </a:solidFill>
+          </a:ln>
+        </p:spPr>
+        <p:style>
+          <a:lnRef idx="1">
+            <a:schemeClr val="accent1"/>
+          </a:lnRef>
+          <a:fillRef idx="3">
+            <a:schemeClr val="accent1"/>
+          </a:fillRef>
+          <a:effectRef idx="2">
+            <a:schemeClr val="accent1"/>
+          </a:effectRef>
+          <a:fontRef idx="minor">
+            <a:schemeClr val="lt1"/>
+          </a:fontRef>
+        </p:style>
+        <p:txBody>
+          <a:bodyPr rtlCol="0" anchor="ctr"/>
+          <a:lstStyle/>
+          <a:p>
+            <a:pPr algn="ctr"/>
+            <a:endParaRPr/>
+          </a:p>
+        </p:txBody>
+      </p:sp>
+      <p:sp>
+        <p:nvSpPr>
+          <p:cNvPr id="118" name="Oval 117"/>
+          <p:cNvSpPr/>
+          <p:nvPr/>
+        </p:nvSpPr>
+        <p:spPr>
+          <a:xfrm>
+            <a:off x="4310552" y="3173646"/>
+            <a:ext cx="50292" cy="50292"/>
+          </a:xfrm>
+          <a:prstGeom prst="ellipse">
+            <a:avLst/>
+          </a:prstGeom>
+          <a:solidFill>
+            <a:srgbClr val="7459C6"/>
+          </a:solidFill>
+          <a:ln w="5080">
+            <a:solidFill>
+              <a:srgbClr val="FFFFFF"/>
+            </a:solidFill>
+          </a:ln>
+        </p:spPr>
+        <p:style>
+          <a:lnRef idx="1">
+            <a:schemeClr val="accent1"/>
+          </a:lnRef>
+          <a:fillRef idx="3">
+            <a:schemeClr val="accent1"/>
+          </a:fillRef>
+          <a:effectRef idx="2">
+            <a:schemeClr val="accent1"/>
+          </a:effectRef>
+          <a:fontRef idx="minor">
+            <a:schemeClr val="lt1"/>
+          </a:fontRef>
+        </p:style>
+        <p:txBody>
+          <a:bodyPr rtlCol="0" anchor="ctr"/>
+          <a:lstStyle/>
+          <a:p>
+            <a:pPr algn="ctr"/>
+            <a:endParaRPr/>
+          </a:p>
+        </p:txBody>
+      </p:sp>
+      <p:sp>
+        <p:nvSpPr>
+          <p:cNvPr id="119" name="Oval 118"/>
+          <p:cNvSpPr/>
+          <p:nvPr/>
+        </p:nvSpPr>
+        <p:spPr>
+          <a:xfrm>
+            <a:off x="4401992" y="3173646"/>
+            <a:ext cx="50292" cy="50292"/>
+          </a:xfrm>
+          <a:prstGeom prst="ellipse">
+            <a:avLst/>
+          </a:prstGeom>
+          <a:solidFill>
+            <a:srgbClr val="7459C6"/>
+          </a:solidFill>
+          <a:ln w="5080">
+            <a:solidFill>
+              <a:srgbClr val="FFFFFF"/>
+            </a:solidFill>
+          </a:ln>
+        </p:spPr>
+        <p:style>
+          <a:lnRef idx="1">
+            <a:schemeClr val="accent1"/>
+          </a:lnRef>
+          <a:fillRef idx="3">
+            <a:schemeClr val="accent1"/>
+          </a:fillRef>
+          <a:effectRef idx="2">
+            <a:schemeClr val="accent1"/>
+          </a:effectRef>
+          <a:fontRef idx="minor">
+            <a:schemeClr val="lt1"/>
+          </a:fontRef>
+        </p:style>
+        <p:txBody>
+          <a:bodyPr rtlCol="0" anchor="ctr"/>
+          <a:lstStyle/>
+          <a:p>
+            <a:pPr algn="ctr"/>
+            <a:endParaRPr/>
+          </a:p>
+        </p:txBody>
+      </p:sp>
+      <p:sp>
+        <p:nvSpPr>
+          <p:cNvPr id="120" name="Oval 119"/>
+          <p:cNvSpPr/>
+          <p:nvPr/>
+        </p:nvSpPr>
+        <p:spPr>
+          <a:xfrm>
+            <a:off x="4493432" y="3173646"/>
+            <a:ext cx="50292" cy="50292"/>
+          </a:xfrm>
+          <a:prstGeom prst="ellipse">
+            <a:avLst/>
+          </a:prstGeom>
+          <a:solidFill>
+            <a:srgbClr val="7459C6"/>
+          </a:solidFill>
+          <a:ln w="5080">
+            <a:solidFill>
+              <a:srgbClr val="FFFFFF"/>
+            </a:solidFill>
+          </a:ln>
+        </p:spPr>
+        <p:style>
+          <a:lnRef idx="1">
+            <a:schemeClr val="accent1"/>
+          </a:lnRef>
+          <a:fillRef idx="3">
+            <a:schemeClr val="accent1"/>
+          </a:fillRef>
+          <a:effectRef idx="2">
+            <a:schemeClr val="accent1"/>
+          </a:effectRef>
+          <a:fontRef idx="minor">
+            <a:schemeClr val="lt1"/>
+          </a:fontRef>
+        </p:style>
+        <p:txBody>
+          <a:bodyPr rtlCol="0" anchor="ctr"/>
+          <a:lstStyle/>
+          <a:p>
+            <a:pPr algn="ctr"/>
+            <a:endParaRPr/>
+          </a:p>
+        </p:txBody>
+      </p:sp>
+      <p:sp>
+        <p:nvSpPr>
+          <p:cNvPr id="121" name="Oval 120"/>
+          <p:cNvSpPr/>
+          <p:nvPr/>
+        </p:nvSpPr>
+        <p:spPr>
+          <a:xfrm>
+            <a:off x="4310552" y="3265086"/>
+            <a:ext cx="50292" cy="50292"/>
+          </a:xfrm>
+          <a:prstGeom prst="ellipse">
+            <a:avLst/>
+          </a:prstGeom>
+          <a:solidFill>
+            <a:srgbClr val="7459C6"/>
+          </a:solidFill>
+          <a:ln w="5080">
+            <a:solidFill>
+              <a:srgbClr val="FFFFFF"/>
+            </a:solidFill>
+          </a:ln>
+        </p:spPr>
+        <p:style>
+          <a:lnRef idx="1">
+            <a:schemeClr val="accent1"/>
+          </a:lnRef>
+          <a:fillRef idx="3">
+            <a:schemeClr val="accent1"/>
+          </a:fillRef>
+          <a:effectRef idx="2">
+            <a:schemeClr val="accent1"/>
+          </a:effectRef>
+          <a:fontRef idx="minor">
+            <a:schemeClr val="lt1"/>
+          </a:fontRef>
+        </p:style>
+        <p:txBody>
+          <a:bodyPr rtlCol="0" anchor="ctr"/>
+          <a:lstStyle/>
+          <a:p>
+            <a:pPr algn="ctr"/>
+            <a:endParaRPr/>
+          </a:p>
+        </p:txBody>
+      </p:sp>
+      <p:sp>
+        <p:nvSpPr>
+          <p:cNvPr id="122" name="Oval 121"/>
+          <p:cNvSpPr/>
+          <p:nvPr/>
+        </p:nvSpPr>
+        <p:spPr>
+          <a:xfrm>
+            <a:off x="4401992" y="3265086"/>
+            <a:ext cx="50292" cy="50292"/>
+          </a:xfrm>
+          <a:prstGeom prst="ellipse">
+            <a:avLst/>
+          </a:prstGeom>
+          <a:solidFill>
+            <a:srgbClr val="7459C6"/>
+          </a:solidFill>
+          <a:ln w="5080">
+            <a:solidFill>
+              <a:srgbClr val="FFFFFF"/>
+            </a:solidFill>
+          </a:ln>
+        </p:spPr>
+        <p:style>
+          <a:lnRef idx="1">
+            <a:schemeClr val="accent1"/>
+          </a:lnRef>
+          <a:fillRef idx="3">
+            <a:schemeClr val="accent1"/>
+          </a:fillRef>
+          <a:effectRef idx="2">
+            <a:schemeClr val="accent1"/>
+          </a:effectRef>
+          <a:fontRef idx="minor">
+            <a:schemeClr val="lt1"/>
+          </a:fontRef>
+        </p:style>
+        <p:txBody>
+          <a:bodyPr rtlCol="0" anchor="ctr"/>
+          <a:lstStyle/>
+          <a:p>
+            <a:pPr algn="ctr"/>
+            <a:endParaRPr/>
+          </a:p>
+        </p:txBody>
+      </p:sp>
+      <p:sp>
+        <p:nvSpPr>
+          <p:cNvPr id="123" name="Oval 122"/>
+          <p:cNvSpPr/>
+          <p:nvPr/>
+        </p:nvSpPr>
+        <p:spPr>
+          <a:xfrm>
+            <a:off x="4493432" y="3265086"/>
+            <a:ext cx="50292" cy="50292"/>
+          </a:xfrm>
+          <a:prstGeom prst="ellipse">
+            <a:avLst/>
+          </a:prstGeom>
+          <a:solidFill>
+            <a:srgbClr val="7459C6"/>
+          </a:solidFill>
+          <a:ln w="5080">
+            <a:solidFill>
+              <a:srgbClr val="FFFFFF"/>
+            </a:solidFill>
+          </a:ln>
+        </p:spPr>
+        <p:style>
+          <a:lnRef idx="1">
+            <a:schemeClr val="accent1"/>
+          </a:lnRef>
+          <a:fillRef idx="3">
+            <a:schemeClr val="accent1"/>
+          </a:fillRef>
+          <a:effectRef idx="2">
+            <a:schemeClr val="accent1"/>
+          </a:effectRef>
+          <a:fontRef idx="minor">
+            <a:schemeClr val="lt1"/>
+          </a:fontRef>
+        </p:style>
+        <p:txBody>
+          <a:bodyPr rtlCol="0" anchor="ctr"/>
+          <a:lstStyle/>
+          <a:p>
+            <a:pPr algn="ctr"/>
+            <a:endParaRPr/>
+          </a:p>
+        </p:txBody>
+      </p:sp>
+      <p:sp>
+        <p:nvSpPr>
+          <p:cNvPr id="124" name="Oval 123"/>
+          <p:cNvSpPr/>
+          <p:nvPr/>
+        </p:nvSpPr>
+        <p:spPr>
+          <a:xfrm>
+            <a:off x="4804328" y="3082206"/>
+            <a:ext cx="50292" cy="50292"/>
+          </a:xfrm>
+          <a:prstGeom prst="ellipse">
+            <a:avLst/>
+          </a:prstGeom>
+          <a:solidFill>
+            <a:srgbClr val="E27E2D"/>
+          </a:solidFill>
+          <a:ln w="5080">
+            <a:solidFill>
+              <a:srgbClr val="FFFFFF"/>
+            </a:solidFill>
+          </a:ln>
+        </p:spPr>
+        <p:style>
+          <a:lnRef idx="1">
+            <a:schemeClr val="accent1"/>
+          </a:lnRef>
+          <a:fillRef idx="3">
+            <a:schemeClr val="accent1"/>
+          </a:fillRef>
+          <a:effectRef idx="2">
+            <a:schemeClr val="accent1"/>
+          </a:effectRef>
+          <a:fontRef idx="minor">
+            <a:schemeClr val="lt1"/>
+          </a:fontRef>
+        </p:style>
+        <p:txBody>
+          <a:bodyPr rtlCol="0" anchor="ctr"/>
+          <a:lstStyle/>
+          <a:p>
+            <a:pPr algn="ctr"/>
+            <a:endParaRPr/>
+          </a:p>
+        </p:txBody>
+      </p:sp>
+      <p:sp>
+        <p:nvSpPr>
+          <p:cNvPr id="125" name="Oval 124"/>
+          <p:cNvSpPr/>
+          <p:nvPr/>
+        </p:nvSpPr>
+        <p:spPr>
+          <a:xfrm>
+            <a:off x="4895768" y="3082206"/>
+            <a:ext cx="50292" cy="50292"/>
+          </a:xfrm>
+          <a:prstGeom prst="ellipse">
+            <a:avLst/>
+          </a:prstGeom>
+          <a:solidFill>
+            <a:srgbClr val="E27E2D"/>
+          </a:solidFill>
+          <a:ln w="5080">
+            <a:solidFill>
+              <a:srgbClr val="FFFFFF"/>
+            </a:solidFill>
+          </a:ln>
+        </p:spPr>
+        <p:style>
+          <a:lnRef idx="1">
+            <a:schemeClr val="accent1"/>
+          </a:lnRef>
+          <a:fillRef idx="3">
+            <a:schemeClr val="accent1"/>
+          </a:fillRef>
+          <a:effectRef idx="2">
+            <a:schemeClr val="accent1"/>
+          </a:effectRef>
+          <a:fontRef idx="minor">
+            <a:schemeClr val="lt1"/>
+          </a:fontRef>
+        </p:style>
+        <p:txBody>
+          <a:bodyPr rtlCol="0" anchor="ctr"/>
+          <a:lstStyle/>
+          <a:p>
+            <a:pPr algn="ctr"/>
+            <a:endParaRPr/>
+          </a:p>
+        </p:txBody>
+      </p:sp>
+      <p:sp>
+        <p:nvSpPr>
+          <p:cNvPr id="126" name="Oval 125"/>
+          <p:cNvSpPr/>
+          <p:nvPr/>
+        </p:nvSpPr>
+        <p:spPr>
+          <a:xfrm>
+            <a:off x="4987208" y="3082206"/>
+            <a:ext cx="50292" cy="50292"/>
+          </a:xfrm>
+          <a:prstGeom prst="ellipse">
+            <a:avLst/>
+          </a:prstGeom>
+          <a:solidFill>
+            <a:srgbClr val="E27E2D"/>
+          </a:solidFill>
+          <a:ln w="5080">
+            <a:solidFill>
+              <a:srgbClr val="FFFFFF"/>
+            </a:solidFill>
+          </a:ln>
+        </p:spPr>
+        <p:style>
+          <a:lnRef idx="1">
+            <a:schemeClr val="accent1"/>
+          </a:lnRef>
+          <a:fillRef idx="3">
+            <a:schemeClr val="accent1"/>
+          </a:fillRef>
+          <a:effectRef idx="2">
+            <a:schemeClr val="accent1"/>
+          </a:effectRef>
+          <a:fontRef idx="minor">
+            <a:schemeClr val="lt1"/>
+          </a:fontRef>
+        </p:style>
+        <p:txBody>
+          <a:bodyPr rtlCol="0" anchor="ctr"/>
+          <a:lstStyle/>
+          <a:p>
+            <a:pPr algn="ctr"/>
+            <a:endParaRPr/>
+          </a:p>
+        </p:txBody>
+      </p:sp>
+      <p:sp>
+        <p:nvSpPr>
+          <p:cNvPr id="127" name="Oval 126"/>
+          <p:cNvSpPr/>
+          <p:nvPr/>
+        </p:nvSpPr>
+        <p:spPr>
+          <a:xfrm>
+            <a:off x="4804328" y="3173646"/>
+            <a:ext cx="50292" cy="50292"/>
+          </a:xfrm>
+          <a:prstGeom prst="ellipse">
+            <a:avLst/>
+          </a:prstGeom>
+          <a:solidFill>
+            <a:srgbClr val="E27E2D"/>
+          </a:solidFill>
+          <a:ln w="5080">
+            <a:solidFill>
+              <a:srgbClr val="FFFFFF"/>
+            </a:solidFill>
+          </a:ln>
+        </p:spPr>
+        <p:style>
+          <a:lnRef idx="1">
+            <a:schemeClr val="accent1"/>
+          </a:lnRef>
+          <a:fillRef idx="3">
+            <a:schemeClr val="accent1"/>
+          </a:fillRef>
+          <a:effectRef idx="2">
+            <a:schemeClr val="accent1"/>
+          </a:effectRef>
+          <a:fontRef idx="minor">
+            <a:schemeClr val="lt1"/>
+          </a:fontRef>
+        </p:style>
+        <p:txBody>
+          <a:bodyPr rtlCol="0" anchor="ctr"/>
+          <a:lstStyle/>
+          <a:p>
+            <a:pPr algn="ctr"/>
+            <a:endParaRPr/>
+          </a:p>
+        </p:txBody>
+      </p:sp>
+      <p:sp>
+        <p:nvSpPr>
+          <p:cNvPr id="128" name="Oval 127"/>
+          <p:cNvSpPr/>
+          <p:nvPr/>
+        </p:nvSpPr>
+        <p:spPr>
+          <a:xfrm>
+            <a:off x="4895768" y="3173646"/>
+            <a:ext cx="50292" cy="50292"/>
+          </a:xfrm>
+          <a:prstGeom prst="ellipse">
+            <a:avLst/>
+          </a:prstGeom>
+          <a:solidFill>
+            <a:srgbClr val="E27E2D"/>
+          </a:solidFill>
+          <a:ln w="5080">
+            <a:solidFill>
+              <a:srgbClr val="FFFFFF"/>
+            </a:solidFill>
+          </a:ln>
+        </p:spPr>
+        <p:style>
+          <a:lnRef idx="1">
+            <a:schemeClr val="accent1"/>
+          </a:lnRef>
+          <a:fillRef idx="3">
+            <a:schemeClr val="accent1"/>
+          </a:fillRef>
+          <a:effectRef idx="2">
+            <a:schemeClr val="accent1"/>
+          </a:effectRef>
+          <a:fontRef idx="minor">
+            <a:schemeClr val="lt1"/>
+          </a:fontRef>
+        </p:style>
+        <p:txBody>
+          <a:bodyPr rtlCol="0" anchor="ctr"/>
+          <a:lstStyle/>
+          <a:p>
+            <a:pPr algn="ctr"/>
+            <a:endParaRPr/>
+          </a:p>
+        </p:txBody>
+      </p:sp>
+      <p:sp>
+        <p:nvSpPr>
+          <p:cNvPr id="129" name="Oval 128"/>
+          <p:cNvSpPr/>
+          <p:nvPr/>
+        </p:nvSpPr>
+        <p:spPr>
+          <a:xfrm>
+            <a:off x="4987208" y="3173646"/>
+            <a:ext cx="50292" cy="50292"/>
+          </a:xfrm>
+          <a:prstGeom prst="ellipse">
+            <a:avLst/>
+          </a:prstGeom>
+          <a:solidFill>
+            <a:srgbClr val="E27E2D"/>
+          </a:solidFill>
+          <a:ln w="5080">
+            <a:solidFill>
+              <a:srgbClr val="FFFFFF"/>
+            </a:solidFill>
+          </a:ln>
+        </p:spPr>
+        <p:style>
+          <a:lnRef idx="1">
+            <a:schemeClr val="accent1"/>
+          </a:lnRef>
+          <a:fillRef idx="3">
+            <a:schemeClr val="accent1"/>
+          </a:fillRef>
+          <a:effectRef idx="2">
+            <a:schemeClr val="accent1"/>
+          </a:effectRef>
+          <a:fontRef idx="minor">
+            <a:schemeClr val="lt1"/>
+          </a:fontRef>
+        </p:style>
+        <p:txBody>
+          <a:bodyPr rtlCol="0" anchor="ctr"/>
+          <a:lstStyle/>
+          <a:p>
+            <a:pPr algn="ctr"/>
+            <a:endParaRPr/>
+          </a:p>
+        </p:txBody>
+      </p:sp>
+      <p:sp>
+        <p:nvSpPr>
+          <p:cNvPr id="130" name="Oval 129"/>
+          <p:cNvSpPr/>
+          <p:nvPr/>
+        </p:nvSpPr>
+        <p:spPr>
+          <a:xfrm>
+            <a:off x="4804328" y="3265086"/>
+            <a:ext cx="50292" cy="50292"/>
+          </a:xfrm>
+          <a:prstGeom prst="ellipse">
+            <a:avLst/>
+          </a:prstGeom>
+          <a:solidFill>
+            <a:srgbClr val="E27E2D"/>
+          </a:solidFill>
+          <a:ln w="5080">
+            <a:solidFill>
+              <a:srgbClr val="FFFFFF"/>
+            </a:solidFill>
+          </a:ln>
+        </p:spPr>
+        <p:style>
+          <a:lnRef idx="1">
+            <a:schemeClr val="accent1"/>
+          </a:lnRef>
+          <a:fillRef idx="3">
+            <a:schemeClr val="accent1"/>
+          </a:fillRef>
+          <a:effectRef idx="2">
+            <a:schemeClr val="accent1"/>
+          </a:effectRef>
+          <a:fontRef idx="minor">
+            <a:schemeClr val="lt1"/>
+          </a:fontRef>
+        </p:style>
+        <p:txBody>
+          <a:bodyPr rtlCol="0" anchor="ctr"/>
+          <a:lstStyle/>
+          <a:p>
+            <a:pPr algn="ctr"/>
+            <a:endParaRPr/>
+          </a:p>
+        </p:txBody>
+      </p:sp>
+      <p:sp>
+        <p:nvSpPr>
+          <p:cNvPr id="131" name="Oval 130"/>
+          <p:cNvSpPr/>
+          <p:nvPr/>
+        </p:nvSpPr>
+        <p:spPr>
+          <a:xfrm>
+            <a:off x="4895768" y="3265086"/>
+            <a:ext cx="50292" cy="50292"/>
+          </a:xfrm>
+          <a:prstGeom prst="ellipse">
+            <a:avLst/>
+          </a:prstGeom>
+          <a:solidFill>
+            <a:srgbClr val="E27E2D"/>
+          </a:solidFill>
+          <a:ln w="5080">
+            <a:solidFill>
+              <a:srgbClr val="FFFFFF"/>
+            </a:solidFill>
+          </a:ln>
+        </p:spPr>
+        <p:style>
+          <a:lnRef idx="1">
+            <a:schemeClr val="accent1"/>
+          </a:lnRef>
+          <a:fillRef idx="3">
+            <a:schemeClr val="accent1"/>
+          </a:fillRef>
+          <a:effectRef idx="2">
+            <a:schemeClr val="accent1"/>
+          </a:effectRef>
+          <a:fontRef idx="minor">
+            <a:schemeClr val="lt1"/>
+          </a:fontRef>
+        </p:style>
+        <p:txBody>
+          <a:bodyPr rtlCol="0" anchor="ctr"/>
+          <a:lstStyle/>
+          <a:p>
+            <a:pPr algn="ctr"/>
+            <a:endParaRPr/>
+          </a:p>
+        </p:txBody>
+      </p:sp>
+      <p:sp>
+        <p:nvSpPr>
+          <p:cNvPr id="132" name="Oval 131"/>
+          <p:cNvSpPr/>
+          <p:nvPr/>
+        </p:nvSpPr>
+        <p:spPr>
+          <a:xfrm>
+            <a:off x="4987208" y="3265086"/>
+            <a:ext cx="50292" cy="50292"/>
+          </a:xfrm>
+          <a:prstGeom prst="ellipse">
+            <a:avLst/>
+          </a:prstGeom>
+          <a:solidFill>
+            <a:srgbClr val="E27E2D"/>
+          </a:solidFill>
+          <a:ln w="5080">
+            <a:solidFill>
+              <a:srgbClr val="FFFFFF"/>
+            </a:solidFill>
+          </a:ln>
+        </p:spPr>
+        <p:style>
+          <a:lnRef idx="1">
+            <a:schemeClr val="accent1"/>
+          </a:lnRef>
+          <a:fillRef idx="3">
+            <a:schemeClr val="accent1"/>
+          </a:fillRef>
+          <a:effectRef idx="2">
+            <a:schemeClr val="accent1"/>
+          </a:effectRef>
+          <a:fontRef idx="minor">
+            <a:schemeClr val="lt1"/>
+          </a:fontRef>
+        </p:style>
+        <p:txBody>
+          <a:bodyPr rtlCol="0" anchor="ctr"/>
+          <a:lstStyle/>
+          <a:p>
+            <a:pPr algn="ctr"/>
+            <a:endParaRPr/>
+          </a:p>
+        </p:txBody>
+      </p:sp>
+      <p:sp>
+        <p:nvSpPr>
+          <p:cNvPr id="133" name="TextBox 132"/>
+          <p:cNvSpPr txBox="1"/>
+          <p:nvPr/>
+        </p:nvSpPr>
+        <p:spPr>
+          <a:xfrm>
+            <a:off x="4173392" y="3624211"/>
+            <a:ext cx="996696" cy="1074263"/>
+          </a:xfrm>
+          <a:prstGeom prst="rect">
+            <a:avLst/>
+          </a:prstGeom>
+          <a:noFill/>
+        </p:spPr>
+        <p:txBody>
+          <a:bodyPr wrap="square" anchor="t">
+            <a:noAutofit/>
+          </a:bodyPr>
+          <a:lstStyle/>
+          <a:p>
+            <a:pPr algn="ctr"/>
+            <a:r>
+              <a:rPr sz="1000" b="1" dirty="0">
+                <a:solidFill>
+                  <a:srgbClr val="262730"/>
+                </a:solidFill>
+                <a:latin typeface="Aptos"/>
+              </a:rPr>
+              <a:t>Groups:
+Tablet
+Audio
+Cable
+Alexa</a:t>
+            </a:r>
+          </a:p>
+        </p:txBody>
+      </p:sp>
+      <p:sp>
+        <p:nvSpPr>
+          <p:cNvPr id="134" name="Rounded Rectangle 133"/>
+          <p:cNvSpPr/>
+          <p:nvPr/>
+        </p:nvSpPr>
+        <p:spPr>
+          <a:xfrm>
+            <a:off x="5581568" y="1509438"/>
+            <a:ext cx="1417320" cy="3246120"/>
+          </a:xfrm>
+          <a:prstGeom prst="roundRect">
+            <a:avLst/>
+          </a:prstGeom>
+          <a:solidFill>
+            <a:srgbClr val="FDFAFF"/>
+          </a:solidFill>
+          <a:ln w="12700">
+            <a:solidFill>
+              <a:srgbClr val="D2DCE8"/>
+            </a:solidFill>
+          </a:ln>
+        </p:spPr>
+        <p:style>
+          <a:lnRef idx="1">
+            <a:schemeClr val="accent1"/>
+          </a:lnRef>
+          <a:fillRef idx="3">
+            <a:schemeClr val="accent1"/>
+          </a:fillRef>
+          <a:effectRef idx="2">
+            <a:schemeClr val="accent1"/>
+          </a:effectRef>
+          <a:fontRef idx="minor">
+            <a:schemeClr val="lt1"/>
+          </a:fontRef>
+        </p:style>
+        <p:txBody>
+          <a:bodyPr rtlCol="0" anchor="ctr"/>
+          <a:lstStyle/>
+          <a:p>
+            <a:pPr algn="ctr"/>
+            <a:endParaRPr/>
+          </a:p>
+        </p:txBody>
+      </p:sp>
+      <p:sp>
+        <p:nvSpPr>
+          <p:cNvPr id="135" name="TextBox 134"/>
+          <p:cNvSpPr txBox="1"/>
+          <p:nvPr/>
+        </p:nvSpPr>
+        <p:spPr>
+          <a:xfrm>
+            <a:off x="5691296" y="1628310"/>
+            <a:ext cx="1197864" cy="228600"/>
+          </a:xfrm>
+          <a:prstGeom prst="rect">
+            <a:avLst/>
+          </a:prstGeom>
+          <a:noFill/>
+        </p:spPr>
+        <p:txBody>
+          <a:bodyPr wrap="square" anchor="t">
+            <a:normAutofit fontScale="70000" lnSpcReduction="20000"/>
+          </a:bodyPr>
+          <a:lstStyle/>
+          <a:p>
+            <a:pPr algn="ctr"/>
+            <a:r>
+              <a:rPr sz="1000" b="1">
+                <a:solidFill>
+                  <a:srgbClr val="7459C6"/>
+                </a:solidFill>
+                <a:latin typeface="Aptos"/>
+              </a:rPr>
+              <a:t>3. GENERATIVE MODEL</a:t>
+            </a:r>
+          </a:p>
+        </p:txBody>
+      </p:sp>
+      <p:sp>
+        <p:nvSpPr>
+          <p:cNvPr id="136" name="TextBox 135"/>
+          <p:cNvSpPr txBox="1"/>
+          <p:nvPr/>
+        </p:nvSpPr>
+        <p:spPr>
+          <a:xfrm>
+            <a:off x="5709584" y="1893486"/>
+            <a:ext cx="1161288" cy="310896"/>
+          </a:xfrm>
+          <a:prstGeom prst="rect">
+            <a:avLst/>
+          </a:prstGeom>
+          <a:noFill/>
+        </p:spPr>
+        <p:txBody>
+          <a:bodyPr wrap="square" anchor="t">
+            <a:noAutofit/>
+          </a:bodyPr>
+          <a:lstStyle/>
+          <a:p>
+            <a:pPr algn="ctr"/>
+            <a:r>
+              <a:rPr sz="1000" b="1" dirty="0">
+                <a:solidFill>
+                  <a:srgbClr val="262730"/>
+                </a:solidFill>
+                <a:latin typeface="Aptos"/>
+              </a:rPr>
+              <a:t>Write short advice</a:t>
+            </a:r>
+          </a:p>
+        </p:txBody>
+      </p:sp>
+      <p:sp>
+        <p:nvSpPr>
+          <p:cNvPr id="137" name="Rounded Rectangle 136"/>
+          <p:cNvSpPr/>
+          <p:nvPr/>
+        </p:nvSpPr>
+        <p:spPr>
+          <a:xfrm>
+            <a:off x="5901608" y="2460414"/>
+            <a:ext cx="749808" cy="960120"/>
+          </a:xfrm>
+          <a:prstGeom prst="roundRect">
+            <a:avLst/>
+          </a:prstGeom>
+          <a:solidFill>
+            <a:srgbClr val="FFFFFF"/>
+          </a:solidFill>
+          <a:ln w="12700">
+            <a:solidFill>
+              <a:srgbClr val="D2DCE8"/>
+            </a:solidFill>
+          </a:ln>
+        </p:spPr>
+        <p:style>
+          <a:lnRef idx="1">
+            <a:schemeClr val="accent1"/>
+          </a:lnRef>
+          <a:fillRef idx="3">
+            <a:schemeClr val="accent1"/>
+          </a:fillRef>
+          <a:effectRef idx="2">
+            <a:schemeClr val="accent1"/>
+          </a:effectRef>
+          <a:fontRef idx="minor">
+            <a:schemeClr val="lt1"/>
+          </a:fontRef>
+        </p:style>
+        <p:txBody>
+          <a:bodyPr wrap="square" rtlCol="0" anchor="t">
+            <a:normAutofit/>
+          </a:bodyPr>
+          <a:lstStyle/>
+          <a:p>
+            <a:pPr algn="l"/>
+            <a:r>
+              <a:rPr sz="800" b="0" dirty="0">
+                <a:solidFill>
+                  <a:srgbClr val="525B69"/>
+                </a:solidFill>
+                <a:latin typeface="Aptos"/>
+              </a:rPr>
+              <a:t>Best overall
+———
+Why
+———
+Watch out</a:t>
+            </a:r>
+          </a:p>
+        </p:txBody>
+      </p:sp>
+      <p:sp>
+        <p:nvSpPr>
+          <p:cNvPr id="138" name="Oval 137"/>
+          <p:cNvSpPr/>
+          <p:nvPr/>
+        </p:nvSpPr>
+        <p:spPr>
+          <a:xfrm>
+            <a:off x="6111920" y="3423980"/>
+            <a:ext cx="329184" cy="329184"/>
+          </a:xfrm>
+          <a:prstGeom prst="ellipse">
+            <a:avLst/>
+          </a:prstGeom>
+          <a:solidFill>
+            <a:srgbClr val="7459C6"/>
+          </a:solidFill>
+          <a:ln>
+            <a:solidFill>
+              <a:srgbClr val="FFFFFF"/>
+            </a:solidFill>
+          </a:ln>
+        </p:spPr>
+        <p:style>
+          <a:lnRef idx="1">
+            <a:schemeClr val="accent1"/>
+          </a:lnRef>
+          <a:fillRef idx="3">
+            <a:schemeClr val="accent1"/>
+          </a:fillRef>
+          <a:effectRef idx="2">
+            <a:schemeClr val="accent1"/>
+          </a:effectRef>
+          <a:fontRef idx="minor">
+            <a:schemeClr val="lt1"/>
+          </a:fontRef>
+        </p:style>
+        <p:txBody>
+          <a:bodyPr wrap="square" rtlCol="0" anchor="t">
+            <a:normAutofit fontScale="70000" lnSpcReduction="20000"/>
+          </a:bodyPr>
+          <a:lstStyle/>
+          <a:p>
+            <a:pPr algn="ctr"/>
+            <a:r>
+              <a:rPr sz="1500" b="1" dirty="0">
+                <a:solidFill>
+                  <a:srgbClr val="FFFFFF"/>
+                </a:solidFill>
+                <a:latin typeface="Aptos"/>
+              </a:rPr>
+              <a:t>✦</a:t>
+            </a:r>
+          </a:p>
+        </p:txBody>
+      </p:sp>
+      <p:sp>
+        <p:nvSpPr>
+          <p:cNvPr id="139" name="Rounded Rectangle 138"/>
+          <p:cNvSpPr/>
+          <p:nvPr/>
+        </p:nvSpPr>
+        <p:spPr>
+          <a:xfrm>
+            <a:off x="5746160" y="3749718"/>
+            <a:ext cx="1078992" cy="502920"/>
+          </a:xfrm>
+          <a:prstGeom prst="roundRect">
+            <a:avLst/>
+          </a:prstGeom>
+          <a:solidFill>
+            <a:srgbClr val="FFFFFF"/>
+          </a:solidFill>
+          <a:ln w="12700">
+            <a:solidFill>
+              <a:srgbClr val="D2DCE8"/>
+            </a:solidFill>
+          </a:ln>
+        </p:spPr>
+        <p:style>
+          <a:lnRef idx="1">
+            <a:schemeClr val="accent1"/>
+          </a:lnRef>
+          <a:fillRef idx="3">
+            <a:schemeClr val="accent1"/>
+          </a:fillRef>
+          <a:effectRef idx="2">
+            <a:schemeClr val="accent1"/>
+          </a:effectRef>
+          <a:fontRef idx="minor">
+            <a:schemeClr val="lt1"/>
+          </a:fontRef>
+        </p:style>
+        <p:txBody>
+          <a:bodyPr wrap="square" rtlCol="0" anchor="t">
+            <a:normAutofit fontScale="77500" lnSpcReduction="20000"/>
+          </a:bodyPr>
+          <a:lstStyle/>
+          <a:p>
+            <a:pPr algn="l"/>
+            <a:r>
+              <a:rPr sz="1200" b="0">
+                <a:solidFill>
+                  <a:srgbClr val="262730"/>
+                </a:solidFill>
+                <a:latin typeface="Aptos"/>
+              </a:rPr>
+              <a:t>INPUT: rankings
+OUTPUT: article</a:t>
+            </a:r>
+          </a:p>
+        </p:txBody>
+      </p:sp>
+      <p:sp>
+        <p:nvSpPr>
+          <p:cNvPr id="140" name="Rounded Rectangle 139"/>
+          <p:cNvSpPr/>
+          <p:nvPr/>
+        </p:nvSpPr>
+        <p:spPr>
+          <a:xfrm>
+            <a:off x="7200056" y="1509438"/>
+            <a:ext cx="1417320" cy="3246120"/>
+          </a:xfrm>
+          <a:prstGeom prst="roundRect">
+            <a:avLst/>
+          </a:prstGeom>
+          <a:solidFill>
+            <a:srgbClr val="FFFCF5"/>
+          </a:solidFill>
+          <a:ln w="12700">
+            <a:solidFill>
+              <a:srgbClr val="E6CD91"/>
+            </a:solidFill>
+          </a:ln>
+        </p:spPr>
+        <p:style>
+          <a:lnRef idx="1">
+            <a:schemeClr val="accent1"/>
+          </a:lnRef>
+          <a:fillRef idx="3">
+            <a:schemeClr val="accent1"/>
+          </a:fillRef>
+          <a:effectRef idx="2">
+            <a:schemeClr val="accent1"/>
+          </a:effectRef>
+          <a:fontRef idx="minor">
+            <a:schemeClr val="lt1"/>
+          </a:fontRef>
+        </p:style>
+        <p:txBody>
+          <a:bodyPr rtlCol="0" anchor="ctr"/>
+          <a:lstStyle/>
+          <a:p>
+            <a:pPr algn="ctr"/>
+            <a:endParaRPr/>
+          </a:p>
+        </p:txBody>
+      </p:sp>
+      <p:sp>
+        <p:nvSpPr>
+          <p:cNvPr id="141" name="TextBox 140"/>
+          <p:cNvSpPr txBox="1"/>
+          <p:nvPr/>
+        </p:nvSpPr>
+        <p:spPr>
+          <a:xfrm>
+            <a:off x="7309784" y="1655742"/>
+            <a:ext cx="1197864" cy="256032"/>
+          </a:xfrm>
+          <a:prstGeom prst="rect">
+            <a:avLst/>
+          </a:prstGeom>
+          <a:noFill/>
+        </p:spPr>
+        <p:txBody>
+          <a:bodyPr wrap="square" anchor="t">
+            <a:normAutofit/>
+          </a:bodyPr>
+          <a:lstStyle/>
+          <a:p>
+            <a:pPr algn="ctr"/>
+            <a:r>
+              <a:rPr sz="900" b="1">
+                <a:solidFill>
+                  <a:srgbClr val="E27E2D"/>
+                </a:solidFill>
+                <a:latin typeface="Aptos"/>
+              </a:rPr>
+              <a:t>STREAMLIT APP</a:t>
+            </a:r>
+          </a:p>
+        </p:txBody>
+      </p:sp>
+      <p:sp>
+        <p:nvSpPr>
+          <p:cNvPr id="142" name="TextBox 141"/>
+          <p:cNvSpPr txBox="1"/>
+          <p:nvPr/>
+        </p:nvSpPr>
+        <p:spPr>
+          <a:xfrm>
+            <a:off x="7364648" y="1948350"/>
+            <a:ext cx="1088136" cy="347472"/>
+          </a:xfrm>
+          <a:prstGeom prst="rect">
+            <a:avLst/>
+          </a:prstGeom>
+          <a:noFill/>
+        </p:spPr>
+        <p:txBody>
+          <a:bodyPr wrap="square" anchor="t">
+            <a:noAutofit/>
+          </a:bodyPr>
+          <a:lstStyle/>
+          <a:p>
+            <a:pPr algn="ctr"/>
+            <a:r>
+              <a:rPr sz="900" b="1" dirty="0">
+                <a:solidFill>
+                  <a:srgbClr val="262730"/>
+                </a:solidFill>
+                <a:latin typeface="Aptos"/>
+              </a:rPr>
+              <a:t>Shopper-friendly
+recommendation</a:t>
+            </a:r>
+          </a:p>
+        </p:txBody>
+      </p:sp>
+      <p:sp>
+        <p:nvSpPr>
+          <p:cNvPr id="143" name="Rounded Rectangle 142"/>
+          <p:cNvSpPr/>
+          <p:nvPr/>
+        </p:nvSpPr>
+        <p:spPr>
+          <a:xfrm>
+            <a:off x="7364648" y="2469558"/>
+            <a:ext cx="1088136" cy="1691640"/>
+          </a:xfrm>
+          <a:prstGeom prst="roundRect">
+            <a:avLst/>
+          </a:prstGeom>
+          <a:solidFill>
+            <a:srgbClr val="FFFFFF"/>
+          </a:solidFill>
+          <a:ln w="12700">
+            <a:solidFill>
+              <a:srgbClr val="174A80"/>
+            </a:solidFill>
+          </a:ln>
+        </p:spPr>
+        <p:style>
+          <a:lnRef idx="1">
+            <a:schemeClr val="accent1"/>
+          </a:lnRef>
+          <a:fillRef idx="3">
+            <a:schemeClr val="accent1"/>
+          </a:fillRef>
+          <a:effectRef idx="2">
+            <a:schemeClr val="accent1"/>
+          </a:effectRef>
+          <a:fontRef idx="minor">
+            <a:schemeClr val="lt1"/>
+          </a:fontRef>
+        </p:style>
+        <p:txBody>
+          <a:bodyPr wrap="square" rtlCol="0" anchor="t">
+            <a:normAutofit/>
+          </a:bodyPr>
+          <a:lstStyle/>
+          <a:p>
+            <a:pPr algn="l"/>
+            <a:r>
+              <a:rPr sz="850" b="1">
+                <a:solidFill>
+                  <a:srgbClr val="262730"/>
+                </a:solidFill>
+                <a:latin typeface="Aptos"/>
+              </a:rPr>
+              <a:t>Top Products for You
+Best pick
+Score 87
+Strengths
+Complaints
+Watch-outs</a:t>
+            </a:r>
+          </a:p>
+        </p:txBody>
+      </p:sp>
+      <p:cxnSp>
+        <p:nvCxnSpPr>
+          <p:cNvPr id="144" name="Connector 143"/>
+          <p:cNvCxnSpPr/>
+          <p:nvPr/>
+        </p:nvCxnSpPr>
+        <p:spPr>
+          <a:xfrm>
+            <a:off x="1899244" y="3137070"/>
+            <a:ext cx="146304" cy="0"/>
+          </a:xfrm>
+          <a:prstGeom prst="line">
+            <a:avLst/>
+          </a:prstGeom>
+          <a:ln w="31750">
+            <a:solidFill>
+              <a:srgbClr val="174A80"/>
+            </a:solidFill>
+          </a:ln>
+        </p:spPr>
+        <p:style>
+          <a:lnRef idx="2">
+            <a:schemeClr val="accent1"/>
+          </a:lnRef>
+          <a:fillRef idx="0">
+            <a:schemeClr val="accent1"/>
+          </a:fillRef>
+          <a:effectRef idx="1">
+            <a:schemeClr val="accent1"/>
+          </a:effectRef>
+          <a:fontRef idx="minor">
+            <a:schemeClr val="tx1"/>
+          </a:fontRef>
+        </p:style>
+      </p:cxnSp>
+      <p:cxnSp>
+        <p:nvCxnSpPr>
+          <p:cNvPr id="145" name="Connector 144"/>
+          <p:cNvCxnSpPr>
+            <a:cxnSpLocks/>
+            <a:stCxn id="73" idx="3"/>
+            <a:endCxn id="94" idx="1"/>
+          </p:cNvCxnSpPr>
+          <p:nvPr/>
+        </p:nvCxnSpPr>
+        <p:spPr>
+          <a:xfrm>
+            <a:off x="3702476" y="3132498"/>
+            <a:ext cx="260604" cy="0"/>
+          </a:xfrm>
+          <a:prstGeom prst="line">
+            <a:avLst/>
+          </a:prstGeom>
+          <a:ln w="31750">
+            <a:solidFill>
+              <a:srgbClr val="174A80"/>
+            </a:solidFill>
+          </a:ln>
+        </p:spPr>
+        <p:style>
+          <a:lnRef idx="2">
+            <a:schemeClr val="accent1"/>
+          </a:lnRef>
+          <a:fillRef idx="0">
+            <a:schemeClr val="accent1"/>
+          </a:fillRef>
+          <a:effectRef idx="1">
+            <a:schemeClr val="accent1"/>
+          </a:effectRef>
+          <a:fontRef idx="minor">
+            <a:schemeClr val="tx1"/>
+          </a:fontRef>
+        </p:style>
+      </p:cxnSp>
+      <p:cxnSp>
+        <p:nvCxnSpPr>
+          <p:cNvPr id="146" name="Connector 145"/>
+          <p:cNvCxnSpPr/>
+          <p:nvPr/>
+        </p:nvCxnSpPr>
+        <p:spPr>
+          <a:xfrm>
+            <a:off x="5398688" y="3137070"/>
+            <a:ext cx="146304" cy="0"/>
+          </a:xfrm>
+          <a:prstGeom prst="line">
+            <a:avLst/>
+          </a:prstGeom>
+          <a:ln w="31750">
+            <a:solidFill>
+              <a:srgbClr val="174A80"/>
+            </a:solidFill>
+          </a:ln>
+        </p:spPr>
+        <p:style>
+          <a:lnRef idx="2">
+            <a:schemeClr val="accent1"/>
+          </a:lnRef>
+          <a:fillRef idx="0">
+            <a:schemeClr val="accent1"/>
+          </a:fillRef>
+          <a:effectRef idx="1">
+            <a:schemeClr val="accent1"/>
+          </a:effectRef>
+          <a:fontRef idx="minor">
+            <a:schemeClr val="tx1"/>
+          </a:fontRef>
+        </p:style>
+      </p:cxnSp>
+      <p:cxnSp>
+        <p:nvCxnSpPr>
+          <p:cNvPr id="147" name="Connector 146"/>
+          <p:cNvCxnSpPr/>
+          <p:nvPr/>
+        </p:nvCxnSpPr>
+        <p:spPr>
+          <a:xfrm>
+            <a:off x="7017176" y="3137070"/>
+            <a:ext cx="146304" cy="0"/>
+          </a:xfrm>
+          <a:prstGeom prst="line">
+            <a:avLst/>
+          </a:prstGeom>
+          <a:ln w="31750">
+            <a:solidFill>
+              <a:srgbClr val="174A80"/>
+            </a:solidFill>
+          </a:ln>
+        </p:spPr>
+        <p:style>
+          <a:lnRef idx="2">
+            <a:schemeClr val="accent1"/>
+          </a:lnRef>
+          <a:fillRef idx="0">
+            <a:schemeClr val="accent1"/>
+          </a:fillRef>
+          <a:effectRef idx="1">
+            <a:schemeClr val="accent1"/>
+          </a:effectRef>
+          <a:fontRef idx="minor">
+            <a:schemeClr val="tx1"/>
+          </a:fontRef>
+        </p:style>
+      </p:cxnSp>
     </p:spTree>
   </p:cSld>
   <p:clrMapOvr>
@@ -8592,12 +12121,17 @@
                 <a:spcPts val="0"/>
               </a:spcBef>
               <a:spcAft>
-                <a:spcPts val="0"/>
+                <a:spcPts val="700"/>
               </a:spcAft>
               <a:buNone/>
             </a:pPr>
             <a:r>
-              <a:rPr lang="en"/>
+              <a:rPr sz="3000" b="1">
+                <a:solidFill>
+                  <a:srgbClr val="262730"/>
+                </a:solidFill>
+                <a:latin typeface="Aptos"/>
+              </a:rPr>
               <a:t>Methods</a:t>
             </a:r>
             <a:endParaRPr/>
@@ -8617,7 +12151,7 @@
         <p:spPr>
           <a:xfrm>
             <a:off x="311700" y="1152475"/>
-            <a:ext cx="8520600" cy="1400000"/>
+            <a:ext cx="8520600" cy="1785458"/>
           </a:xfrm>
           <a:prstGeom prst="rect">
             <a:avLst/>
@@ -8625,55 +12159,113 @@
         </p:spPr>
         <p:txBody>
           <a:bodyPr spcFirstLastPara="1" wrap="square" lIns="91425" tIns="91425" rIns="91425" bIns="91425" anchor="t" anchorCtr="0">
-            <a:normAutofit/>
+            <a:normAutofit fontScale="77500" lnSpcReduction="20000"/>
           </a:bodyPr>
           <a:lstStyle/>
           <a:p>
-            <a:pPr marL="457200" lvl="0" indent="-342900" algn="l" rtl="0">
-              <a:spcBef>
-                <a:spcPts val="0"/>
-              </a:spcBef>
-              <a:spcAft>
-                <a:spcPts val="0"/>
+            <a:pPr marL="114300" lvl="0" indent="0" algn="l" rtl="0">
+              <a:spcBef>
+                <a:spcPts val="0"/>
+              </a:spcBef>
+              <a:spcAft>
+                <a:spcPts val="700"/>
               </a:spcAft>
               <a:buSzPts val="1800"/>
-              <a:buChar char="●"/>
+              <a:buNone/>
             </a:pPr>
             <a:r>
-              <a:rPr lang="en"/>
-              <a:t>Dataset: Datafiniti Amazon Consumer Reviews (~28k after cleaning).</a:t>
+              <a:rPr sz="2100" b="1" dirty="0">
+                <a:solidFill>
+                  <a:srgbClr val="FF4B4B"/>
+                </a:solidFill>
+                <a:latin typeface="Aptos"/>
+              </a:rPr>
+              <a:t>Simple methods, connected end to end.</a:t>
             </a:r>
           </a:p>
           <a:p>
-            <a:pPr marL="457200" lvl="0" indent="-342900" algn="l" rtl="0">
-              <a:spcBef>
-                <a:spcPts val="0"/>
-              </a:spcBef>
-              <a:spcAft>
-                <a:spcPts val="0"/>
-              </a:spcAft>
-              <a:buSzPts val="1800"/>
-              <a:buChar char="●"/>
+            <a:pPr>
+              <a:spcAft>
+                <a:spcPts val="700"/>
+              </a:spcAft>
+            </a:pPr>
+            <a:endParaRPr sz="2100" b="1" dirty="0">
+              <a:solidFill>
+                <a:srgbClr val="FF4B4B"/>
+              </a:solidFill>
+              <a:latin typeface="Aptos"/>
+            </a:endParaRPr>
+          </a:p>
+          <a:p>
+            <a:pPr>
+              <a:spcAft>
+                <a:spcPts val="700"/>
+              </a:spcAft>
+              <a:buFont typeface="Wingdings" panose="05000000000000000000" pitchFamily="2" charset="2"/>
+              <a:buChar char="§"/>
             </a:pPr>
             <a:r>
-              <a:rPr lang="en"/>
-              <a:t>Required columns: name, review text, rating, categories.</a:t>
+              <a:rPr sz="1900" b="0" dirty="0">
+                <a:solidFill>
+                  <a:srgbClr val="262730"/>
+                </a:solidFill>
+                <a:latin typeface="Aptos"/>
+              </a:rPr>
+              <a:t>Dataset: </a:t>
             </a:r>
-          </a:p>
-          <a:p>
-            <a:pPr marL="457200" lvl="0" indent="-342900" algn="l" rtl="0">
-              <a:spcBef>
-                <a:spcPts val="0"/>
-              </a:spcBef>
-              <a:spcAft>
-                <a:spcPts val="0"/>
-              </a:spcAft>
-              <a:buSzPts val="1800"/>
-              <a:buChar char="●"/>
+            <a:r>
+              <a:rPr sz="1900" b="0" dirty="0" err="1">
+                <a:solidFill>
+                  <a:srgbClr val="262730"/>
+                </a:solidFill>
+                <a:latin typeface="Aptos"/>
+              </a:rPr>
+              <a:t>Datafiniti</a:t>
+            </a:r>
+            <a:r>
+              <a:rPr sz="1900" b="0" dirty="0">
+                <a:solidFill>
+                  <a:srgbClr val="262730"/>
+                </a:solidFill>
+                <a:latin typeface="Aptos"/>
+              </a:rPr>
+              <a:t> Amazon reviews, 57,418 usable rows.</a:t>
+            </a:r>
+          </a:p>
+          <a:p>
+            <a:pPr>
+              <a:spcAft>
+                <a:spcPts val="700"/>
+              </a:spcAft>
+              <a:buFont typeface="Wingdings" panose="05000000000000000000" pitchFamily="2" charset="2"/>
+              <a:buChar char="§"/>
             </a:pPr>
             <a:r>
-              <a:rPr lang="en"/>
-              <a:t>Ranking score per category: 0.5 rating + 0.3 positive ratio + 0.2 review count.</a:t>
+              <a:rPr sz="1900" b="0" dirty="0">
+                <a:solidFill>
+                  <a:srgbClr val="262730"/>
+                </a:solidFill>
+                <a:latin typeface="Aptos"/>
+              </a:rPr>
+              <a:t>Main columns: product name, review text, rating, categories.</a:t>
+            </a:r>
+          </a:p>
+          <a:p>
+            <a:pPr>
+              <a:spcAft>
+                <a:spcPts val="700"/>
+              </a:spcAft>
+              <a:buFont typeface="Wingdings" panose="05000000000000000000" pitchFamily="2" charset="2"/>
+              <a:buChar char="§"/>
+            </a:pPr>
+            <a:r>
+              <a:rPr sz="1900" b="0" dirty="0">
+                <a:solidFill>
+                  <a:srgbClr val="262730"/>
+                </a:solidFill>
+                <a:latin typeface="Aptos"/>
+              </a:rPr>
+              <a:t>Ranking combines rating, positive share, and review volume.</a:t>
             </a:r>
           </a:p>
         </p:txBody>
@@ -8686,7 +12278,7 @@
         </p:nvSpPr>
         <p:spPr>
           <a:xfrm>
-            <a:off x="822000" y="3693500"/>
+            <a:off x="822000" y="3024632"/>
             <a:ext cx="1100000" cy="550000"/>
           </a:xfrm>
           <a:prstGeom prst="roundRect">
@@ -8741,7 +12333,7 @@
         </p:nvSpPr>
         <p:spPr>
           <a:xfrm>
-            <a:off x="1922000" y="3858500"/>
+            <a:off x="1922000" y="3189632"/>
             <a:ext cx="180000" cy="220000"/>
           </a:xfrm>
           <a:prstGeom prst="rightArrow">
@@ -8786,7 +12378,7 @@
         </p:nvSpPr>
         <p:spPr>
           <a:xfrm>
-            <a:off x="2102000" y="3693500"/>
+            <a:off x="2102000" y="3024632"/>
             <a:ext cx="1100000" cy="550000"/>
           </a:xfrm>
           <a:prstGeom prst="roundRect">
@@ -8841,7 +12433,7 @@
         </p:nvSpPr>
         <p:spPr>
           <a:xfrm>
-            <a:off x="3202000" y="3858500"/>
+            <a:off x="3202000" y="3189632"/>
             <a:ext cx="180000" cy="220000"/>
           </a:xfrm>
           <a:prstGeom prst="rightArrow">
@@ -8886,7 +12478,7 @@
         </p:nvSpPr>
         <p:spPr>
           <a:xfrm>
-            <a:off x="3382000" y="3693500"/>
+            <a:off x="3382000" y="3024632"/>
             <a:ext cx="1100000" cy="550000"/>
           </a:xfrm>
           <a:prstGeom prst="roundRect">
@@ -8941,7 +12533,7 @@
         </p:nvSpPr>
         <p:spPr>
           <a:xfrm>
-            <a:off x="4482000" y="3858500"/>
+            <a:off x="4482000" y="3189632"/>
             <a:ext cx="180000" cy="220000"/>
           </a:xfrm>
           <a:prstGeom prst="rightArrow">
@@ -8986,7 +12578,7 @@
         </p:nvSpPr>
         <p:spPr>
           <a:xfrm>
-            <a:off x="4662000" y="3693500"/>
+            <a:off x="4662000" y="3024632"/>
             <a:ext cx="1100000" cy="550000"/>
           </a:xfrm>
           <a:prstGeom prst="roundRect">
@@ -9041,7 +12633,7 @@
         </p:nvSpPr>
         <p:spPr>
           <a:xfrm>
-            <a:off x="5762000" y="3858500"/>
+            <a:off x="5762000" y="3189632"/>
             <a:ext cx="180000" cy="220000"/>
           </a:xfrm>
           <a:prstGeom prst="rightArrow">
@@ -9086,7 +12678,7 @@
         </p:nvSpPr>
         <p:spPr>
           <a:xfrm>
-            <a:off x="5942000" y="3693500"/>
+            <a:off x="5942000" y="3024632"/>
             <a:ext cx="1100000" cy="550000"/>
           </a:xfrm>
           <a:prstGeom prst="roundRect">
@@ -9141,7 +12733,7 @@
         </p:nvSpPr>
         <p:spPr>
           <a:xfrm>
-            <a:off x="7042000" y="3858500"/>
+            <a:off x="7042000" y="3189632"/>
             <a:ext cx="180000" cy="220000"/>
           </a:xfrm>
           <a:prstGeom prst="rightArrow">
@@ -9186,7 +12778,7 @@
         </p:nvSpPr>
         <p:spPr>
           <a:xfrm>
-            <a:off x="7222000" y="3693500"/>
+            <a:off x="7222000" y="3024632"/>
             <a:ext cx="1100000" cy="550000"/>
           </a:xfrm>
           <a:prstGeom prst="roundRect">
@@ -9241,7 +12833,7 @@
         </p:nvSpPr>
         <p:spPr>
           <a:xfrm>
-            <a:off x="1500000" y="4393500"/>
+            <a:off x="1500000" y="3724632"/>
             <a:ext cx="6144000" cy="400000"/>
           </a:xfrm>
           <a:prstGeom prst="roundRect">
@@ -9272,18 +12864,24 @@
           </a:fontRef>
         </p:style>
         <p:txBody>
-          <a:bodyPr wrap="square" lIns="108000" tIns="72000" rIns="108000" bIns="72000" rtlCol="0" anchor="ctr"/>
+          <a:bodyPr wrap="square" lIns="108000" tIns="72000" rIns="108000" bIns="72000" rtlCol="0" anchor="t">
+            <a:normAutofit/>
+          </a:bodyPr>
           <a:lstStyle/>
           <a:p>
-            <a:pPr algn="ctr"/>
+            <a:pPr algn="l">
+              <a:spcAft>
+                <a:spcPts val="700"/>
+              </a:spcAft>
+            </a:pPr>
             <a:r>
-              <a:rPr sz="1200">
-                <a:solidFill>
-                  <a:srgbClr val="212121"/>
-                </a:solidFill>
-                <a:latin typeface="Calibri"/>
+              <a:rPr sz="1300" b="1">
+                <a:solidFill>
+                  <a:srgbClr val="262730"/>
+                </a:solidFill>
+                <a:latin typeface="Aptos"/>
               </a:rPr>
-              <a:t>Score = 0.5 x rating  +  0.3 x positive_ratio  +  0.2 x review_count (normalised per category)</a:t>
+              <a:t>Ranking score = rating + sentiment + review volume</a:t>
             </a:r>
           </a:p>
         </p:txBody>
@@ -9343,12 +12941,17 @@
                 <a:spcPts val="0"/>
               </a:spcBef>
               <a:spcAft>
-                <a:spcPts val="0"/>
+                <a:spcPts val="700"/>
               </a:spcAft>
               <a:buNone/>
             </a:pPr>
             <a:r>
-              <a:rPr lang="en"/>
+              <a:rPr sz="3000" b="1">
+                <a:solidFill>
+                  <a:srgbClr val="262730"/>
+                </a:solidFill>
+                <a:latin typeface="Aptos"/>
+              </a:rPr>
               <a:t>Model 1 - Sentiment</a:t>
             </a:r>
             <a:endParaRPr/>
@@ -9367,8 +12970,8 @@
         </p:nvSpPr>
         <p:spPr>
           <a:xfrm>
-            <a:off x="311700" y="1152475"/>
-            <a:ext cx="5000000" cy="2300000"/>
+            <a:off x="311699" y="1152475"/>
+            <a:ext cx="8442834" cy="2437392"/>
           </a:xfrm>
           <a:prstGeom prst="rect">
             <a:avLst/>
@@ -9376,7 +12979,7 @@
         </p:spPr>
         <p:txBody>
           <a:bodyPr spcFirstLastPara="1" wrap="square" lIns="91425" tIns="91425" rIns="91425" bIns="91425" anchor="t" anchorCtr="0">
-            <a:normAutofit/>
+            <a:normAutofit fontScale="92500" lnSpcReduction="20000"/>
           </a:bodyPr>
           <a:lstStyle/>
           <a:p>
@@ -9385,146 +12988,103 @@
                 <a:spcPts val="0"/>
               </a:spcBef>
               <a:spcAft>
-                <a:spcPts val="0"/>
+                <a:spcPts val="700"/>
               </a:spcAft>
               <a:buNone/>
             </a:pPr>
             <a:r>
-              <a:rPr lang="en" b="1"/>
-              <a:t>Goal: label every review as positive, neutral, or negative.</a:t>
+              <a:rPr sz="2200" b="1" dirty="0">
+                <a:solidFill>
+                  <a:srgbClr val="FF4B4B"/>
+                </a:solidFill>
+                <a:latin typeface="Aptos"/>
+              </a:rPr>
+              <a:t>Sentiment starts with a clear rule.</a:t>
             </a:r>
           </a:p>
           <a:p>
-            <a:pPr marL="0" lvl="0" indent="0" algn="l" rtl="0">
-              <a:spcBef>
-                <a:spcPts val="0"/>
-              </a:spcBef>
-              <a:spcAft>
-                <a:spcPts val="0"/>
-              </a:spcAft>
-              <a:buNone/>
+            <a:pPr>
+              <a:spcAft>
+                <a:spcPts val="700"/>
+              </a:spcAft>
+            </a:pPr>
+            <a:endParaRPr sz="2200" b="1" dirty="0">
+              <a:solidFill>
+                <a:srgbClr val="FF4B4B"/>
+              </a:solidFill>
+              <a:latin typeface="Aptos"/>
+            </a:endParaRPr>
+          </a:p>
+          <a:p>
+            <a:pPr>
+              <a:spcAft>
+                <a:spcPts val="700"/>
+              </a:spcAft>
+              <a:buFont typeface="Wingdings" panose="05000000000000000000" pitchFamily="2" charset="2"/>
+              <a:buChar char="§"/>
             </a:pPr>
             <a:r>
-              <a:rPr lang="en" b="1"/>
-              <a:t>Rule: 1-2 stars = negative, 3 = neutral, 4-5 = positive.</a:t>
+              <a:rPr sz="2000" b="0" dirty="0">
+                <a:solidFill>
+                  <a:srgbClr val="262730"/>
+                </a:solidFill>
+                <a:latin typeface="Aptos"/>
+              </a:rPr>
+              <a:t>1-2 stars = negative</a:t>
             </a:r>
           </a:p>
           <a:p>
-            <a:pPr marL="0" lvl="0" indent="0" algn="l" rtl="0">
-              <a:spcBef>
-                <a:spcPts val="0"/>
-              </a:spcBef>
-              <a:spcAft>
-                <a:spcPts val="0"/>
-              </a:spcAft>
-              <a:buNone/>
+            <a:pPr>
+              <a:spcAft>
+                <a:spcPts val="700"/>
+              </a:spcAft>
+              <a:buFont typeface="Wingdings" panose="05000000000000000000" pitchFamily="2" charset="2"/>
+              <a:buChar char="§"/>
             </a:pPr>
             <a:r>
-              <a:rPr lang="en" b="1"/>
-              <a:t>Model: DistilBERT SST-2, with low-confidence outputs collapsed to neutral.</a:t>
+              <a:rPr sz="2000" b="0" dirty="0">
+                <a:solidFill>
+                  <a:srgbClr val="262730"/>
+                </a:solidFill>
+                <a:latin typeface="Aptos"/>
+              </a:rPr>
+              <a:t>3 stars = neutral</a:t>
             </a:r>
           </a:p>
           <a:p>
-            <a:pPr marL="0" lvl="0" indent="0" algn="l" rtl="0">
-              <a:spcBef>
-                <a:spcPts val="0"/>
-              </a:spcBef>
-              <a:spcAft>
-                <a:spcPts val="0"/>
-              </a:spcAft>
-              <a:buNone/>
+            <a:pPr>
+              <a:spcAft>
+                <a:spcPts val="700"/>
+              </a:spcAft>
+              <a:buFont typeface="Wingdings" panose="05000000000000000000" pitchFamily="2" charset="2"/>
+              <a:buChar char="§"/>
             </a:pPr>
             <a:r>
-              <a:rPr lang="en" b="1"/>
-              <a:t>Rating is ground truth, model never sees it. Evaluation stays honest.</a:t>
+              <a:rPr sz="2000" b="0" dirty="0">
+                <a:solidFill>
+                  <a:srgbClr val="262730"/>
+                </a:solidFill>
+                <a:latin typeface="Aptos"/>
+              </a:rPr>
+              <a:t>4-5 stars = positive</a:t>
             </a:r>
           </a:p>
-        </p:txBody>
-      </p:sp>
-      <p:sp>
-        <p:nvSpPr>
-          <p:cNvPr id="80" name="Rounded Rectangle 79"/>
-          <p:cNvSpPr/>
-          <p:nvPr/>
-        </p:nvSpPr>
-        <p:spPr>
-          <a:xfrm>
-            <a:off x="5832300" y="1300000"/>
-            <a:ext cx="2900000" cy="1100000"/>
-          </a:xfrm>
-          <a:prstGeom prst="roundRect">
-            <a:avLst/>
-          </a:prstGeom>
-          <a:solidFill>
-            <a:srgbClr val="EEEEEE"/>
-          </a:solidFill>
-          <a:ln w="9525">
-            <a:solidFill>
-              <a:srgbClr val="4285F4"/>
-            </a:solidFill>
-          </a:ln>
-          <a:effectLst/>
-        </p:spPr>
-        <p:style>
-          <a:lnRef idx="1">
-            <a:schemeClr val="accent1"/>
-          </a:lnRef>
-          <a:fillRef idx="3">
-            <a:schemeClr val="accent1"/>
-          </a:fillRef>
-          <a:effectRef idx="2">
-            <a:schemeClr val="accent1"/>
-          </a:effectRef>
-          <a:fontRef idx="minor">
-            <a:schemeClr val="lt1"/>
-          </a:fontRef>
-        </p:style>
-        <p:txBody>
-          <a:bodyPr wrap="square" lIns="108000" tIns="72000" rIns="108000" bIns="72000" rtlCol="0" anchor="ctr"/>
-          <a:lstStyle/>
-          <a:p>
-            <a:pPr algn="ctr"/>
+          <a:p>
+            <a:pPr>
+              <a:spcAft>
+                <a:spcPts val="700"/>
+              </a:spcAft>
+              <a:buFont typeface="Wingdings" panose="05000000000000000000" pitchFamily="2" charset="2"/>
+              <a:buChar char="§"/>
+            </a:pPr>
             <a:r>
-              <a:rPr sz="1400" b="1">
-                <a:solidFill>
-                  <a:srgbClr val="4285F4"/>
-                </a:solidFill>
-                <a:latin typeface="Calibri"/>
+              <a:rPr sz="2000" b="0" dirty="0">
+                <a:solidFill>
+                  <a:srgbClr val="262730"/>
+                </a:solidFill>
+                <a:latin typeface="Aptos"/>
               </a:rPr>
-              <a:t>Rating to label</a:t>
-            </a:r>
-          </a:p>
-          <a:p>
-            <a:r>
-              <a:rPr sz="1300">
-                <a:solidFill>
-                  <a:srgbClr val="212121"/>
-                </a:solidFill>
-                <a:latin typeface="Calibri"/>
-              </a:rPr>
-              <a:t>1-2 stars  -  negative</a:t>
-            </a:r>
-          </a:p>
-          <a:p>
-            <a:r>
-              <a:rPr sz="1300">
-                <a:solidFill>
-                  <a:srgbClr val="212121"/>
-                </a:solidFill>
-                <a:latin typeface="Calibri"/>
-              </a:rPr>
-              <a:t>3 stars     -  neutral</a:t>
-            </a:r>
-          </a:p>
-          <a:p>
-            <a:r>
-              <a:rPr sz="1300">
-                <a:solidFill>
-                  <a:srgbClr val="212121"/>
-                </a:solidFill>
-                <a:latin typeface="Calibri"/>
-              </a:rPr>
-              <a:t>4-5 stars  -  positive</a:t>
+              <a:t>Why this works here: it is transparent, fast, and enough for product ranking.</a:t>
             </a:r>
           </a:p>
         </p:txBody>
@@ -9584,13 +13144,18 @@
                 <a:spcPts val="0"/>
               </a:spcBef>
               <a:spcAft>
-                <a:spcPts val="0"/>
+                <a:spcPts val="700"/>
               </a:spcAft>
               <a:buNone/>
             </a:pPr>
             <a:r>
-              <a:rPr lang="en"/>
-              <a:t>Model 1 - Evaluation</a:t>
+              <a:rPr sz="3000" b="1">
+                <a:solidFill>
+                  <a:srgbClr val="262730"/>
+                </a:solidFill>
+                <a:latin typeface="Aptos"/>
+              </a:rPr>
+              <a:t>Sentiment result</a:t>
             </a:r>
             <a:endParaRPr/>
           </a:p>
@@ -9609,7 +13174,7 @@
         <p:spPr>
           <a:xfrm>
             <a:off x="311700" y="1152475"/>
-            <a:ext cx="8520600" cy="1800000"/>
+            <a:ext cx="8520600" cy="2361192"/>
           </a:xfrm>
           <a:prstGeom prst="rect">
             <a:avLst/>
@@ -9617,7 +13182,7 @@
         </p:spPr>
         <p:txBody>
           <a:bodyPr spcFirstLastPara="1" wrap="square" lIns="91425" tIns="91425" rIns="91425" bIns="91425" anchor="t" anchorCtr="0">
-            <a:normAutofit/>
+            <a:normAutofit fontScale="92500" lnSpcReduction="20000"/>
           </a:bodyPr>
           <a:lstStyle/>
           <a:p>
@@ -9626,43 +13191,85 @@
                 <a:spcPts val="0"/>
               </a:spcBef>
               <a:spcAft>
-                <a:spcPts val="0"/>
+                <a:spcPts val="700"/>
               </a:spcAft>
               <a:buNone/>
             </a:pPr>
             <a:r>
-              <a:rPr lang="en" b="1"/>
-              <a:t>Stratified 20% holdout, three classes.</a:t>
+              <a:rPr sz="2100" b="1" dirty="0">
+                <a:solidFill>
+                  <a:srgbClr val="FF4B4B"/>
+                </a:solidFill>
+                <a:latin typeface="Aptos"/>
+              </a:rPr>
+              <a:t>The signal is useful, but not perfect.</a:t>
             </a:r>
           </a:p>
           <a:p>
-            <a:pPr marL="0" lvl="0" indent="0" algn="l" rtl="0">
-              <a:spcBef>
-                <a:spcPts val="0"/>
-              </a:spcBef>
-              <a:spcAft>
-                <a:spcPts val="0"/>
-              </a:spcAft>
-              <a:buNone/>
+            <a:pPr>
+              <a:spcAft>
+                <a:spcPts val="700"/>
+              </a:spcAft>
+            </a:pPr>
+            <a:endParaRPr sz="2100" b="1" dirty="0">
+              <a:solidFill>
+                <a:srgbClr val="FF4B4B"/>
+              </a:solidFill>
+              <a:latin typeface="Aptos"/>
+            </a:endParaRPr>
+          </a:p>
+          <a:p>
+            <a:pPr>
+              <a:spcAft>
+                <a:spcPts val="700"/>
+              </a:spcAft>
+              <a:buFont typeface="Wingdings" panose="05000000000000000000" pitchFamily="2" charset="2"/>
+              <a:buChar char="§"/>
             </a:pPr>
             <a:r>
-              <a:rPr lang="en" b="1"/>
-              <a:t>Most errors land on the neutral and positive boundary, where 3-star reviews mix praise and complaints.</a:t>
+              <a:rPr sz="1900" b="0" dirty="0">
+                <a:solidFill>
+                  <a:srgbClr val="262730"/>
+                </a:solidFill>
+                <a:latin typeface="Aptos"/>
+              </a:rPr>
+              <a:t>Most reviews are positive, which matches consumer-product review data.</a:t>
             </a:r>
           </a:p>
           <a:p>
-            <a:pPr marL="0" lvl="0" indent="0" algn="l" rtl="0">
-              <a:spcBef>
-                <a:spcPts val="0"/>
-              </a:spcBef>
-              <a:spcAft>
-                <a:spcPts val="0"/>
-              </a:spcAft>
-              <a:buNone/>
+            <a:pPr>
+              <a:spcAft>
+                <a:spcPts val="700"/>
+              </a:spcAft>
+              <a:buFont typeface="Wingdings" panose="05000000000000000000" pitchFamily="2" charset="2"/>
+              <a:buChar char="§"/>
             </a:pPr>
             <a:r>
-              <a:rPr lang="en" b="1"/>
-              <a:t>Failure inspection focuses on cases where text and rating actually disagree.</a:t>
+              <a:rPr sz="1900" b="0" dirty="0">
+                <a:solidFill>
+                  <a:srgbClr val="262730"/>
+                </a:solidFill>
+                <a:latin typeface="Aptos"/>
+              </a:rPr>
+              <a:t>Neutral and negative reviews are still important because they reveal common complaints.</a:t>
+            </a:r>
+          </a:p>
+          <a:p>
+            <a:pPr>
+              <a:spcAft>
+                <a:spcPts val="700"/>
+              </a:spcAft>
+              <a:buFont typeface="Wingdings" panose="05000000000000000000" pitchFamily="2" charset="2"/>
+              <a:buChar char="§"/>
+            </a:pPr>
+            <a:r>
+              <a:rPr sz="1900" b="0" dirty="0">
+                <a:solidFill>
+                  <a:srgbClr val="262730"/>
+                </a:solidFill>
+                <a:latin typeface="Aptos"/>
+              </a:rPr>
+              <a:t>Limitation: ratings can miss sarcasm or mixed opinions.</a:t>
             </a:r>
           </a:p>
         </p:txBody>
@@ -9675,7 +13282,7 @@
         </p:nvSpPr>
         <p:spPr>
           <a:xfrm>
-            <a:off x="822000" y="3763500"/>
+            <a:off x="822000" y="3594167"/>
             <a:ext cx="2400000" cy="1000000"/>
           </a:xfrm>
           <a:prstGeom prst="roundRect">
@@ -9704,28 +13311,38 @@
           </a:fontRef>
         </p:style>
         <p:txBody>
-          <a:bodyPr wrap="square" lIns="72000" tIns="36000" rIns="72000" bIns="36000" rtlCol="0" anchor="ctr"/>
+          <a:bodyPr wrap="square" lIns="72000" tIns="36000" rIns="72000" bIns="36000" rtlCol="0" anchor="t">
+            <a:normAutofit/>
+          </a:bodyPr>
           <a:lstStyle/>
           <a:p>
-            <a:pPr algn="ctr"/>
+            <a:pPr algn="ctr">
+              <a:spcAft>
+                <a:spcPts val="700"/>
+              </a:spcAft>
+            </a:pPr>
             <a:r>
-              <a:rPr sz="2800" b="1">
-                <a:solidFill>
-                  <a:srgbClr val="FFFFFF"/>
-                </a:solidFill>
-                <a:latin typeface="Calibri"/>
+              <a:rPr sz="2000" b="1">
+                <a:solidFill>
+                  <a:srgbClr val="2ECC71"/>
+                </a:solidFill>
+                <a:latin typeface="Aptos"/>
               </a:rPr>
               <a:t>91.6%</a:t>
             </a:r>
           </a:p>
           <a:p>
-            <a:pPr algn="ctr"/>
+            <a:pPr algn="ctr">
+              <a:spcAft>
+                <a:spcPts val="700"/>
+              </a:spcAft>
+            </a:pPr>
             <a:r>
-              <a:rPr sz="1100">
-                <a:solidFill>
-                  <a:srgbClr val="FFFFFF"/>
-                </a:solidFill>
-                <a:latin typeface="Calibri"/>
+              <a:rPr sz="2000" b="0">
+                <a:solidFill>
+                  <a:srgbClr val="525B69"/>
+                </a:solidFill>
+                <a:latin typeface="Aptos"/>
               </a:rPr>
               <a:t>positive</a:t>
             </a:r>
@@ -9740,7 +13357,7 @@
         </p:nvSpPr>
         <p:spPr>
           <a:xfrm>
-            <a:off x="3372000" y="3763500"/>
+            <a:off x="3372000" y="3594167"/>
             <a:ext cx="2400000" cy="1000000"/>
           </a:xfrm>
           <a:prstGeom prst="roundRect">
@@ -9769,28 +13386,41 @@
           </a:fontRef>
         </p:style>
         <p:txBody>
-          <a:bodyPr wrap="square" lIns="72000" tIns="36000" rIns="72000" bIns="36000" rtlCol="0" anchor="ctr"/>
+          <a:bodyPr wrap="square" lIns="72000" tIns="36000" rIns="72000" bIns="36000" rtlCol="0" anchor="t">
+            <a:normAutofit/>
+          </a:bodyPr>
           <a:lstStyle/>
           <a:p>
-            <a:pPr algn="ctr"/>
+            <a:pPr algn="ctr">
+              <a:spcAft>
+                <a:spcPts val="700"/>
+              </a:spcAft>
+            </a:pPr>
             <a:r>
-              <a:rPr sz="2800" b="1">
-                <a:solidFill>
-                  <a:srgbClr val="FFFFFF"/>
-                </a:solidFill>
-                <a:latin typeface="Calibri"/>
+              <a:rPr sz="2000" b="1" dirty="0">
+                <a:solidFill>
+                  <a:srgbClr val="FF4B4B"/>
+                </a:solidFill>
+                <a:latin typeface="Aptos"/>
               </a:rPr>
               <a:t>4.5%</a:t>
             </a:r>
           </a:p>
           <a:p>
-            <a:pPr algn="ctr"/>
+            <a:pPr algn="ctr">
+              <a:spcAft>
+                <a:spcPts val="700"/>
+              </a:spcAft>
+            </a:pPr>
             <a:r>
-              <a:rPr sz="1100">
-                <a:solidFill>
-                  <a:srgbClr val="FFFFFF"/>
-                </a:solidFill>
-                <a:latin typeface="Calibri"/>
+              <a:rPr sz="2000" b="0" dirty="0">
+                <a:solidFill>
+                  <a:srgbClr val="525B69"/>
+                </a:solidFill>
+                <a:highlight>
+                  <a:srgbClr val="C0C0C0"/>
+                </a:highlight>
+                <a:latin typeface="Aptos"/>
               </a:rPr>
               <a:t>neutral</a:t>
             </a:r>
@@ -9805,7 +13435,7 @@
         </p:nvSpPr>
         <p:spPr>
           <a:xfrm>
-            <a:off x="5922000" y="3763500"/>
+            <a:off x="5922000" y="3594167"/>
             <a:ext cx="2400000" cy="1000000"/>
           </a:xfrm>
           <a:prstGeom prst="roundRect">
@@ -9834,28 +13464,38 @@
           </a:fontRef>
         </p:style>
         <p:txBody>
-          <a:bodyPr wrap="square" lIns="72000" tIns="36000" rIns="72000" bIns="36000" rtlCol="0" anchor="ctr"/>
+          <a:bodyPr wrap="square" lIns="72000" tIns="36000" rIns="72000" bIns="36000" rtlCol="0" anchor="t">
+            <a:normAutofit/>
+          </a:bodyPr>
           <a:lstStyle/>
           <a:p>
-            <a:pPr algn="ctr"/>
+            <a:pPr algn="ctr">
+              <a:spcAft>
+                <a:spcPts val="700"/>
+              </a:spcAft>
+            </a:pPr>
             <a:r>
-              <a:rPr sz="2800" b="1">
-                <a:solidFill>
-                  <a:srgbClr val="FFFFFF"/>
-                </a:solidFill>
-                <a:latin typeface="Calibri"/>
+              <a:rPr sz="2000" b="1">
+                <a:solidFill>
+                  <a:srgbClr val="FF4B4B"/>
+                </a:solidFill>
+                <a:latin typeface="Aptos"/>
               </a:rPr>
               <a:t>4.0%</a:t>
             </a:r>
           </a:p>
           <a:p>
-            <a:pPr algn="ctr"/>
+            <a:pPr algn="ctr">
+              <a:spcAft>
+                <a:spcPts val="700"/>
+              </a:spcAft>
+            </a:pPr>
             <a:r>
-              <a:rPr sz="1100">
-                <a:solidFill>
-                  <a:srgbClr val="FFFFFF"/>
-                </a:solidFill>
-                <a:latin typeface="Calibri"/>
+              <a:rPr sz="2000" b="0">
+                <a:solidFill>
+                  <a:srgbClr val="525B69"/>
+                </a:solidFill>
+                <a:latin typeface="Aptos"/>
               </a:rPr>
               <a:t>negative</a:t>
             </a:r>
@@ -9917,12 +13557,17 @@
                 <a:spcPts val="0"/>
               </a:spcBef>
               <a:spcAft>
-                <a:spcPts val="0"/>
+                <a:spcPts val="700"/>
               </a:spcAft>
               <a:buNone/>
             </a:pPr>
             <a:r>
-              <a:rPr lang="en"/>
+              <a:rPr sz="3000" b="1">
+                <a:solidFill>
+                  <a:srgbClr val="262730"/>
+                </a:solidFill>
+                <a:latin typeface="Aptos"/>
+              </a:rPr>
               <a:t>Model 2 - Clustering</a:t>
             </a:r>
             <a:endParaRPr/>
@@ -9942,7 +13587,7 @@
         <p:spPr>
           <a:xfrm>
             <a:off x="311700" y="1152475"/>
-            <a:ext cx="5000000" cy="2300000"/>
+            <a:ext cx="5000000" cy="2919992"/>
           </a:xfrm>
           <a:prstGeom prst="rect">
             <a:avLst/>
@@ -9950,7 +13595,7 @@
         </p:spPr>
         <p:txBody>
           <a:bodyPr spcFirstLastPara="1" wrap="square" lIns="91425" tIns="91425" rIns="91425" bIns="91425" anchor="t" anchorCtr="0">
-            <a:normAutofit/>
+            <a:normAutofit fontScale="77500" lnSpcReduction="20000"/>
           </a:bodyPr>
           <a:lstStyle/>
           <a:p>
@@ -9959,58 +13604,94 @@
                 <a:spcPts val="0"/>
               </a:spcBef>
               <a:spcAft>
-                <a:spcPts val="0"/>
+                <a:spcPts val="700"/>
               </a:spcAft>
               <a:buNone/>
             </a:pPr>
             <a:r>
-              <a:rPr lang="en" b="1"/>
-              <a:t>Goal: collapse hundreds of raw categories into 4-6 readable groups.</a:t>
+              <a:rPr sz="2200" b="1" dirty="0">
+                <a:solidFill>
+                  <a:srgbClr val="FF4B4B"/>
+                </a:solidFill>
+                <a:latin typeface="Aptos"/>
+              </a:rPr>
+              <a:t>Clustering makes the catalogue understandable.</a:t>
             </a:r>
           </a:p>
           <a:p>
-            <a:pPr marL="0" lvl="0" indent="0" algn="l" rtl="0">
-              <a:spcBef>
-                <a:spcPts val="0"/>
-              </a:spcBef>
-              <a:spcAft>
-                <a:spcPts val="0"/>
-              </a:spcAft>
-              <a:buNone/>
+            <a:pPr>
+              <a:spcAft>
+                <a:spcPts val="700"/>
+              </a:spcAft>
+            </a:pPr>
+            <a:endParaRPr sz="2200" b="1" dirty="0">
+              <a:solidFill>
+                <a:srgbClr val="FF4B4B"/>
+              </a:solidFill>
+              <a:latin typeface="Aptos"/>
+            </a:endParaRPr>
+          </a:p>
+          <a:p>
+            <a:pPr>
+              <a:spcAft>
+                <a:spcPts val="700"/>
+              </a:spcAft>
+              <a:buFont typeface="Wingdings" panose="05000000000000000000" pitchFamily="2" charset="2"/>
+              <a:buChar char="§"/>
             </a:pPr>
             <a:r>
-              <a:rPr lang="en" b="1"/>
-              <a:t>Per-product document: name + categories + sample review text.</a:t>
+              <a:rPr sz="2000" b="0" dirty="0">
+                <a:solidFill>
+                  <a:srgbClr val="262730"/>
+                </a:solidFill>
+                <a:latin typeface="Aptos"/>
+              </a:rPr>
+              <a:t>TF-IDF turns product/category text into features.</a:t>
             </a:r>
           </a:p>
           <a:p>
-            <a:pPr marL="0" lvl="0" indent="0" algn="l" rtl="0">
-              <a:spcBef>
-                <a:spcPts val="0"/>
-              </a:spcBef>
-              <a:spcAft>
-                <a:spcPts val="0"/>
-              </a:spcAft>
-              <a:buNone/>
+            <a:pPr>
+              <a:spcAft>
+                <a:spcPts val="700"/>
+              </a:spcAft>
+              <a:buFont typeface="Wingdings" panose="05000000000000000000" pitchFamily="2" charset="2"/>
+              <a:buChar char="§"/>
             </a:pPr>
             <a:r>
-              <a:rPr lang="en" b="1"/>
-              <a:t>Embeddings via MiniLM, then KMeans with silhouette across k = 4 to 10.</a:t>
+              <a:rPr sz="2000" b="0" dirty="0" err="1">
+                <a:solidFill>
+                  <a:srgbClr val="262730"/>
+                </a:solidFill>
+                <a:latin typeface="Aptos"/>
+              </a:rPr>
+              <a:t>KMeans</a:t>
             </a:r>
-          </a:p>
-          <a:p>
-            <a:pPr marL="0" lvl="0" indent="0" algn="l" rtl="0">
-              <a:spcBef>
-                <a:spcPts val="0"/>
-              </a:spcBef>
-              <a:spcAft>
-                <a:spcPts val="0"/>
-              </a:spcAft>
-              <a:buNone/>
+            <a:r>
+              <a:rPr sz="2000" b="0" dirty="0">
+                <a:solidFill>
+                  <a:srgbClr val="262730"/>
+                </a:solidFill>
+                <a:latin typeface="Aptos"/>
+              </a:rPr>
+              <a:t> groups products into readable categories.</a:t>
+            </a:r>
+          </a:p>
+          <a:p>
+            <a:pPr>
+              <a:spcAft>
+                <a:spcPts val="700"/>
+              </a:spcAft>
+              <a:buFont typeface="Wingdings" panose="05000000000000000000" pitchFamily="2" charset="2"/>
+              <a:buChar char="§"/>
             </a:pPr>
             <a:r>
-              <a:rPr lang="en" b="1"/>
-              <a:t>Cluster names are auto-derived from the most common keywords.</a:t>
+              <a:rPr sz="2000" b="0" dirty="0">
+                <a:solidFill>
+                  <a:srgbClr val="262730"/>
+                </a:solidFill>
+                <a:latin typeface="Aptos"/>
+              </a:rPr>
+              <a:t>The app uses 6 groups so the demo stays easy to explain.</a:t>
             </a:r>
           </a:p>
         </p:txBody>
@@ -10054,84 +13735,40 @@
           </a:fontRef>
         </p:style>
         <p:txBody>
-          <a:bodyPr wrap="square" lIns="108000" tIns="72000" rIns="108000" bIns="72000" rtlCol="0" anchor="ctr"/>
+          <a:bodyPr wrap="square" lIns="108000" tIns="72000" rIns="108000" bIns="72000" rtlCol="0" anchor="t">
+            <a:normAutofit/>
+          </a:bodyPr>
           <a:lstStyle/>
           <a:p>
-            <a:pPr algn="ctr"/>
+            <a:pPr algn="l">
+              <a:spcAft>
+                <a:spcPts val="700"/>
+              </a:spcAft>
+            </a:pPr>
             <a:r>
-              <a:rPr sz="1300" b="1">
-                <a:solidFill>
-                  <a:srgbClr val="4285F4"/>
-                </a:solidFill>
-                <a:latin typeface="Calibri"/>
+              <a:rPr sz="1500" b="1">
+                <a:solidFill>
+                  <a:srgbClr val="262730"/>
+                </a:solidFill>
+                <a:latin typeface="Aptos"/>
               </a:rPr>
-              <a:t>Discovered groups (k = 6)</a:t>
+              <a:t>Discovered groups</a:t>
             </a:r>
           </a:p>
           <a:p>
+            <a:pPr>
+              <a:spcAft>
+                <a:spcPts val="700"/>
+              </a:spcAft>
+            </a:pPr>
             <a:r>
-              <a:rPr sz="1200">
-                <a:solidFill>
-                  <a:srgbClr val="212121"/>
-                </a:solidFill>
-                <a:latin typeface="Calibri"/>
+              <a:rPr sz="1500" b="1">
+                <a:solidFill>
+                  <a:srgbClr val="262730"/>
+                </a:solidFill>
+                <a:latin typeface="Aptos"/>
               </a:rPr>
-              <a:t>Tablet</a:t>
-            </a:r>
-          </a:p>
-          <a:p>
-            <a:r>
-              <a:rPr sz="1200">
-                <a:solidFill>
-                  <a:srgbClr val="212121"/>
-                </a:solidFill>
-                <a:latin typeface="Calibri"/>
-              </a:rPr>
-              <a:t>Laptop / Tablet</a:t>
-            </a:r>
-          </a:p>
-          <a:p>
-            <a:r>
-              <a:rPr sz="1200">
-                <a:solidFill>
-                  <a:srgbClr val="212121"/>
-                </a:solidFill>
-                <a:latin typeface="Calibri"/>
-              </a:rPr>
-              <a:t>Speaker / Audio</a:t>
-            </a:r>
-          </a:p>
-          <a:p>
-            <a:r>
-              <a:rPr sz="1200">
-                <a:solidFill>
-                  <a:srgbClr val="212121"/>
-                </a:solidFill>
-                <a:latin typeface="Calibri"/>
-              </a:rPr>
-              <a:t>Cable</a:t>
-            </a:r>
-          </a:p>
-          <a:p>
-            <a:r>
-              <a:rPr sz="1200">
-                <a:solidFill>
-                  <a:srgbClr val="212121"/>
-                </a:solidFill>
-                <a:latin typeface="Calibri"/>
-              </a:rPr>
-              <a:t>Remote / Voice / Alexa</a:t>
-            </a:r>
-          </a:p>
-          <a:p>
-            <a:r>
-              <a:rPr sz="1200">
-                <a:solidFill>
-                  <a:srgbClr val="212121"/>
-                </a:solidFill>
-                <a:latin typeface="Calibri"/>
-              </a:rPr>
-              <a:t>E-reader</a:t>
+              <a:t>Cable, Tablet, Speaker Audio, Laptop Tablet, Bag Audio Pockets, Remote Voice Alexa</a:t>
             </a:r>
           </a:p>
         </p:txBody>
@@ -10191,13 +13828,18 @@
                 <a:spcPts val="0"/>
               </a:spcBef>
               <a:spcAft>
-                <a:spcPts val="0"/>
+                <a:spcPts val="700"/>
               </a:spcAft>
               <a:buNone/>
             </a:pPr>
             <a:r>
-              <a:rPr lang="en"/>
-              <a:t>Model 2 - Evaluation</a:t>
+              <a:rPr sz="3000" b="1">
+                <a:solidFill>
+                  <a:srgbClr val="262730"/>
+                </a:solidFill>
+                <a:latin typeface="Aptos"/>
+              </a:rPr>
+              <a:t>Clustering result</a:t>
             </a:r>
             <a:endParaRPr/>
           </a:p>
@@ -10233,58 +13875,85 @@
                 <a:spcPts val="0"/>
               </a:spcBef>
               <a:spcAft>
-                <a:spcPts val="0"/>
+                <a:spcPts val="700"/>
               </a:spcAft>
               <a:buNone/>
             </a:pPr>
             <a:r>
-              <a:rPr lang="en" b="1"/>
-              <a:t>Best silhouette in the k = 4 to 6 range, matching the brief.</a:t>
+              <a:rPr sz="2200" b="1" dirty="0">
+                <a:solidFill>
+                  <a:srgbClr val="FF4B4B"/>
+                </a:solidFill>
+                <a:latin typeface="Aptos"/>
+              </a:rPr>
+              <a:t>The choice is practical, not overcomplicated.</a:t>
             </a:r>
           </a:p>
           <a:p>
-            <a:pPr marL="0" lvl="0" indent="0" algn="l" rtl="0">
-              <a:spcBef>
-                <a:spcPts val="0"/>
-              </a:spcBef>
-              <a:spcAft>
-                <a:spcPts val="0"/>
-              </a:spcAft>
-              <a:buNone/>
+            <a:pPr>
+              <a:spcAft>
+                <a:spcPts val="700"/>
+              </a:spcAft>
+            </a:pPr>
+            <a:endParaRPr sz="2200" b="1" dirty="0">
+              <a:solidFill>
+                <a:srgbClr val="FF4B4B"/>
+              </a:solidFill>
+              <a:latin typeface="Aptos"/>
+            </a:endParaRPr>
+          </a:p>
+          <a:p>
+            <a:pPr>
+              <a:spcAft>
+                <a:spcPts val="700"/>
+              </a:spcAft>
+              <a:buFont typeface="Wingdings" panose="05000000000000000000" pitchFamily="2" charset="2"/>
+              <a:buChar char="§"/>
             </a:pPr>
             <a:r>
-              <a:rPr lang="en" b="1"/>
-              <a:t>Cluster sizes stay balanced; no one-product degenerate cluster.</a:t>
+              <a:rPr sz="2000" b="0" dirty="0">
+                <a:solidFill>
+                  <a:srgbClr val="262730"/>
+                </a:solidFill>
+                <a:latin typeface="Aptos"/>
+              </a:rPr>
+              <a:t>Silhouette scores were checked across different k values.</a:t>
             </a:r>
           </a:p>
           <a:p>
-            <a:pPr marL="0" lvl="0" indent="0" algn="l" rtl="0">
-              <a:spcBef>
-                <a:spcPts val="0"/>
-              </a:spcBef>
-              <a:spcAft>
-                <a:spcPts val="0"/>
-              </a:spcAft>
-              <a:buNone/>
+            <a:pPr>
+              <a:spcAft>
+                <a:spcPts val="700"/>
+              </a:spcAft>
+              <a:buFont typeface="Wingdings" panose="05000000000000000000" pitchFamily="2" charset="2"/>
+              <a:buChar char="§"/>
             </a:pPr>
             <a:r>
-              <a:rPr lang="en" b="1"/>
-              <a:t>Eyeball test: the top 5 product names per cluster look coherent.</a:t>
+              <a:rPr sz="2000" b="0" dirty="0">
+                <a:solidFill>
+                  <a:srgbClr val="262730"/>
+                </a:solidFill>
+                <a:latin typeface="Aptos"/>
+              </a:rPr>
+              <a:t>k = 6 gives a good balance between quality and readability.</a:t>
             </a:r>
           </a:p>
           <a:p>
-            <a:pPr marL="0" lvl="0" indent="0" algn="l" rtl="0">
-              <a:spcBef>
-                <a:spcPts val="0"/>
-              </a:spcBef>
-              <a:spcAft>
-                <a:spcPts val="0"/>
-              </a:spcAft>
-              <a:buNone/>
+            <a:pPr>
+              <a:spcAft>
+                <a:spcPts val="700"/>
+              </a:spcAft>
+              <a:buFont typeface="Wingdings" panose="05000000000000000000" pitchFamily="2" charset="2"/>
+              <a:buChar char="§"/>
             </a:pPr>
             <a:r>
-              <a:rPr lang="en" b="1"/>
-              <a:t>Tradeoff chosen: interpretability over a slightly higher silhouette.</a:t>
+              <a:rPr sz="2000" b="0" dirty="0">
+                <a:solidFill>
+                  <a:srgbClr val="262730"/>
+                </a:solidFill>
+                <a:latin typeface="Aptos"/>
+              </a:rPr>
+              <a:t>The groups are understandable enough for the buying-guide flow.</a:t>
             </a:r>
           </a:p>
         </p:txBody>
@@ -10326,30 +13995,40 @@
           </a:fontRef>
         </p:style>
         <p:txBody>
-          <a:bodyPr wrap="square" lIns="72000" tIns="36000" rIns="72000" bIns="36000" rtlCol="0" anchor="ctr"/>
+          <a:bodyPr wrap="square" lIns="72000" tIns="36000" rIns="72000" bIns="36000" rtlCol="0" anchor="t">
+            <a:normAutofit/>
+          </a:bodyPr>
           <a:lstStyle/>
           <a:p>
-            <a:pPr algn="ctr"/>
+            <a:pPr algn="ctr">
+              <a:spcAft>
+                <a:spcPts val="700"/>
+              </a:spcAft>
+            </a:pPr>
             <a:r>
-              <a:rPr sz="2800" b="1">
-                <a:solidFill>
-                  <a:srgbClr val="FFFFFF"/>
-                </a:solidFill>
-                <a:latin typeface="Calibri"/>
+              <a:rPr sz="2000" b="1" dirty="0">
+                <a:solidFill>
+                  <a:srgbClr val="FF4B4B"/>
+                </a:solidFill>
+                <a:latin typeface="Aptos"/>
               </a:rPr>
               <a:t>k = 6</a:t>
             </a:r>
           </a:p>
           <a:p>
-            <a:pPr algn="ctr"/>
+            <a:pPr algn="ctr">
+              <a:spcAft>
+                <a:spcPts val="700"/>
+              </a:spcAft>
+            </a:pPr>
             <a:r>
-              <a:rPr sz="1100">
-                <a:solidFill>
-                  <a:srgbClr val="FFFFFF"/>
-                </a:solidFill>
-                <a:latin typeface="Calibri"/>
+              <a:rPr sz="2000" b="0" dirty="0">
+                <a:solidFill>
+                  <a:srgbClr val="525B69"/>
+                </a:solidFill>
+                <a:latin typeface="Aptos"/>
               </a:rPr>
-              <a:t>chosen for the demo</a:t>
+              <a:t>chosen for demo</a:t>
             </a:r>
           </a:p>
         </p:txBody>
@@ -10409,12 +14088,17 @@
                 <a:spcPts val="0"/>
               </a:spcBef>
               <a:spcAft>
-                <a:spcPts val="0"/>
+                <a:spcPts val="700"/>
               </a:spcAft>
               <a:buNone/>
             </a:pPr>
             <a:r>
-              <a:rPr lang="en"/>
+              <a:rPr sz="3000" b="1">
+                <a:solidFill>
+                  <a:srgbClr val="262730"/>
+                </a:solidFill>
+                <a:latin typeface="Aptos"/>
+              </a:rPr>
               <a:t>Model 3 - Article</a:t>
             </a:r>
             <a:endParaRPr/>
@@ -10433,8 +14117,8 @@
         </p:nvSpPr>
         <p:spPr>
           <a:xfrm>
-            <a:off x="311700" y="1152475"/>
-            <a:ext cx="5000000" cy="2400000"/>
+            <a:off x="311700" y="1152474"/>
+            <a:ext cx="5000000" cy="3698925"/>
           </a:xfrm>
           <a:prstGeom prst="rect">
             <a:avLst/>
@@ -10442,7 +14126,7 @@
         </p:spPr>
         <p:txBody>
           <a:bodyPr spcFirstLastPara="1" wrap="square" lIns="91425" tIns="91425" rIns="91425" bIns="91425" anchor="t" anchorCtr="0">
-            <a:normAutofit/>
+            <a:normAutofit lnSpcReduction="10000"/>
           </a:bodyPr>
           <a:lstStyle/>
           <a:p>
@@ -10451,58 +14135,92 @@
                 <a:spcPts val="0"/>
               </a:spcBef>
               <a:spcAft>
-                <a:spcPts val="0"/>
+                <a:spcPts val="700"/>
               </a:spcAft>
               <a:buNone/>
             </a:pPr>
             <a:r>
-              <a:rPr lang="en"/>
-              <a:t>Goal: write a short buying guide per category.</a:t>
+              <a:rPr sz="2100" b="1" dirty="0">
+                <a:solidFill>
+                  <a:srgbClr val="FF4B4B"/>
+                </a:solidFill>
+                <a:latin typeface="Aptos"/>
+              </a:rPr>
+              <a:t>The final output is human-readable advice.</a:t>
             </a:r>
-          </a:p>
-          <a:p>
-            <a:pPr marL="0" lvl="0" indent="0" algn="l" rtl="0">
-              <a:spcBef>
-                <a:spcPts val="0"/>
-              </a:spcBef>
-              <a:spcAft>
-                <a:spcPts val="0"/>
-              </a:spcAft>
-              <a:buNone/>
+            <a:endParaRPr lang="en-US" sz="2100" b="1" dirty="0">
+              <a:solidFill>
+                <a:srgbClr val="FF4B4B"/>
+              </a:solidFill>
+              <a:latin typeface="Aptos"/>
+            </a:endParaRPr>
+          </a:p>
+          <a:p>
+            <a:pPr marL="114300" indent="0">
+              <a:spcAft>
+                <a:spcPts val="700"/>
+              </a:spcAft>
+              <a:buNone/>
+            </a:pPr>
+            <a:endParaRPr lang="en-US" sz="2100" b="1" dirty="0">
+              <a:solidFill>
+                <a:srgbClr val="FF4B4B"/>
+              </a:solidFill>
+              <a:latin typeface="Aptos"/>
+            </a:endParaRPr>
+          </a:p>
+          <a:p>
+            <a:pPr>
+              <a:spcAft>
+                <a:spcPts val="700"/>
+              </a:spcAft>
+              <a:buFont typeface="Wingdings" panose="05000000000000000000" pitchFamily="2" charset="2"/>
+              <a:buChar char="§"/>
             </a:pPr>
             <a:r>
-              <a:rPr lang="en"/>
-              <a:t>Model: google/flan-t5-base via text2text-generation.</a:t>
+              <a:rPr sz="1900" b="0" dirty="0">
+                <a:solidFill>
+                  <a:srgbClr val="262730"/>
+                </a:solidFill>
+                <a:latin typeface="Aptos"/>
+              </a:rPr>
+              <a:t>FLAN-T5 writes a short article from category insights.</a:t>
             </a:r>
           </a:p>
           <a:p>
-            <a:pPr marL="0" lvl="0" indent="0" algn="l" rtl="0">
-              <a:spcBef>
-                <a:spcPts val="0"/>
-              </a:spcBef>
-              <a:spcAft>
-                <a:spcPts val="0"/>
-              </a:spcAft>
-              <a:buNone/>
+            <a:pPr>
+              <a:spcAft>
+                <a:spcPts val="700"/>
+              </a:spcAft>
+              <a:buFont typeface="Wingdings" panose="05000000000000000000" pitchFamily="2" charset="2"/>
+              <a:buChar char="§"/>
             </a:pPr>
             <a:r>
-              <a:rPr lang="en"/>
-              <a:t>Prompt is built from aggregated facts only, never raw review text.</a:t>
+              <a:rPr sz="1900" b="0" dirty="0">
+                <a:solidFill>
+                  <a:srgbClr val="262730"/>
+                </a:solidFill>
+                <a:latin typeface="Aptos"/>
+              </a:rPr>
+              <a:t>It receives aggregated facts only: top products, scores, and complaints.</a:t>
             </a:r>
           </a:p>
           <a:p>
-            <a:pPr marL="0" lvl="0" indent="0" algn="l" rtl="0">
-              <a:spcBef>
-                <a:spcPts val="0"/>
-              </a:spcBef>
-              <a:spcAft>
-                <a:spcPts val="0"/>
-              </a:spcAft>
-              <a:buNone/>
+            <a:pPr>
+              <a:spcAft>
+                <a:spcPts val="700"/>
+              </a:spcAft>
+              <a:buFont typeface="Wingdings" panose="05000000000000000000" pitchFamily="2" charset="2"/>
+              <a:buChar char="§"/>
             </a:pPr>
             <a:r>
-              <a:rPr lang="en"/>
-              <a:t>Deterministic Wirecutter-style fallback runs if the LLM output fails the gate.</a:t>
+              <a:rPr sz="1900" b="0" dirty="0">
+                <a:solidFill>
+                  <a:srgbClr val="262730"/>
+                </a:solidFill>
+                <a:latin typeface="Aptos"/>
+              </a:rPr>
+              <a:t>A deterministic fallback keeps the app reliable if generation is weak.</a:t>
             </a:r>
           </a:p>
         </p:txBody>
@@ -10515,8 +14233,8 @@
         </p:nvSpPr>
         <p:spPr>
           <a:xfrm>
-            <a:off x="5632300" y="1300000"/>
-            <a:ext cx="3100000" cy="2400000"/>
+            <a:off x="5103446" y="1299999"/>
+            <a:ext cx="3628854" cy="3263533"/>
           </a:xfrm>
           <a:prstGeom prst="roundRect">
             <a:avLst/>
@@ -10546,89 +14264,108 @@
           </a:fontRef>
         </p:style>
         <p:txBody>
-          <a:bodyPr wrap="square" lIns="108000" tIns="72000" rIns="108000" bIns="72000" rtlCol="0" anchor="ctr"/>
+          <a:bodyPr wrap="square" lIns="108000" tIns="72000" rIns="108000" bIns="72000" rtlCol="0" anchor="t">
+            <a:normAutofit/>
+          </a:bodyPr>
           <a:lstStyle/>
           <a:p>
-            <a:pPr algn="ctr"/>
+            <a:pPr algn="l">
+              <a:spcAft>
+                <a:spcPts val="700"/>
+              </a:spcAft>
+            </a:pPr>
             <a:r>
-              <a:rPr sz="1200" b="1">
-                <a:solidFill>
-                  <a:srgbClr val="4285F4"/>
-                </a:solidFill>
-                <a:latin typeface="Calibri"/>
+              <a:rPr sz="1500" b="1" dirty="0">
+                <a:solidFill>
+                  <a:srgbClr val="262730"/>
+                </a:solidFill>
+                <a:latin typeface="Aptos"/>
               </a:rPr>
-              <a:t>Sample - Cable category</a:t>
+              <a:t>Example article output</a:t>
             </a:r>
           </a:p>
           <a:p>
+            <a:pPr>
+              <a:spcAft>
+                <a:spcPts val="700"/>
+              </a:spcAft>
+            </a:pPr>
             <a:r>
-              <a:rPr sz="1100">
-                <a:solidFill>
-                  <a:srgbClr val="212121"/>
-                </a:solidFill>
-                <a:latin typeface="Calibri"/>
+              <a:rPr sz="1500" b="1" dirty="0">
+                <a:solidFill>
+                  <a:srgbClr val="262730"/>
+                </a:solidFill>
+                <a:latin typeface="Aptos"/>
               </a:rPr>
-              <a:t>Best overall: Amazon 9W PowerFast charger</a:t>
+              <a:t>Best overall: Amazon 9W </a:t>
             </a:r>
-          </a:p>
-          <a:p>
-            <a:endParaRPr sz="1100">
-              <a:solidFill>
-                <a:srgbClr val="212121"/>
-              </a:solidFill>
-              <a:latin typeface="Calibri"/>
-            </a:endParaRPr>
-          </a:p>
-          <a:p>
             <a:r>
-              <a:rPr sz="1100">
-                <a:solidFill>
-                  <a:srgbClr val="212121"/>
-                </a:solidFill>
-                <a:latin typeface="Calibri"/>
+              <a:rPr sz="1500" b="1" dirty="0" err="1">
+                <a:solidFill>
+                  <a:srgbClr val="262730"/>
+                </a:solidFill>
+                <a:latin typeface="Aptos"/>
               </a:rPr>
-              <a:t>Why: 4.7 average rating, 93% positive,</a:t>
+              <a:t>PowerFast</a:t>
             </a:r>
-          </a:p>
-          <a:p>
             <a:r>
-              <a:rPr sz="1100">
-                <a:solidFill>
-                  <a:srgbClr val="212121"/>
-                </a:solidFill>
-                <a:latin typeface="Calibri"/>
+              <a:rPr sz="1500" b="1" dirty="0">
+                <a:solidFill>
+                  <a:srgbClr val="262730"/>
+                </a:solidFill>
+                <a:latin typeface="Aptos"/>
               </a:rPr>
-              <a:t>and enough review volume to trust.</a:t>
+              <a:t> charger</a:t>
             </a:r>
           </a:p>
           <a:p>
-            <a:endParaRPr sz="1100">
-              <a:solidFill>
-                <a:srgbClr val="212121"/>
-              </a:solidFill>
-              <a:latin typeface="Calibri"/>
-            </a:endParaRPr>
-          </a:p>
-          <a:p>
+            <a:pPr>
+              <a:spcAft>
+                <a:spcPts val="700"/>
+              </a:spcAft>
+            </a:pPr>
             <a:r>
-              <a:rPr sz="1100">
-                <a:solidFill>
-                  <a:srgbClr val="212121"/>
-                </a:solidFill>
-                <a:latin typeface="Calibri"/>
+              <a:rPr sz="1500" b="1" dirty="0">
+                <a:solidFill>
+                  <a:srgbClr val="262730"/>
+                </a:solidFill>
+                <a:latin typeface="Aptos"/>
               </a:rPr>
-              <a:t>Watch out: charge issues, app issues,</a:t>
+              <a:t>Why: strong rating, high positive share, enough reviews</a:t>
             </a:r>
           </a:p>
           <a:p>
+            <a:pPr>
+              <a:spcAft>
+                <a:spcPts val="700"/>
+              </a:spcAft>
+            </a:pPr>
             <a:r>
-              <a:rPr sz="1100">
-                <a:solidFill>
-                  <a:srgbClr val="212121"/>
-                </a:solidFill>
-                <a:latin typeface="Calibri"/>
+              <a:rPr sz="1500" b="1" dirty="0">
+                <a:solidFill>
+                  <a:srgbClr val="262730"/>
+                </a:solidFill>
+                <a:latin typeface="Aptos"/>
               </a:rPr>
-              <a:t>battery issues, screen issues, wifi issues.</a:t>
+              <a:t>Watch out: charge, app, battery, screen, and </a:t>
+            </a:r>
+            <a:r>
+              <a:rPr sz="1500" b="1" dirty="0" err="1">
+                <a:solidFill>
+                  <a:srgbClr val="262730"/>
+                </a:solidFill>
+                <a:latin typeface="Aptos"/>
+              </a:rPr>
+              <a:t>wifi</a:t>
+            </a:r>
+            <a:r>
+              <a:rPr sz="1500" b="1" dirty="0">
+                <a:solidFill>
+                  <a:srgbClr val="262730"/>
+                </a:solidFill>
+                <a:latin typeface="Aptos"/>
+              </a:rPr>
+              <a:t> issues</a:t>
             </a:r>
           </a:p>
         </p:txBody>
